--- a/chapter03/ASE_3_PSP_better_engineer.pptx
+++ b/chapter03/ASE_3_PSP_better_engineer.pptx
@@ -1,48 +1,48 @@
 
 <file path=ppt/presentation.xml><?xml version="1.0" encoding="utf-8"?>
-<p:presentation xmlns:a="http://schemas.openxmlformats.org/drawingml/2006/main" xmlns:r="http://schemas.openxmlformats.org/officeDocument/2006/relationships" xmlns:p="http://schemas.openxmlformats.org/presentationml/2006/main" saveSubsetFonts="1">
+<p:presentation xmlns:a="http://schemas.openxmlformats.org/drawingml/2006/main" xmlns:r="http://schemas.openxmlformats.org/officeDocument/2006/relationships" xmlns:p="http://schemas.openxmlformats.org/presentationml/2006/main">
   <p:sldMasterIdLst>
-    <p:sldMasterId id="2147483864" r:id="rId4"/>
+    <p:sldMasterId id="2147483648" r:id="rId1"/>
   </p:sldMasterIdLst>
   <p:notesMasterIdLst>
-    <p:notesMasterId r:id="rId40"/>
+    <p:notesMasterId r:id="rId7"/>
   </p:notesMasterIdLst>
   <p:sldIdLst>
-    <p:sldId id="256" r:id="rId5"/>
-    <p:sldId id="257" r:id="rId6"/>
-    <p:sldId id="277" r:id="rId7"/>
-    <p:sldId id="278" r:id="rId8"/>
-    <p:sldId id="265" r:id="rId9"/>
-    <p:sldId id="288" r:id="rId10"/>
-    <p:sldId id="294" r:id="rId11"/>
-    <p:sldId id="266" r:id="rId12"/>
-    <p:sldId id="267" r:id="rId13"/>
-    <p:sldId id="268" r:id="rId14"/>
-    <p:sldId id="269" r:id="rId15"/>
-    <p:sldId id="286" r:id="rId16"/>
-    <p:sldId id="287" r:id="rId17"/>
-    <p:sldId id="272" r:id="rId18"/>
-    <p:sldId id="273" r:id="rId19"/>
-    <p:sldId id="274" r:id="rId20"/>
-    <p:sldId id="270" r:id="rId21"/>
-    <p:sldId id="297" r:id="rId22"/>
-    <p:sldId id="298" r:id="rId23"/>
-    <p:sldId id="299" r:id="rId24"/>
-    <p:sldId id="279" r:id="rId25"/>
-    <p:sldId id="280" r:id="rId26"/>
-    <p:sldId id="284" r:id="rId27"/>
-    <p:sldId id="281" r:id="rId28"/>
-    <p:sldId id="271" r:id="rId29"/>
-    <p:sldId id="275" r:id="rId30"/>
-    <p:sldId id="282" r:id="rId31"/>
-    <p:sldId id="290" r:id="rId32"/>
-    <p:sldId id="295" r:id="rId33"/>
-    <p:sldId id="296" r:id="rId34"/>
-    <p:sldId id="301" r:id="rId35"/>
-    <p:sldId id="300" r:id="rId36"/>
-    <p:sldId id="283" r:id="rId37"/>
-    <p:sldId id="285" r:id="rId38"/>
-    <p:sldId id="291" r:id="rId39"/>
+    <p:sldId id="256" r:id="rId3"/>
+    <p:sldId id="257" r:id="rId4"/>
+    <p:sldId id="277" r:id="rId5"/>
+    <p:sldId id="278" r:id="rId6"/>
+    <p:sldId id="265" r:id="rId8"/>
+    <p:sldId id="288" r:id="rId9"/>
+    <p:sldId id="294" r:id="rId10"/>
+    <p:sldId id="266" r:id="rId11"/>
+    <p:sldId id="267" r:id="rId12"/>
+    <p:sldId id="268" r:id="rId13"/>
+    <p:sldId id="269" r:id="rId14"/>
+    <p:sldId id="286" r:id="rId15"/>
+    <p:sldId id="287" r:id="rId16"/>
+    <p:sldId id="272" r:id="rId17"/>
+    <p:sldId id="273" r:id="rId18"/>
+    <p:sldId id="274" r:id="rId19"/>
+    <p:sldId id="270" r:id="rId20"/>
+    <p:sldId id="297" r:id="rId21"/>
+    <p:sldId id="298" r:id="rId22"/>
+    <p:sldId id="299" r:id="rId23"/>
+    <p:sldId id="279" r:id="rId24"/>
+    <p:sldId id="280" r:id="rId25"/>
+    <p:sldId id="284" r:id="rId26"/>
+    <p:sldId id="281" r:id="rId27"/>
+    <p:sldId id="271" r:id="rId28"/>
+    <p:sldId id="275" r:id="rId29"/>
+    <p:sldId id="282" r:id="rId30"/>
+    <p:sldId id="290" r:id="rId31"/>
+    <p:sldId id="295" r:id="rId32"/>
+    <p:sldId id="296" r:id="rId33"/>
+    <p:sldId id="301" r:id="rId34"/>
+    <p:sldId id="300" r:id="rId35"/>
+    <p:sldId id="283" r:id="rId36"/>
+    <p:sldId id="285" r:id="rId37"/>
+    <p:sldId id="291" r:id="rId38"/>
   </p:sldIdLst>
   <p:sldSz cx="9144000" cy="6858000" type="screen4x3"/>
   <p:notesSz cx="6858000" cy="9144000"/>
@@ -61,7 +61,7 @@
         <a:solidFill>
           <a:schemeClr val="tx1"/>
         </a:solidFill>
-        <a:latin typeface="Arial" charset="0"/>
+        <a:latin typeface="Arial" panose="020B0604020202020204" pitchFamily="34" charset="0"/>
         <a:ea typeface="+mn-ea"/>
         <a:cs typeface="+mn-cs"/>
       </a:defRPr>
@@ -77,7 +77,7 @@
         <a:solidFill>
           <a:schemeClr val="tx1"/>
         </a:solidFill>
-        <a:latin typeface="Arial" charset="0"/>
+        <a:latin typeface="Arial" panose="020B0604020202020204" pitchFamily="34" charset="0"/>
         <a:ea typeface="+mn-ea"/>
         <a:cs typeface="+mn-cs"/>
       </a:defRPr>
@@ -93,7 +93,7 @@
         <a:solidFill>
           <a:schemeClr val="tx1"/>
         </a:solidFill>
-        <a:latin typeface="Arial" charset="0"/>
+        <a:latin typeface="Arial" panose="020B0604020202020204" pitchFamily="34" charset="0"/>
         <a:ea typeface="+mn-ea"/>
         <a:cs typeface="+mn-cs"/>
       </a:defRPr>
@@ -109,7 +109,7 @@
         <a:solidFill>
           <a:schemeClr val="tx1"/>
         </a:solidFill>
-        <a:latin typeface="Arial" charset="0"/>
+        <a:latin typeface="Arial" panose="020B0604020202020204" pitchFamily="34" charset="0"/>
         <a:ea typeface="+mn-ea"/>
         <a:cs typeface="+mn-cs"/>
       </a:defRPr>
@@ -125,7 +125,7 @@
         <a:solidFill>
           <a:schemeClr val="tx1"/>
         </a:solidFill>
-        <a:latin typeface="Arial" charset="0"/>
+        <a:latin typeface="Arial" panose="020B0604020202020204" pitchFamily="34" charset="0"/>
         <a:ea typeface="+mn-ea"/>
         <a:cs typeface="+mn-cs"/>
       </a:defRPr>
@@ -135,7 +135,7 @@
         <a:solidFill>
           <a:schemeClr val="tx1"/>
         </a:solidFill>
-        <a:latin typeface="Arial" charset="0"/>
+        <a:latin typeface="Arial" panose="020B0604020202020204" pitchFamily="34" charset="0"/>
         <a:ea typeface="+mn-ea"/>
         <a:cs typeface="+mn-cs"/>
       </a:defRPr>
@@ -145,7 +145,7 @@
         <a:solidFill>
           <a:schemeClr val="tx1"/>
         </a:solidFill>
-        <a:latin typeface="Arial" charset="0"/>
+        <a:latin typeface="Arial" panose="020B0604020202020204" pitchFamily="34" charset="0"/>
         <a:ea typeface="+mn-ea"/>
         <a:cs typeface="+mn-cs"/>
       </a:defRPr>
@@ -155,7 +155,7 @@
         <a:solidFill>
           <a:schemeClr val="tx1"/>
         </a:solidFill>
-        <a:latin typeface="Arial" charset="0"/>
+        <a:latin typeface="Arial" panose="020B0604020202020204" pitchFamily="34" charset="0"/>
         <a:ea typeface="+mn-ea"/>
         <a:cs typeface="+mn-cs"/>
       </a:defRPr>
@@ -165,7 +165,7 @@
         <a:solidFill>
           <a:schemeClr val="tx1"/>
         </a:solidFill>
-        <a:latin typeface="Arial" charset="0"/>
+        <a:latin typeface="Arial" panose="020B0604020202020204" pitchFamily="34" charset="0"/>
         <a:ea typeface="+mn-ea"/>
         <a:cs typeface="+mn-cs"/>
       </a:defRPr>
@@ -174,12 +174,12 @@
   <p:extLst>
     <p:ext uri="{EFAFB233-063F-42B5-8137-9DF3F51BA10A}">
       <p15:sldGuideLst xmlns:p15="http://schemas.microsoft.com/office/powerpoint/2012/main">
-        <p15:guide id="1" orient="horz" pos="2160">
+        <p15:guide id="1" orient="horz" pos="2160" userDrawn="1">
           <p15:clr>
             <a:srgbClr val="A4A3A4"/>
           </p15:clr>
         </p15:guide>
-        <p15:guide id="2" pos="2880">
+        <p15:guide id="2" pos="2880" userDrawn="1">
           <p15:clr>
             <a:srgbClr val="A4A3A4"/>
           </p15:clr>
@@ -272,8 +272,6 @@
           <a:p>
             <a:fld id="{E4B1B442-110D-40F1-A0D3-D0D26DD945CA}" type="datetimeFigureOut">
               <a:rPr lang="en-US" smtClean="0"/>
-              <a:pPr/>
-              <a:t>2/7/2016</a:t>
             </a:fld>
             <a:endParaRPr lang="en-US"/>
           </a:p>
@@ -342,6 +340,7 @@
               <a:rPr lang="en-US" smtClean="0"/>
               <a:t>Click to edit Master text styles</a:t>
             </a:r>
+            <a:endParaRPr lang="en-US" smtClean="0"/>
           </a:p>
           <a:p>
             <a:pPr lvl="1"/>
@@ -349,6 +348,7 @@
               <a:rPr lang="en-US" smtClean="0"/>
               <a:t>Second level</a:t>
             </a:r>
+            <a:endParaRPr lang="en-US" smtClean="0"/>
           </a:p>
           <a:p>
             <a:pPr lvl="2"/>
@@ -356,6 +356,7 @@
               <a:rPr lang="en-US" smtClean="0"/>
               <a:t>Third level</a:t>
             </a:r>
+            <a:endParaRPr lang="en-US" smtClean="0"/>
           </a:p>
           <a:p>
             <a:pPr lvl="3"/>
@@ -363,6 +364,7 @@
               <a:rPr lang="en-US" smtClean="0"/>
               <a:t>Fourth level</a:t>
             </a:r>
+            <a:endParaRPr lang="en-US" smtClean="0"/>
           </a:p>
           <a:p>
             <a:pPr lvl="4"/>
@@ -434,19 +436,12 @@
           <a:p>
             <a:fld id="{5DFBE8F3-E457-4E14-8249-6B01859045C3}" type="slidenum">
               <a:rPr lang="en-US" smtClean="0"/>
-              <a:pPr/>
-              <a:t>‹#›</a:t>
             </a:fld>
             <a:endParaRPr lang="en-US"/>
           </a:p>
         </p:txBody>
       </p:sp>
     </p:spTree>
-    <p:extLst>
-      <p:ext uri="{BB962C8B-B14F-4D97-AF65-F5344CB8AC3E}">
-        <p14:creationId xmlns:p14="http://schemas.microsoft.com/office/powerpoint/2010/main" val="645970237"/>
-      </p:ext>
-    </p:extLst>
   </p:cSld>
   <p:clrMap bg1="lt1" tx1="dk1" bg2="lt2" tx2="dk2" accent1="accent1" accent2="accent2" accent3="accent3" accent4="accent4" accent5="accent5" accent6="accent6" hlink="hlink" folHlink="folHlink"/>
   <p:notesStyle>
@@ -606,6 +601,7 @@
               <a:rPr lang="en-US" altLang="zh-CN" baseline="0" dirty="0" smtClean="0"/>
               <a:t> is why we want everyone to focus on individual skills,  the right set of skills,  which are the foundation of our team work. </a:t>
             </a:r>
+            <a:endParaRPr lang="en-US" altLang="zh-CN" baseline="0" dirty="0" smtClean="0"/>
           </a:p>
           <a:p>
             <a:endParaRPr lang="en-US" dirty="0"/>
@@ -629,19 +625,12 @@
           <a:p>
             <a:fld id="{5DFBE8F3-E457-4E14-8249-6B01859045C3}" type="slidenum">
               <a:rPr lang="en-US" smtClean="0"/>
-              <a:pPr/>
-              <a:t>4</a:t>
             </a:fld>
             <a:endParaRPr lang="en-US"/>
           </a:p>
         </p:txBody>
       </p:sp>
     </p:spTree>
-    <p:extLst>
-      <p:ext uri="{BB962C8B-B14F-4D97-AF65-F5344CB8AC3E}">
-        <p14:creationId xmlns:p14="http://schemas.microsoft.com/office/powerpoint/2010/main" val="165569790"/>
-      </p:ext>
-    </p:extLst>
   </p:cSld>
   <p:clrMapOvr>
     <a:masterClrMapping/>
@@ -739,19 +728,12 @@
           <a:p>
             <a:fld id="{5DFBE8F3-E457-4E14-8249-6B01859045C3}" type="slidenum">
               <a:rPr lang="en-US" smtClean="0"/>
-              <a:pPr/>
-              <a:t>23</a:t>
             </a:fld>
             <a:endParaRPr lang="en-US"/>
           </a:p>
         </p:txBody>
       </p:sp>
     </p:spTree>
-    <p:extLst>
-      <p:ext uri="{BB962C8B-B14F-4D97-AF65-F5344CB8AC3E}">
-        <p14:creationId xmlns:p14="http://schemas.microsoft.com/office/powerpoint/2010/main" val="71157731"/>
-      </p:ext>
-    </p:extLst>
   </p:cSld>
   <p:clrMapOvr>
     <a:masterClrMapping/>
@@ -817,6 +799,7 @@
               <a:rPr lang="en-US" altLang="zh-CN" baseline="0" dirty="0" smtClean="0"/>
               <a:t>&lt;Jack Welch&gt;</a:t>
             </a:r>
+            <a:endParaRPr lang="en-US" altLang="zh-CN" baseline="0" dirty="0" smtClean="0"/>
           </a:p>
           <a:p>
             <a:endParaRPr lang="en-US" dirty="0"/>
@@ -840,19 +823,12 @@
           <a:p>
             <a:fld id="{5DFBE8F3-E457-4E14-8249-6B01859045C3}" type="slidenum">
               <a:rPr lang="en-US" smtClean="0"/>
-              <a:pPr/>
-              <a:t>26</a:t>
             </a:fld>
             <a:endParaRPr lang="en-US"/>
           </a:p>
         </p:txBody>
       </p:sp>
     </p:spTree>
-    <p:extLst>
-      <p:ext uri="{BB962C8B-B14F-4D97-AF65-F5344CB8AC3E}">
-        <p14:creationId xmlns:p14="http://schemas.microsoft.com/office/powerpoint/2010/main" val="951088154"/>
-      </p:ext>
-    </p:extLst>
   </p:cSld>
   <p:clrMapOvr>
     <a:masterClrMapping/>
@@ -911,6 +887,7 @@
               <a:rPr lang="en-US" dirty="0" smtClean="0"/>
               <a:t>Work is carried out by each individual</a:t>
             </a:r>
+            <a:endParaRPr lang="en-US" dirty="0" smtClean="0"/>
           </a:p>
           <a:p>
             <a:pPr eaLnBrk="1" hangingPunct="1"/>
@@ -918,6 +895,7 @@
               <a:rPr lang="en-US" dirty="0" smtClean="0"/>
               <a:t>Skills as an “Individual Contributor” is important</a:t>
             </a:r>
+            <a:endParaRPr lang="en-US" dirty="0" smtClean="0"/>
           </a:p>
           <a:p>
             <a:endParaRPr lang="en-US" dirty="0"/>
@@ -941,19 +919,12 @@
           <a:p>
             <a:fld id="{5DFBE8F3-E457-4E14-8249-6B01859045C3}" type="slidenum">
               <a:rPr lang="en-US" smtClean="0"/>
-              <a:pPr/>
-              <a:t>5</a:t>
             </a:fld>
             <a:endParaRPr lang="en-US"/>
           </a:p>
         </p:txBody>
       </p:sp>
     </p:spTree>
-    <p:extLst>
-      <p:ext uri="{BB962C8B-B14F-4D97-AF65-F5344CB8AC3E}">
-        <p14:creationId xmlns:p14="http://schemas.microsoft.com/office/powerpoint/2010/main" val="2634694677"/>
-      </p:ext>
-    </p:extLst>
   </p:cSld>
   <p:clrMapOvr>
     <a:masterClrMapping/>
@@ -1021,13 +992,13 @@
               <a:buSzTx/>
               <a:buFontTx/>
               <a:buNone/>
-              <a:tabLst/>
               <a:defRPr/>
             </a:pPr>
             <a:r>
               <a:rPr lang="en-US" dirty="0" smtClean="0"/>
               <a:t>http://www.sei.cmu.edu/library/abstracts/reports/05sr003.cfm</a:t>
             </a:r>
+            <a:endParaRPr lang="en-US" dirty="0" smtClean="0"/>
           </a:p>
           <a:p>
             <a:pPr marL="0" marR="0" indent="0" algn="l" defTabSz="914400" rtl="0" eaLnBrk="1" fontAlgn="auto" latinLnBrk="0" hangingPunct="1">
@@ -1044,7 +1015,6 @@
               <a:buSzTx/>
               <a:buFontTx/>
               <a:buNone/>
-              <a:tabLst/>
               <a:defRPr/>
             </a:pPr>
             <a:endParaRPr lang="en-US" dirty="0" smtClean="0"/>
@@ -1064,7 +1034,6 @@
               <a:buSzTx/>
               <a:buFontTx/>
               <a:buNone/>
-              <a:tabLst/>
               <a:defRPr/>
             </a:pPr>
             <a:r>
@@ -1103,19 +1072,12 @@
           <a:p>
             <a:fld id="{5DFBE8F3-E457-4E14-8249-6B01859045C3}" type="slidenum">
               <a:rPr lang="en-US" smtClean="0"/>
-              <a:pPr/>
-              <a:t>8</a:t>
             </a:fld>
             <a:endParaRPr lang="en-US"/>
           </a:p>
         </p:txBody>
       </p:sp>
     </p:spTree>
-    <p:extLst>
-      <p:ext uri="{BB962C8B-B14F-4D97-AF65-F5344CB8AC3E}">
-        <p14:creationId xmlns:p14="http://schemas.microsoft.com/office/powerpoint/2010/main" val="2048445535"/>
-      </p:ext>
-    </p:extLst>
   </p:cSld>
   <p:clrMapOvr>
     <a:masterClrMapping/>
@@ -1173,10 +1135,6 @@
               <a:rPr lang="en-US" b="1" dirty="0" smtClean="0"/>
               <a:t>PSP1, PSP1.1 (Introduces estimating and planning)</a:t>
             </a:r>
-            <a:r>
-              <a:rPr lang="en-US" dirty="0" smtClean="0"/>
-              <a:t/>
-            </a:r>
             <a:br>
               <a:rPr lang="en-US" dirty="0" smtClean="0"/>
             </a:br>
@@ -1208,19 +1166,12 @@
           <a:p>
             <a:fld id="{5DFBE8F3-E457-4E14-8249-6B01859045C3}" type="slidenum">
               <a:rPr lang="en-US" smtClean="0"/>
-              <a:pPr/>
-              <a:t>10</a:t>
             </a:fld>
             <a:endParaRPr lang="en-US"/>
           </a:p>
         </p:txBody>
       </p:sp>
     </p:spTree>
-    <p:extLst>
-      <p:ext uri="{BB962C8B-B14F-4D97-AF65-F5344CB8AC3E}">
-        <p14:creationId xmlns:p14="http://schemas.microsoft.com/office/powerpoint/2010/main" val="1193778809"/>
-      </p:ext>
-    </p:extLst>
   </p:cSld>
   <p:clrMapOvr>
     <a:masterClrMapping/>
@@ -1288,16 +1239,11 @@
               <a:buSzTx/>
               <a:buFontTx/>
               <a:buNone/>
-              <a:tabLst/>
               <a:defRPr/>
             </a:pPr>
             <a:r>
               <a:rPr lang="en-US" b="1" dirty="0" smtClean="0"/>
               <a:t>PSP2, PSP2.1 (Introduces quality management and design)</a:t>
-            </a:r>
-            <a:r>
-              <a:rPr lang="en-US" dirty="0" smtClean="0"/>
-              <a:t/>
             </a:r>
             <a:br>
               <a:rPr lang="en-US" dirty="0" smtClean="0"/>
@@ -1333,19 +1279,12 @@
           <a:p>
             <a:fld id="{5DFBE8F3-E457-4E14-8249-6B01859045C3}" type="slidenum">
               <a:rPr lang="en-US" smtClean="0"/>
-              <a:pPr/>
-              <a:t>11</a:t>
             </a:fld>
             <a:endParaRPr lang="en-US"/>
           </a:p>
         </p:txBody>
       </p:sp>
     </p:spTree>
-    <p:extLst>
-      <p:ext uri="{BB962C8B-B14F-4D97-AF65-F5344CB8AC3E}">
-        <p14:creationId xmlns:p14="http://schemas.microsoft.com/office/powerpoint/2010/main" val="2528502605"/>
-      </p:ext>
-    </p:extLst>
   </p:cSld>
   <p:clrMapOvr>
     <a:masterClrMapping/>
@@ -1403,132 +1342,154 @@
               <a:rPr lang="en-US" dirty="0" smtClean="0"/>
               <a:t>The key data collected in the PSP tool are time, defect, and size data – the time spent in each phase; when and where defects were injected, found, and fixed; and the size of the product parts. Software developers use many other measures that are derived from these three basic measures to understand and improve their performance. Derived measures include:</a:t>
             </a:r>
+            <a:endParaRPr lang="en-US" dirty="0" smtClean="0"/>
           </a:p>
           <a:p>
             <a:r>
               <a:rPr lang="en-US" dirty="0" smtClean="0"/>
               <a:t>estimation accuracy (size/time)</a:t>
             </a:r>
+            <a:endParaRPr lang="en-US" dirty="0" smtClean="0"/>
           </a:p>
           <a:p>
             <a:r>
               <a:rPr lang="en-US" dirty="0" smtClean="0"/>
               <a:t>prediction intervals (size/time)</a:t>
             </a:r>
+            <a:endParaRPr lang="en-US" dirty="0" smtClean="0"/>
           </a:p>
           <a:p>
             <a:r>
               <a:rPr lang="en-US" dirty="0" smtClean="0"/>
               <a:t>time in phase distribution</a:t>
             </a:r>
+            <a:endParaRPr lang="en-US" dirty="0" smtClean="0"/>
           </a:p>
           <a:p>
             <a:r>
               <a:rPr lang="en-US" dirty="0" smtClean="0"/>
               <a:t>defect injection distribution</a:t>
             </a:r>
+            <a:endParaRPr lang="en-US" dirty="0" smtClean="0"/>
           </a:p>
           <a:p>
             <a:r>
               <a:rPr lang="en-US" dirty="0" smtClean="0"/>
               <a:t>defect removal distribution</a:t>
             </a:r>
+            <a:endParaRPr lang="en-US" dirty="0" smtClean="0"/>
           </a:p>
           <a:p>
             <a:r>
               <a:rPr lang="en-US" dirty="0" smtClean="0"/>
               <a:t>productivity</a:t>
             </a:r>
+            <a:endParaRPr lang="en-US" dirty="0" smtClean="0"/>
           </a:p>
           <a:p>
             <a:r>
               <a:rPr lang="en-US" dirty="0" smtClean="0"/>
               <a:t>reuse percentage</a:t>
             </a:r>
+            <a:endParaRPr lang="en-US" dirty="0" smtClean="0"/>
           </a:p>
           <a:p>
             <a:r>
               <a:rPr lang="en-US" dirty="0" smtClean="0"/>
               <a:t>cost performance index</a:t>
             </a:r>
+            <a:endParaRPr lang="en-US" dirty="0" smtClean="0"/>
           </a:p>
           <a:p>
             <a:r>
               <a:rPr lang="en-US" dirty="0" smtClean="0"/>
               <a:t>planned value</a:t>
             </a:r>
+            <a:endParaRPr lang="en-US" dirty="0" smtClean="0"/>
           </a:p>
           <a:p>
             <a:r>
               <a:rPr lang="en-US" dirty="0" smtClean="0"/>
               <a:t>earned value</a:t>
             </a:r>
+            <a:endParaRPr lang="en-US" dirty="0" smtClean="0"/>
           </a:p>
           <a:p>
             <a:r>
               <a:rPr lang="en-US" dirty="0" smtClean="0"/>
               <a:t>predicted earned value</a:t>
             </a:r>
+            <a:endParaRPr lang="en-US" dirty="0" smtClean="0"/>
           </a:p>
           <a:p>
             <a:r>
               <a:rPr lang="en-US" dirty="0" smtClean="0"/>
               <a:t>defect density</a:t>
             </a:r>
+            <a:endParaRPr lang="en-US" dirty="0" smtClean="0"/>
           </a:p>
           <a:p>
             <a:r>
               <a:rPr lang="en-US" dirty="0" smtClean="0"/>
               <a:t>defect density by phase</a:t>
             </a:r>
+            <a:endParaRPr lang="en-US" dirty="0" smtClean="0"/>
           </a:p>
           <a:p>
             <a:r>
               <a:rPr lang="en-US" dirty="0" smtClean="0"/>
               <a:t>defect removal rate by phase</a:t>
             </a:r>
+            <a:endParaRPr lang="en-US" dirty="0" smtClean="0"/>
           </a:p>
           <a:p>
             <a:r>
               <a:rPr lang="en-US" dirty="0" smtClean="0"/>
               <a:t>defect removal leverage</a:t>
             </a:r>
+            <a:endParaRPr lang="en-US" dirty="0" smtClean="0"/>
           </a:p>
           <a:p>
             <a:r>
               <a:rPr lang="en-US" dirty="0" smtClean="0"/>
               <a:t>review rates</a:t>
             </a:r>
+            <a:endParaRPr lang="en-US" dirty="0" smtClean="0"/>
           </a:p>
           <a:p>
             <a:r>
               <a:rPr lang="en-US" dirty="0" smtClean="0"/>
               <a:t>process yield</a:t>
             </a:r>
+            <a:endParaRPr lang="en-US" dirty="0" smtClean="0"/>
           </a:p>
           <a:p>
             <a:r>
               <a:rPr lang="en-US" dirty="0" smtClean="0"/>
               <a:t>phase yield</a:t>
             </a:r>
+            <a:endParaRPr lang="en-US" dirty="0" smtClean="0"/>
           </a:p>
           <a:p>
             <a:r>
               <a:rPr lang="en-US" dirty="0" smtClean="0"/>
               <a:t>failure cost of quality (COQ)</a:t>
             </a:r>
+            <a:endParaRPr lang="en-US" dirty="0" smtClean="0"/>
           </a:p>
           <a:p>
             <a:r>
               <a:rPr lang="en-US" dirty="0" smtClean="0"/>
               <a:t>appraisal COQ</a:t>
             </a:r>
+            <a:endParaRPr lang="en-US" dirty="0" smtClean="0"/>
           </a:p>
           <a:p>
             <a:r>
               <a:rPr lang="en-US" dirty="0" smtClean="0"/>
               <a:t>appraisal/failure COQ ratio</a:t>
             </a:r>
+            <a:endParaRPr lang="en-US" dirty="0" smtClean="0"/>
           </a:p>
           <a:p>
             <a:endParaRPr lang="en-US" dirty="0"/>
@@ -1552,19 +1513,12 @@
           <a:p>
             <a:fld id="{5DFBE8F3-E457-4E14-8249-6B01859045C3}" type="slidenum">
               <a:rPr lang="en-US" smtClean="0"/>
-              <a:pPr/>
-              <a:t>16</a:t>
             </a:fld>
             <a:endParaRPr lang="en-US"/>
           </a:p>
         </p:txBody>
       </p:sp>
     </p:spTree>
-    <p:extLst>
-      <p:ext uri="{BB962C8B-B14F-4D97-AF65-F5344CB8AC3E}">
-        <p14:creationId xmlns:p14="http://schemas.microsoft.com/office/powerpoint/2010/main" val="1597704913"/>
-      </p:ext>
-    </p:extLst>
   </p:cSld>
   <p:clrMapOvr>
     <a:masterClrMapping/>
@@ -1626,6 +1580,7 @@
               <a:rPr lang="en-US" altLang="zh-CN" baseline="0" dirty="0" smtClean="0"/>
               <a:t> than 7 years in writing. </a:t>
             </a:r>
+            <a:endParaRPr lang="en-US" altLang="zh-CN" baseline="0" dirty="0" smtClean="0"/>
           </a:p>
           <a:p>
             <a:pPr marL="0" marR="0" lvl="1" indent="0" algn="l" defTabSz="914400" rtl="0" eaLnBrk="1" fontAlgn="auto" latinLnBrk="0" hangingPunct="1">
@@ -1642,7 +1597,6 @@
               <a:buSzTx/>
               <a:buFontTx/>
               <a:buNone/>
-              <a:tabLst/>
               <a:defRPr/>
             </a:pPr>
             <a:r>
@@ -1686,19 +1640,12 @@
           <a:p>
             <a:fld id="{5DFBE8F3-E457-4E14-8249-6B01859045C3}" type="slidenum">
               <a:rPr lang="en-US" smtClean="0"/>
-              <a:pPr/>
-              <a:t>17</a:t>
             </a:fld>
             <a:endParaRPr lang="en-US"/>
           </a:p>
         </p:txBody>
       </p:sp>
     </p:spTree>
-    <p:extLst>
-      <p:ext uri="{BB962C8B-B14F-4D97-AF65-F5344CB8AC3E}">
-        <p14:creationId xmlns:p14="http://schemas.microsoft.com/office/powerpoint/2010/main" val="2954737094"/>
-      </p:ext>
-    </p:extLst>
   </p:cSld>
   <p:clrMapOvr>
     <a:masterClrMapping/>
@@ -1760,6 +1707,7 @@
               <a:rPr lang="en-US" altLang="zh-CN" baseline="0" dirty="0" smtClean="0"/>
               <a:t> than 7 years in writing. </a:t>
             </a:r>
+            <a:endParaRPr lang="en-US" altLang="zh-CN" baseline="0" dirty="0" smtClean="0"/>
           </a:p>
           <a:p>
             <a:pPr marL="0" marR="0" lvl="1" indent="0" algn="l" defTabSz="914400" rtl="0" eaLnBrk="1" fontAlgn="auto" latinLnBrk="0" hangingPunct="1">
@@ -1776,7 +1724,6 @@
               <a:buSzTx/>
               <a:buFontTx/>
               <a:buNone/>
-              <a:tabLst/>
               <a:defRPr/>
             </a:pPr>
             <a:r>
@@ -1820,19 +1767,12 @@
           <a:p>
             <a:fld id="{5DFBE8F3-E457-4E14-8249-6B01859045C3}" type="slidenum">
               <a:rPr lang="en-US" smtClean="0"/>
-              <a:pPr/>
-              <a:t>21</a:t>
             </a:fld>
             <a:endParaRPr lang="en-US"/>
           </a:p>
         </p:txBody>
       </p:sp>
     </p:spTree>
-    <p:extLst>
-      <p:ext uri="{BB962C8B-B14F-4D97-AF65-F5344CB8AC3E}">
-        <p14:creationId xmlns:p14="http://schemas.microsoft.com/office/powerpoint/2010/main" val="3053327590"/>
-      </p:ext>
-    </p:extLst>
   </p:cSld>
   <p:clrMapOvr>
     <a:masterClrMapping/>
@@ -1894,6 +1834,7 @@
               <a:rPr lang="en-US" altLang="zh-CN" baseline="0" dirty="0" smtClean="0"/>
               <a:t> than 7 years in writing. </a:t>
             </a:r>
+            <a:endParaRPr lang="en-US" altLang="zh-CN" baseline="0" dirty="0" smtClean="0"/>
           </a:p>
           <a:p>
             <a:pPr marL="0" marR="0" lvl="1" indent="0" algn="l" defTabSz="914400" rtl="0" eaLnBrk="1" fontAlgn="auto" latinLnBrk="0" hangingPunct="1">
@@ -1910,7 +1851,6 @@
               <a:buSzTx/>
               <a:buFontTx/>
               <a:buNone/>
-              <a:tabLst/>
               <a:defRPr/>
             </a:pPr>
             <a:r>
@@ -1954,19 +1894,12 @@
           <a:p>
             <a:fld id="{5DFBE8F3-E457-4E14-8249-6B01859045C3}" type="slidenum">
               <a:rPr lang="en-US" smtClean="0"/>
-              <a:pPr/>
-              <a:t>22</a:t>
             </a:fld>
             <a:endParaRPr lang="en-US"/>
           </a:p>
         </p:txBody>
       </p:sp>
     </p:spTree>
-    <p:extLst>
-      <p:ext uri="{BB962C8B-B14F-4D97-AF65-F5344CB8AC3E}">
-        <p14:creationId xmlns:p14="http://schemas.microsoft.com/office/powerpoint/2010/main" val="1007651275"/>
-      </p:ext>
-    </p:extLst>
   </p:cSld>
   <p:clrMapOvr>
     <a:masterClrMapping/>
@@ -1975,7 +1908,7 @@
 </file>
 
 <file path=ppt/slideLayouts/slideLayout1.xml><?xml version="1.0" encoding="utf-8"?>
-<p:sldLayout xmlns:a="http://schemas.openxmlformats.org/drawingml/2006/main" xmlns:r="http://schemas.openxmlformats.org/officeDocument/2006/relationships" xmlns:p="http://schemas.openxmlformats.org/presentationml/2006/main" showMasterSp="0" type="title" preserve="1">
+<p:sldLayout xmlns:a="http://schemas.openxmlformats.org/drawingml/2006/main" xmlns:r="http://schemas.openxmlformats.org/officeDocument/2006/relationships" xmlns:p="http://schemas.openxmlformats.org/presentationml/2006/main" type="title" preserve="1" showMasterSp="0">
   <p:cSld name="Title Slide">
     <p:bg>
       <p:bgRef idx="1002">
@@ -2074,7 +2007,6 @@
             <a:lvl1pPr algn="l">
               <a:defRPr sz="4700" b="1"/>
             </a:lvl1pPr>
-            <a:extLst/>
           </a:lstStyle>
           <a:p>
             <a:r>
@@ -2192,7 +2124,6 @@
                 </a:solidFill>
               </a:defRPr>
             </a:lvl9pPr>
-            <a:extLst/>
           </a:lstStyle>
           <a:p>
             <a:r>
@@ -2223,10 +2154,6 @@
             </a:pPr>
             <a:fld id="{94D2DE61-01BA-4D63-AB76-0CD3EEDCC786}" type="datetimeFigureOut">
               <a:rPr lang="en-US" smtClean="0"/>
-              <a:pPr>
-                <a:defRPr/>
-              </a:pPr>
-              <a:t>2/7/2016</a:t>
             </a:fld>
             <a:endParaRPr lang="en-US"/>
           </a:p>
@@ -2274,10 +2201,6 @@
             </a:pPr>
             <a:fld id="{96C92FDE-E245-4054-B13C-B2368E1DA6ED}" type="slidenum">
               <a:rPr lang="en-US" smtClean="0"/>
-              <a:pPr>
-                <a:defRPr/>
-              </a:pPr>
-              <a:t>‹#›</a:t>
             </a:fld>
             <a:endParaRPr lang="en-US"/>
           </a:p>
@@ -2403,6 +2326,7 @@
               <a:rPr lang="en-US" smtClean="0"/>
               <a:t>Click to edit Master text styles</a:t>
             </a:r>
+            <a:endParaRPr lang="en-US" smtClean="0"/>
           </a:p>
           <a:p>
             <a:pPr lvl="1" eaLnBrk="1" latinLnBrk="0" hangingPunct="1"/>
@@ -2410,6 +2334,7 @@
               <a:rPr lang="en-US" smtClean="0"/>
               <a:t>Second level</a:t>
             </a:r>
+            <a:endParaRPr lang="en-US" smtClean="0"/>
           </a:p>
           <a:p>
             <a:pPr lvl="2" eaLnBrk="1" latinLnBrk="0" hangingPunct="1"/>
@@ -2417,6 +2342,7 @@
               <a:rPr lang="en-US" smtClean="0"/>
               <a:t>Third level</a:t>
             </a:r>
+            <a:endParaRPr lang="en-US" smtClean="0"/>
           </a:p>
           <a:p>
             <a:pPr lvl="3" eaLnBrk="1" latinLnBrk="0" hangingPunct="1"/>
@@ -2424,6 +2350,7 @@
               <a:rPr lang="en-US" smtClean="0"/>
               <a:t>Fourth level</a:t>
             </a:r>
+            <a:endParaRPr lang="en-US" smtClean="0"/>
           </a:p>
           <a:p>
             <a:pPr lvl="4" eaLnBrk="1" latinLnBrk="0" hangingPunct="1"/>
@@ -2455,10 +2382,6 @@
             </a:pPr>
             <a:fld id="{C881A71F-7706-4309-B98E-D5818D9C4619}" type="datetimeFigureOut">
               <a:rPr lang="en-US" smtClean="0"/>
-              <a:pPr>
-                <a:defRPr/>
-              </a:pPr>
-              <a:t>2/7/2016</a:t>
             </a:fld>
             <a:endParaRPr lang="en-US"/>
           </a:p>
@@ -2506,10 +2429,6 @@
             </a:pPr>
             <a:fld id="{A1F2A420-6221-4AAB-A5CF-E69F38521E1F}" type="slidenum">
               <a:rPr lang="en-US" smtClean="0"/>
-              <a:pPr>
-                <a:defRPr/>
-              </a:pPr>
-              <a:t>‹#›</a:t>
             </a:fld>
             <a:endParaRPr lang="en-US"/>
           </a:p>
@@ -2524,7 +2443,7 @@
 </file>
 
 <file path=ppt/slideLayouts/slideLayout11.xml><?xml version="1.0" encoding="utf-8"?>
-<p:sldLayout xmlns:a="http://schemas.openxmlformats.org/drawingml/2006/main" xmlns:r="http://schemas.openxmlformats.org/officeDocument/2006/relationships" xmlns:p="http://schemas.openxmlformats.org/presentationml/2006/main" showMasterSp="0" type="vertTitleAndTx" preserve="1">
+<p:sldLayout xmlns:a="http://schemas.openxmlformats.org/drawingml/2006/main" xmlns:r="http://schemas.openxmlformats.org/officeDocument/2006/relationships" xmlns:p="http://schemas.openxmlformats.org/presentationml/2006/main" type="vertTitleAndTx" preserve="1" showMasterSp="0">
   <p:cSld name="Vertical Title and Text">
     <p:spTree>
       <p:nvGrpSpPr>
@@ -2690,6 +2609,7 @@
               <a:rPr lang="en-US" smtClean="0"/>
               <a:t>Click to edit Master text styles</a:t>
             </a:r>
+            <a:endParaRPr lang="en-US" smtClean="0"/>
           </a:p>
           <a:p>
             <a:pPr lvl="1" eaLnBrk="1" latinLnBrk="0" hangingPunct="1"/>
@@ -2697,6 +2617,7 @@
               <a:rPr lang="en-US" smtClean="0"/>
               <a:t>Second level</a:t>
             </a:r>
+            <a:endParaRPr lang="en-US" smtClean="0"/>
           </a:p>
           <a:p>
             <a:pPr lvl="2" eaLnBrk="1" latinLnBrk="0" hangingPunct="1"/>
@@ -2704,6 +2625,7 @@
               <a:rPr lang="en-US" smtClean="0"/>
               <a:t>Third level</a:t>
             </a:r>
+            <a:endParaRPr lang="en-US" smtClean="0"/>
           </a:p>
           <a:p>
             <a:pPr lvl="3" eaLnBrk="1" latinLnBrk="0" hangingPunct="1"/>
@@ -2711,6 +2633,7 @@
               <a:rPr lang="en-US" smtClean="0"/>
               <a:t>Fourth level</a:t>
             </a:r>
+            <a:endParaRPr lang="en-US" smtClean="0"/>
           </a:p>
           <a:p>
             <a:pPr lvl="4" eaLnBrk="1" latinLnBrk="0" hangingPunct="1"/>
@@ -2742,10 +2665,6 @@
             </a:pPr>
             <a:fld id="{D273DBF7-E22B-4D4F-86C6-34AA5D685EBC}" type="datetimeFigureOut">
               <a:rPr lang="en-US" smtClean="0"/>
-              <a:pPr>
-                <a:defRPr/>
-              </a:pPr>
-              <a:t>2/7/2016</a:t>
             </a:fld>
             <a:endParaRPr lang="en-US"/>
           </a:p>
@@ -2798,10 +2717,6 @@
             </a:pPr>
             <a:fld id="{A8E88D30-ACB8-4D6F-92A3-FE6BCCC60051}" type="slidenum">
               <a:rPr lang="en-US" smtClean="0"/>
-              <a:pPr>
-                <a:defRPr/>
-              </a:pPr>
-              <a:t>‹#›</a:t>
             </a:fld>
             <a:endParaRPr lang="en-US"/>
           </a:p>
@@ -2880,6 +2795,7 @@
               <a:rPr lang="en-US" smtClean="0"/>
               <a:t>Click to edit Master text styles</a:t>
             </a:r>
+            <a:endParaRPr lang="en-US" smtClean="0"/>
           </a:p>
           <a:p>
             <a:pPr lvl="1" eaLnBrk="1" latinLnBrk="0" hangingPunct="1"/>
@@ -2887,6 +2803,7 @@
               <a:rPr lang="en-US" smtClean="0"/>
               <a:t>Second level</a:t>
             </a:r>
+            <a:endParaRPr lang="en-US" smtClean="0"/>
           </a:p>
           <a:p>
             <a:pPr lvl="2" eaLnBrk="1" latinLnBrk="0" hangingPunct="1"/>
@@ -2894,6 +2811,7 @@
               <a:rPr lang="en-US" smtClean="0"/>
               <a:t>Third level</a:t>
             </a:r>
+            <a:endParaRPr lang="en-US" smtClean="0"/>
           </a:p>
           <a:p>
             <a:pPr lvl="3" eaLnBrk="1" latinLnBrk="0" hangingPunct="1"/>
@@ -2901,6 +2819,7 @@
               <a:rPr lang="en-US" smtClean="0"/>
               <a:t>Fourth level</a:t>
             </a:r>
+            <a:endParaRPr lang="en-US" smtClean="0"/>
           </a:p>
           <a:p>
             <a:pPr lvl="4" eaLnBrk="1" latinLnBrk="0" hangingPunct="1"/>
@@ -2932,10 +2851,6 @@
             </a:pPr>
             <a:fld id="{D6CE455C-D3FD-456F-B85E-96E6744FDB20}" type="datetimeFigureOut">
               <a:rPr lang="en-US" smtClean="0"/>
-              <a:pPr>
-                <a:defRPr/>
-              </a:pPr>
-              <a:t>2/7/2016</a:t>
             </a:fld>
             <a:endParaRPr lang="en-US"/>
           </a:p>
@@ -2983,10 +2898,6 @@
             </a:pPr>
             <a:fld id="{999CE700-0801-4743-9474-BA29402439C4}" type="slidenum">
               <a:rPr lang="en-US" smtClean="0"/>
-              <a:pPr>
-                <a:defRPr/>
-              </a:pPr>
-              <a:t>‹#›</a:t>
             </a:fld>
             <a:endParaRPr lang="en-US"/>
           </a:p>
@@ -3001,7 +2912,7 @@
 </file>
 
 <file path=ppt/slideLayouts/slideLayout3.xml><?xml version="1.0" encoding="utf-8"?>
-<p:sldLayout xmlns:a="http://schemas.openxmlformats.org/drawingml/2006/main" xmlns:r="http://schemas.openxmlformats.org/officeDocument/2006/relationships" xmlns:p="http://schemas.openxmlformats.org/presentationml/2006/main" showMasterSp="0" type="secHead" preserve="1">
+<p:sldLayout xmlns:a="http://schemas.openxmlformats.org/drawingml/2006/main" xmlns:r="http://schemas.openxmlformats.org/officeDocument/2006/relationships" xmlns:p="http://schemas.openxmlformats.org/presentationml/2006/main" type="secHead" preserve="1" showMasterSp="0">
   <p:cSld name="Section Header">
     <p:bg>
       <p:bgRef idx="1002">
@@ -3152,7 +3063,6 @@
             <a:lvl1pPr algn="l">
               <a:defRPr sz="4700" b="1" cap="none" baseline="0"/>
             </a:lvl1pPr>
-            <a:extLst/>
           </a:lstStyle>
           <a:p>
             <a:r>
@@ -3270,7 +3180,6 @@
                 </a:solidFill>
               </a:defRPr>
             </a:lvl9pPr>
-            <a:extLst/>
           </a:lstStyle>
           <a:p>
             <a:pPr lvl="0" eaLnBrk="1" latinLnBrk="0" hangingPunct="1"/>
@@ -3278,6 +3187,7 @@
               <a:rPr kumimoji="0" lang="en-US" smtClean="0"/>
               <a:t>Click to edit Master text styles</a:t>
             </a:r>
+            <a:endParaRPr kumimoji="0" lang="en-US" smtClean="0"/>
           </a:p>
         </p:txBody>
       </p:sp>
@@ -3301,10 +3211,6 @@
             </a:pPr>
             <a:fld id="{2E396A7C-7724-49DB-BE50-5855776DA282}" type="datetimeFigureOut">
               <a:rPr lang="en-US" smtClean="0"/>
-              <a:pPr>
-                <a:defRPr/>
-              </a:pPr>
-              <a:t>2/7/2016</a:t>
             </a:fld>
             <a:endParaRPr lang="en-US"/>
           </a:p>
@@ -3352,10 +3258,6 @@
             </a:pPr>
             <a:fld id="{A73F0ABC-70BC-4F43-9687-9B309C26DB2A}" type="slidenum">
               <a:rPr lang="en-US" smtClean="0"/>
-              <a:pPr>
-                <a:defRPr/>
-              </a:pPr>
-              <a:t>‹#›</a:t>
             </a:fld>
             <a:endParaRPr lang="en-US"/>
           </a:p>
@@ -3455,7 +3357,6 @@
             <a:lvl9pPr>
               <a:defRPr sz="1800"/>
             </a:lvl9pPr>
-            <a:extLst/>
           </a:lstStyle>
           <a:p>
             <a:pPr lvl="0" eaLnBrk="1" latinLnBrk="0" hangingPunct="1"/>
@@ -3463,6 +3364,7 @@
               <a:rPr lang="en-US" smtClean="0"/>
               <a:t>Click to edit Master text styles</a:t>
             </a:r>
+            <a:endParaRPr lang="en-US" smtClean="0"/>
           </a:p>
           <a:p>
             <a:pPr lvl="1" eaLnBrk="1" latinLnBrk="0" hangingPunct="1"/>
@@ -3470,6 +3372,7 @@
               <a:rPr lang="en-US" smtClean="0"/>
               <a:t>Second level</a:t>
             </a:r>
+            <a:endParaRPr lang="en-US" smtClean="0"/>
           </a:p>
           <a:p>
             <a:pPr lvl="2" eaLnBrk="1" latinLnBrk="0" hangingPunct="1"/>
@@ -3477,6 +3380,7 @@
               <a:rPr lang="en-US" smtClean="0"/>
               <a:t>Third level</a:t>
             </a:r>
+            <a:endParaRPr lang="en-US" smtClean="0"/>
           </a:p>
           <a:p>
             <a:pPr lvl="3" eaLnBrk="1" latinLnBrk="0" hangingPunct="1"/>
@@ -3484,6 +3388,7 @@
               <a:rPr lang="en-US" smtClean="0"/>
               <a:t>Fourth level</a:t>
             </a:r>
+            <a:endParaRPr lang="en-US" smtClean="0"/>
           </a:p>
           <a:p>
             <a:pPr lvl="4" eaLnBrk="1" latinLnBrk="0" hangingPunct="1"/>
@@ -3541,7 +3446,6 @@
             <a:lvl9pPr>
               <a:defRPr sz="1800"/>
             </a:lvl9pPr>
-            <a:extLst/>
           </a:lstStyle>
           <a:p>
             <a:pPr lvl="0" eaLnBrk="1" latinLnBrk="0" hangingPunct="1"/>
@@ -3549,6 +3453,7 @@
               <a:rPr lang="en-US" smtClean="0"/>
               <a:t>Click to edit Master text styles</a:t>
             </a:r>
+            <a:endParaRPr lang="en-US" smtClean="0"/>
           </a:p>
           <a:p>
             <a:pPr lvl="1" eaLnBrk="1" latinLnBrk="0" hangingPunct="1"/>
@@ -3556,6 +3461,7 @@
               <a:rPr lang="en-US" smtClean="0"/>
               <a:t>Second level</a:t>
             </a:r>
+            <a:endParaRPr lang="en-US" smtClean="0"/>
           </a:p>
           <a:p>
             <a:pPr lvl="2" eaLnBrk="1" latinLnBrk="0" hangingPunct="1"/>
@@ -3563,6 +3469,7 @@
               <a:rPr lang="en-US" smtClean="0"/>
               <a:t>Third level</a:t>
             </a:r>
+            <a:endParaRPr lang="en-US" smtClean="0"/>
           </a:p>
           <a:p>
             <a:pPr lvl="3" eaLnBrk="1" latinLnBrk="0" hangingPunct="1"/>
@@ -3570,6 +3477,7 @@
               <a:rPr lang="en-US" smtClean="0"/>
               <a:t>Fourth level</a:t>
             </a:r>
+            <a:endParaRPr lang="en-US" smtClean="0"/>
           </a:p>
           <a:p>
             <a:pPr lvl="4" eaLnBrk="1" latinLnBrk="0" hangingPunct="1"/>
@@ -3601,10 +3509,6 @@
             </a:pPr>
             <a:fld id="{69C10974-708E-4997-950B-416EBCB591A0}" type="datetimeFigureOut">
               <a:rPr lang="en-US" smtClean="0"/>
-              <a:pPr>
-                <a:defRPr/>
-              </a:pPr>
-              <a:t>2/7/2016</a:t>
             </a:fld>
             <a:endParaRPr lang="en-US"/>
           </a:p>
@@ -3652,10 +3556,6 @@
             </a:pPr>
             <a:fld id="{30B18713-D1F9-440C-98D7-11A0982A0701}" type="slidenum">
               <a:rPr lang="en-US" smtClean="0"/>
-              <a:pPr>
-                <a:defRPr/>
-              </a:pPr>
-              <a:t>‹#›</a:t>
             </a:fld>
             <a:endParaRPr lang="en-US"/>
           </a:p>
@@ -3703,7 +3603,6 @@
             <a:lvl1pPr>
               <a:defRPr/>
             </a:lvl1pPr>
-            <a:extLst/>
           </a:lstStyle>
           <a:p>
             <a:r>
@@ -3769,7 +3668,6 @@
               <a:buNone/>
               <a:defRPr sz="1600" b="1"/>
             </a:lvl9pPr>
-            <a:extLst/>
           </a:lstStyle>
           <a:p>
             <a:pPr lvl="0" eaLnBrk="1" latinLnBrk="0" hangingPunct="1"/>
@@ -3777,6 +3675,7 @@
               <a:rPr kumimoji="0" lang="en-US" smtClean="0"/>
               <a:t>Click to edit Master text styles</a:t>
             </a:r>
+            <a:endParaRPr kumimoji="0" lang="en-US" smtClean="0"/>
           </a:p>
         </p:txBody>
       </p:sp>
@@ -3826,7 +3725,6 @@
             <a:lvl9pPr>
               <a:defRPr sz="1600"/>
             </a:lvl9pPr>
-            <a:extLst/>
           </a:lstStyle>
           <a:p>
             <a:pPr lvl="0" eaLnBrk="1" latinLnBrk="0" hangingPunct="1"/>
@@ -3834,6 +3732,7 @@
               <a:rPr lang="en-US" smtClean="0"/>
               <a:t>Click to edit Master text styles</a:t>
             </a:r>
+            <a:endParaRPr lang="en-US" smtClean="0"/>
           </a:p>
           <a:p>
             <a:pPr lvl="1" eaLnBrk="1" latinLnBrk="0" hangingPunct="1"/>
@@ -3841,6 +3740,7 @@
               <a:rPr lang="en-US" smtClean="0"/>
               <a:t>Second level</a:t>
             </a:r>
+            <a:endParaRPr lang="en-US" smtClean="0"/>
           </a:p>
           <a:p>
             <a:pPr lvl="2" eaLnBrk="1" latinLnBrk="0" hangingPunct="1"/>
@@ -3848,6 +3748,7 @@
               <a:rPr lang="en-US" smtClean="0"/>
               <a:t>Third level</a:t>
             </a:r>
+            <a:endParaRPr lang="en-US" smtClean="0"/>
           </a:p>
           <a:p>
             <a:pPr lvl="3" eaLnBrk="1" latinLnBrk="0" hangingPunct="1"/>
@@ -3855,6 +3756,7 @@
               <a:rPr lang="en-US" smtClean="0"/>
               <a:t>Fourth level</a:t>
             </a:r>
+            <a:endParaRPr lang="en-US" smtClean="0"/>
           </a:p>
           <a:p>
             <a:pPr lvl="4" eaLnBrk="1" latinLnBrk="0" hangingPunct="1"/>
@@ -3921,7 +3823,6 @@
               <a:buNone/>
               <a:defRPr sz="1600" b="1"/>
             </a:lvl9pPr>
-            <a:extLst/>
           </a:lstStyle>
           <a:p>
             <a:pPr lvl="0" eaLnBrk="1" latinLnBrk="0" hangingPunct="1"/>
@@ -3929,6 +3830,7 @@
               <a:rPr kumimoji="0" lang="en-US" smtClean="0"/>
               <a:t>Click to edit Master text styles</a:t>
             </a:r>
+            <a:endParaRPr kumimoji="0" lang="en-US" smtClean="0"/>
           </a:p>
         </p:txBody>
       </p:sp>
@@ -3978,7 +3880,6 @@
             <a:lvl9pPr>
               <a:defRPr sz="1600"/>
             </a:lvl9pPr>
-            <a:extLst/>
           </a:lstStyle>
           <a:p>
             <a:pPr lvl="0" eaLnBrk="1" latinLnBrk="0" hangingPunct="1"/>
@@ -3986,6 +3887,7 @@
               <a:rPr lang="en-US" smtClean="0"/>
               <a:t>Click to edit Master text styles</a:t>
             </a:r>
+            <a:endParaRPr lang="en-US" smtClean="0"/>
           </a:p>
           <a:p>
             <a:pPr lvl="1" eaLnBrk="1" latinLnBrk="0" hangingPunct="1"/>
@@ -3993,6 +3895,7 @@
               <a:rPr lang="en-US" smtClean="0"/>
               <a:t>Second level</a:t>
             </a:r>
+            <a:endParaRPr lang="en-US" smtClean="0"/>
           </a:p>
           <a:p>
             <a:pPr lvl="2" eaLnBrk="1" latinLnBrk="0" hangingPunct="1"/>
@@ -4000,6 +3903,7 @@
               <a:rPr lang="en-US" smtClean="0"/>
               <a:t>Third level</a:t>
             </a:r>
+            <a:endParaRPr lang="en-US" smtClean="0"/>
           </a:p>
           <a:p>
             <a:pPr lvl="3" eaLnBrk="1" latinLnBrk="0" hangingPunct="1"/>
@@ -4007,6 +3911,7 @@
               <a:rPr lang="en-US" smtClean="0"/>
               <a:t>Fourth level</a:t>
             </a:r>
+            <a:endParaRPr lang="en-US" smtClean="0"/>
           </a:p>
           <a:p>
             <a:pPr lvl="4" eaLnBrk="1" latinLnBrk="0" hangingPunct="1"/>
@@ -4038,10 +3943,6 @@
             </a:pPr>
             <a:fld id="{F816DDEF-5D7B-4ED2-8F62-B3F1C44D6EC5}" type="datetimeFigureOut">
               <a:rPr lang="en-US" smtClean="0"/>
-              <a:pPr>
-                <a:defRPr/>
-              </a:pPr>
-              <a:t>2/7/2016</a:t>
             </a:fld>
             <a:endParaRPr lang="en-US"/>
           </a:p>
@@ -4089,10 +3990,6 @@
             </a:pPr>
             <a:fld id="{189D69AC-A5BC-4B9B-A0CF-168768D6EE1C}" type="slidenum">
               <a:rPr lang="en-US" smtClean="0"/>
-              <a:pPr>
-                <a:defRPr/>
-              </a:pPr>
-              <a:t>‹#›</a:t>
             </a:fld>
             <a:endParaRPr lang="en-US"/>
           </a:p>
@@ -4166,10 +4063,6 @@
             </a:pPr>
             <a:fld id="{FA20EB90-C4D3-4B6B-82CE-1D435DA3ACC1}" type="datetimeFigureOut">
               <a:rPr lang="en-US" smtClean="0"/>
-              <a:pPr>
-                <a:defRPr/>
-              </a:pPr>
-              <a:t>2/7/2016</a:t>
             </a:fld>
             <a:endParaRPr lang="en-US"/>
           </a:p>
@@ -4217,10 +4110,6 @@
             </a:pPr>
             <a:fld id="{5996EA18-ADFC-4118-B2BD-9E16AC42B17C}" type="slidenum">
               <a:rPr lang="en-US" smtClean="0"/>
-              <a:pPr>
-                <a:defRPr/>
-              </a:pPr>
-              <a:t>‹#›</a:t>
             </a:fld>
             <a:endParaRPr lang="en-US"/>
           </a:p>
@@ -4235,7 +4124,7 @@
 </file>
 
 <file path=ppt/slideLayouts/slideLayout7.xml><?xml version="1.0" encoding="utf-8"?>
-<p:sldLayout xmlns:a="http://schemas.openxmlformats.org/drawingml/2006/main" xmlns:r="http://schemas.openxmlformats.org/officeDocument/2006/relationships" xmlns:p="http://schemas.openxmlformats.org/presentationml/2006/main" showMasterSp="0" type="blank" preserve="1">
+<p:sldLayout xmlns:a="http://schemas.openxmlformats.org/drawingml/2006/main" xmlns:r="http://schemas.openxmlformats.org/officeDocument/2006/relationships" xmlns:p="http://schemas.openxmlformats.org/presentationml/2006/main" type="blank" preserve="1" showMasterSp="0">
   <p:cSld name="Blank">
     <p:spTree>
       <p:nvGrpSpPr>
@@ -4271,10 +4160,6 @@
             </a:pPr>
             <a:fld id="{ADB8F2E0-4A51-4E31-9C27-9BC27CEF43F6}" type="datetimeFigureOut">
               <a:rPr lang="en-US" smtClean="0"/>
-              <a:pPr>
-                <a:defRPr/>
-              </a:pPr>
-              <a:t>2/7/2016</a:t>
             </a:fld>
             <a:endParaRPr lang="en-US"/>
           </a:p>
@@ -4322,10 +4207,6 @@
             </a:pPr>
             <a:fld id="{47E8C9AC-B7D4-4681-89F5-BB9F7F0C5160}" type="slidenum">
               <a:rPr lang="en-US" smtClean="0"/>
-              <a:pPr>
-                <a:defRPr/>
-              </a:pPr>
-              <a:t>‹#›</a:t>
             </a:fld>
             <a:endParaRPr lang="en-US"/>
           </a:p>
@@ -4381,7 +4262,6 @@
             <a:lvl1pPr algn="l">
               <a:defRPr sz="2000" b="0"/>
             </a:lvl1pPr>
-            <a:extLst/>
           </a:lstStyle>
           <a:p>
             <a:r>
@@ -4438,7 +4318,6 @@
             <a:lvl9pPr>
               <a:defRPr sz="2000"/>
             </a:lvl9pPr>
-            <a:extLst/>
           </a:lstStyle>
           <a:p>
             <a:pPr lvl="0" eaLnBrk="1" latinLnBrk="0" hangingPunct="1"/>
@@ -4446,6 +4325,7 @@
               <a:rPr lang="en-US" smtClean="0"/>
               <a:t>Click to edit Master text styles</a:t>
             </a:r>
+            <a:endParaRPr lang="en-US" smtClean="0"/>
           </a:p>
           <a:p>
             <a:pPr lvl="1" eaLnBrk="1" latinLnBrk="0" hangingPunct="1"/>
@@ -4453,6 +4333,7 @@
               <a:rPr lang="en-US" smtClean="0"/>
               <a:t>Second level</a:t>
             </a:r>
+            <a:endParaRPr lang="en-US" smtClean="0"/>
           </a:p>
           <a:p>
             <a:pPr lvl="2" eaLnBrk="1" latinLnBrk="0" hangingPunct="1"/>
@@ -4460,6 +4341,7 @@
               <a:rPr lang="en-US" smtClean="0"/>
               <a:t>Third level</a:t>
             </a:r>
+            <a:endParaRPr lang="en-US" smtClean="0"/>
           </a:p>
           <a:p>
             <a:pPr lvl="3" eaLnBrk="1" latinLnBrk="0" hangingPunct="1"/>
@@ -4467,6 +4349,7 @@
               <a:rPr lang="en-US" smtClean="0"/>
               <a:t>Fourth level</a:t>
             </a:r>
+            <a:endParaRPr lang="en-US" smtClean="0"/>
           </a:p>
           <a:p>
             <a:pPr lvl="4" eaLnBrk="1" latinLnBrk="0" hangingPunct="1"/>
@@ -4533,7 +4416,6 @@
               <a:buNone/>
               <a:defRPr sz="900"/>
             </a:lvl9pPr>
-            <a:extLst/>
           </a:lstStyle>
           <a:p>
             <a:pPr lvl="0" eaLnBrk="1" latinLnBrk="0" hangingPunct="1"/>
@@ -4541,6 +4423,7 @@
               <a:rPr kumimoji="0" lang="en-US" smtClean="0"/>
               <a:t>Click to edit Master text styles</a:t>
             </a:r>
+            <a:endParaRPr kumimoji="0" lang="en-US" smtClean="0"/>
           </a:p>
         </p:txBody>
       </p:sp>
@@ -4564,10 +4447,6 @@
             </a:pPr>
             <a:fld id="{0EBCA414-E586-4DAC-83A0-743F3572C47D}" type="datetimeFigureOut">
               <a:rPr lang="en-US" smtClean="0"/>
-              <a:pPr>
-                <a:defRPr/>
-              </a:pPr>
-              <a:t>2/7/2016</a:t>
             </a:fld>
             <a:endParaRPr lang="en-US"/>
           </a:p>
@@ -4615,10 +4494,6 @@
             </a:pPr>
             <a:fld id="{7790AC7A-5470-4EA1-BFDA-3B3E51621204}" type="slidenum">
               <a:rPr lang="en-US" smtClean="0"/>
-              <a:pPr>
-                <a:defRPr/>
-              </a:pPr>
-              <a:t>‹#›</a:t>
             </a:fld>
             <a:endParaRPr lang="en-US"/>
           </a:p>
@@ -4768,7 +4643,6 @@
             <a:lvl1pPr algn="l">
               <a:defRPr sz="2000" b="0"/>
             </a:lvl1pPr>
-            <a:extLst/>
           </a:lstStyle>
           <a:p>
             <a:r>
@@ -4839,7 +4713,6 @@
               <a:buNone/>
               <a:defRPr sz="2000"/>
             </a:lvl9pPr>
-            <a:extLst/>
           </a:lstStyle>
           <a:p>
             <a:r>
@@ -4905,7 +4778,6 @@
               <a:buNone/>
               <a:defRPr sz="900"/>
             </a:lvl9pPr>
-            <a:extLst/>
           </a:lstStyle>
           <a:p>
             <a:pPr lvl="0" eaLnBrk="1" latinLnBrk="0" hangingPunct="1"/>
@@ -4913,6 +4785,7 @@
               <a:rPr kumimoji="0" lang="en-US" smtClean="0"/>
               <a:t>Click to edit Master text styles</a:t>
             </a:r>
+            <a:endParaRPr kumimoji="0" lang="en-US" smtClean="0"/>
           </a:p>
         </p:txBody>
       </p:sp>
@@ -4941,10 +4814,6 @@
             </a:pPr>
             <a:fld id="{D465C755-FB34-4CB9-BCAD-6B3CFD8A9FE6}" type="datetimeFigureOut">
               <a:rPr lang="en-US" smtClean="0"/>
-              <a:pPr>
-                <a:defRPr/>
-              </a:pPr>
-              <a:t>2/7/2016</a:t>
             </a:fld>
             <a:endParaRPr lang="en-US"/>
           </a:p>
@@ -5102,10 +4971,6 @@
             </a:pPr>
             <a:fld id="{00193ABF-DE85-45CF-A5F6-94D6F1803079}" type="slidenum">
               <a:rPr lang="en-US" smtClean="0"/>
-              <a:pPr>
-                <a:defRPr/>
-              </a:pPr>
-              <a:t>‹#›</a:t>
             </a:fld>
             <a:endParaRPr lang="en-US"/>
           </a:p>
@@ -5310,6 +5175,7 @@
               <a:rPr kumimoji="0" lang="en-US" smtClean="0"/>
               <a:t>Click to edit Master text styles</a:t>
             </a:r>
+            <a:endParaRPr kumimoji="0" lang="en-US" smtClean="0"/>
           </a:p>
           <a:p>
             <a:pPr lvl="1" eaLnBrk="1" latinLnBrk="0" hangingPunct="1"/>
@@ -5317,6 +5183,7 @@
               <a:rPr kumimoji="0" lang="en-US" smtClean="0"/>
               <a:t>Second level</a:t>
             </a:r>
+            <a:endParaRPr kumimoji="0" lang="en-US" smtClean="0"/>
           </a:p>
           <a:p>
             <a:pPr lvl="2" eaLnBrk="1" latinLnBrk="0" hangingPunct="1"/>
@@ -5324,6 +5191,7 @@
               <a:rPr kumimoji="0" lang="en-US" smtClean="0"/>
               <a:t>Third level</a:t>
             </a:r>
+            <a:endParaRPr kumimoji="0" lang="en-US" smtClean="0"/>
           </a:p>
           <a:p>
             <a:pPr lvl="3" eaLnBrk="1" latinLnBrk="0" hangingPunct="1"/>
@@ -5331,6 +5199,7 @@
               <a:rPr kumimoji="0" lang="en-US" smtClean="0"/>
               <a:t>Fourth level</a:t>
             </a:r>
+            <a:endParaRPr kumimoji="0" lang="en-US" smtClean="0"/>
           </a:p>
           <a:p>
             <a:pPr lvl="4" eaLnBrk="1" latinLnBrk="0" hangingPunct="1"/>
@@ -5373,7 +5242,6 @@
                 </a:solidFill>
               </a:defRPr>
             </a:lvl1pPr>
-            <a:extLst/>
           </a:lstStyle>
           <a:p>
             <a:pPr>
@@ -5381,10 +5249,6 @@
             </a:pPr>
             <a:fld id="{24CB9ADE-4CFE-4421-8307-57D5B54CCE51}" type="datetimeFigureOut">
               <a:rPr lang="en-US" smtClean="0"/>
-              <a:pPr>
-                <a:defRPr/>
-              </a:pPr>
-              <a:t>2/7/2016</a:t>
             </a:fld>
             <a:endParaRPr lang="en-US"/>
           </a:p>
@@ -5421,7 +5285,6 @@
                 </a:solidFill>
               </a:defRPr>
             </a:lvl1pPr>
-            <a:extLst/>
           </a:lstStyle>
           <a:p>
             <a:pPr>
@@ -5462,7 +5325,6 @@
                 </a:solidFill>
               </a:defRPr>
             </a:lvl1pPr>
-            <a:extLst/>
           </a:lstStyle>
           <a:p>
             <a:pPr>
@@ -5470,10 +5332,6 @@
             </a:pPr>
             <a:fld id="{F2FAA213-5236-4A65-A6DF-FF05540A5036}" type="slidenum">
               <a:rPr lang="en-US" smtClean="0"/>
-              <a:pPr>
-                <a:defRPr/>
-              </a:pPr>
-              <a:t>‹#›</a:t>
             </a:fld>
             <a:endParaRPr lang="en-US"/>
           </a:p>
@@ -5483,17 +5341,17 @@
   </p:cSld>
   <p:clrMap bg1="lt1" tx1="dk1" bg2="lt2" tx2="dk2" accent1="accent1" accent2="accent2" accent3="accent3" accent4="accent4" accent5="accent5" accent6="accent6" hlink="hlink" folHlink="folHlink"/>
   <p:sldLayoutIdLst>
-    <p:sldLayoutId id="2147483865" r:id="rId1"/>
-    <p:sldLayoutId id="2147483866" r:id="rId2"/>
-    <p:sldLayoutId id="2147483867" r:id="rId3"/>
-    <p:sldLayoutId id="2147483868" r:id="rId4"/>
-    <p:sldLayoutId id="2147483869" r:id="rId5"/>
-    <p:sldLayoutId id="2147483870" r:id="rId6"/>
-    <p:sldLayoutId id="2147483871" r:id="rId7"/>
-    <p:sldLayoutId id="2147483872" r:id="rId8"/>
-    <p:sldLayoutId id="2147483873" r:id="rId9"/>
-    <p:sldLayoutId id="2147483874" r:id="rId10"/>
-    <p:sldLayoutId id="2147483875" r:id="rId11"/>
+    <p:sldLayoutId id="2147483649" r:id="rId1"/>
+    <p:sldLayoutId id="2147483650" r:id="rId2"/>
+    <p:sldLayoutId id="2147483651" r:id="rId3"/>
+    <p:sldLayoutId id="2147483652" r:id="rId4"/>
+    <p:sldLayoutId id="2147483653" r:id="rId5"/>
+    <p:sldLayoutId id="2147483654" r:id="rId6"/>
+    <p:sldLayoutId id="2147483655" r:id="rId7"/>
+    <p:sldLayoutId id="2147483656" r:id="rId8"/>
+    <p:sldLayoutId id="2147483657" r:id="rId9"/>
+    <p:sldLayoutId id="2147483658" r:id="rId10"/>
+    <p:sldLayoutId id="2147483659" r:id="rId11"/>
   </p:sldLayoutIdLst>
   <p:txStyles>
     <p:titleStyle>
@@ -5514,10 +5372,9 @@
           <a:cs typeface="+mj-cs"/>
         </a:defRPr>
       </a:lvl1pPr>
-      <a:extLst/>
     </p:titleStyle>
     <p:bodyStyle>
-      <a:lvl1pPr marL="438912" indent="-320040" algn="l" rtl="0" eaLnBrk="1" latinLnBrk="0" hangingPunct="1">
+      <a:lvl1pPr marL="438785" indent="-320040" algn="l" rtl="0" eaLnBrk="1" latinLnBrk="0" hangingPunct="1">
         <a:spcBef>
           <a:spcPts val="0"/>
         </a:spcBef>
@@ -5525,7 +5382,7 @@
           <a:schemeClr val="accent1"/>
         </a:buClr>
         <a:buSzPct val="80000"/>
-        <a:buFont typeface="Wingdings 2"/>
+        <a:buFont typeface="Wingdings 2" panose="05020102010507070707"/>
         <a:buChar char=""/>
         <a:defRPr kumimoji="0" sz="3200" kern="1200">
           <a:solidFill>
@@ -5544,7 +5401,7 @@
           <a:schemeClr val="accent2"/>
         </a:buClr>
         <a:buSzPct val="90000"/>
-        <a:buFont typeface="Wingdings"/>
+        <a:buFont typeface="Wingdings" panose="05000000000000000000"/>
         <a:buChar char=""/>
         <a:defRPr kumimoji="0" sz="2800" kern="1200">
           <a:solidFill>
@@ -5555,14 +5412,14 @@
           <a:cs typeface="+mn-cs"/>
         </a:defRPr>
       </a:lvl2pPr>
-      <a:lvl3pPr marL="996696" indent="-228600" algn="l" rtl="0" eaLnBrk="1" latinLnBrk="0" hangingPunct="1">
+      <a:lvl3pPr marL="996950" indent="-228600" algn="l" rtl="0" eaLnBrk="1" latinLnBrk="0" hangingPunct="1">
         <a:spcBef>
           <a:spcPct val="20000"/>
         </a:spcBef>
         <a:buClr>
           <a:schemeClr val="accent3"/>
         </a:buClr>
-        <a:buFont typeface="Arial"/>
+        <a:buFont typeface="Arial" panose="020B0604020202020204"/>
         <a:buChar char="▪"/>
         <a:defRPr kumimoji="0" sz="2400" kern="1200">
           <a:solidFill>
@@ -5573,14 +5430,14 @@
           <a:cs typeface="+mn-cs"/>
         </a:defRPr>
       </a:lvl3pPr>
-      <a:lvl4pPr marL="1216152" indent="-182880" algn="l" rtl="0" eaLnBrk="1" latinLnBrk="0" hangingPunct="1">
+      <a:lvl4pPr marL="1216025" indent="-182880" algn="l" rtl="0" eaLnBrk="1" latinLnBrk="0" hangingPunct="1">
         <a:spcBef>
           <a:spcPct val="20000"/>
         </a:spcBef>
         <a:buClr>
           <a:schemeClr val="accent4"/>
         </a:buClr>
-        <a:buFont typeface="Arial"/>
+        <a:buFont typeface="Arial" panose="020B0604020202020204"/>
         <a:buChar char="▪"/>
         <a:defRPr kumimoji="0" sz="2000" kern="1200">
           <a:solidFill>
@@ -5591,14 +5448,14 @@
           <a:cs typeface="+mn-cs"/>
         </a:defRPr>
       </a:lvl4pPr>
-      <a:lvl5pPr marL="1426464" indent="-182880" algn="l" rtl="0" eaLnBrk="1" latinLnBrk="0" hangingPunct="1">
+      <a:lvl5pPr marL="1426210" indent="-182880" algn="l" rtl="0" eaLnBrk="1" latinLnBrk="0" hangingPunct="1">
         <a:spcBef>
           <a:spcPct val="20000"/>
         </a:spcBef>
         <a:buClr>
           <a:schemeClr val="accent5"/>
         </a:buClr>
-        <a:buFont typeface="Wingdings 3"/>
+        <a:buFont typeface="Wingdings 3" panose="05040102010807070707"/>
         <a:buChar char=""/>
         <a:defRPr kumimoji="0" lang="en-US" sz="2000" kern="1200" smtClean="0">
           <a:solidFill>
@@ -5609,7 +5466,7 @@
           <a:cs typeface="+mn-cs"/>
         </a:defRPr>
       </a:lvl5pPr>
-      <a:lvl6pPr marL="1627632" indent="-182880" algn="l" rtl="0" eaLnBrk="1" latinLnBrk="0" hangingPunct="1">
+      <a:lvl6pPr marL="1627505" indent="-182880" algn="l" rtl="0" eaLnBrk="1" latinLnBrk="0" hangingPunct="1">
         <a:spcBef>
           <a:spcPct val="20000"/>
         </a:spcBef>
@@ -5617,7 +5474,7 @@
           <a:schemeClr val="accent6"/>
         </a:buClr>
         <a:buSzPct val="100000"/>
-        <a:buFont typeface="Wingdings 2"/>
+        <a:buFont typeface="Wingdings 2" panose="05020102010507070707"/>
         <a:buChar char=""/>
         <a:defRPr kumimoji="0" sz="2000" kern="1200">
           <a:solidFill>
@@ -5636,7 +5493,7 @@
           <a:schemeClr val="accent1"/>
         </a:buClr>
         <a:buSzPct val="100000"/>
-        <a:buFont typeface="Wingdings 2"/>
+        <a:buFont typeface="Wingdings 2" panose="05020102010507070707"/>
         <a:buChar char=""/>
         <a:defRPr kumimoji="0" sz="1800" kern="1200">
           <a:solidFill>
@@ -5647,14 +5504,14 @@
           <a:cs typeface="+mn-cs"/>
         </a:defRPr>
       </a:lvl7pPr>
-      <a:lvl8pPr marL="2029968" indent="-182880" algn="l" rtl="0" eaLnBrk="1" latinLnBrk="0" hangingPunct="1">
+      <a:lvl8pPr marL="2030095" indent="-182880" algn="l" rtl="0" eaLnBrk="1" latinLnBrk="0" hangingPunct="1">
         <a:spcBef>
           <a:spcPct val="20000"/>
         </a:spcBef>
         <a:buClr>
           <a:schemeClr val="accent2"/>
         </a:buClr>
-        <a:buFont typeface="Wingdings 2" pitchFamily="18" charset="2"/>
+        <a:buFont typeface="Wingdings 2" panose="05020102010507070707" pitchFamily="18" charset="2"/>
         <a:buChar char=""/>
         <a:defRPr kumimoji="0" sz="1800" kern="1200">
           <a:solidFill>
@@ -5665,14 +5522,14 @@
           <a:cs typeface="+mn-cs"/>
         </a:defRPr>
       </a:lvl8pPr>
-      <a:lvl9pPr marL="2231136" indent="-182880" algn="l" rtl="0" eaLnBrk="1" latinLnBrk="0" hangingPunct="1">
+      <a:lvl9pPr marL="2231390" indent="-182880" algn="l" rtl="0" eaLnBrk="1" latinLnBrk="0" hangingPunct="1">
         <a:spcBef>
           <a:spcPct val="20000"/>
         </a:spcBef>
         <a:buClr>
           <a:schemeClr val="accent3"/>
         </a:buClr>
-        <a:buFont typeface="Wingdings 2" pitchFamily="18" charset="2"/>
+        <a:buFont typeface="Wingdings 2" panose="05020102010507070707" pitchFamily="18" charset="2"/>
         <a:buChar char=""/>
         <a:defRPr kumimoji="0" sz="1800" kern="1200" baseline="0">
           <a:solidFill>
@@ -5683,7 +5540,6 @@
           <a:cs typeface="+mn-cs"/>
         </a:defRPr>
       </a:lvl9pPr>
-      <a:extLst/>
     </p:bodyStyle>
     <p:otherStyle>
       <a:lvl1pPr marL="0" algn="l" rtl="0" eaLnBrk="1" latinLnBrk="0" hangingPunct="1">
@@ -5776,7 +5632,6 @@
           <a:cs typeface="+mn-cs"/>
         </a:defRPr>
       </a:lvl9pPr>
-      <a:extLst/>
     </p:otherStyle>
   </p:txStyles>
 </p:sldMaster>
@@ -5967,6 +5822,7 @@
               <a:rPr lang="en-US" b="1" dirty="0" smtClean="0"/>
               <a:t>PSP1, PSP1.1 (Introduces estimating and planning)</a:t>
             </a:r>
+            <a:endParaRPr lang="en-US" b="1" dirty="0" smtClean="0"/>
           </a:p>
           <a:p>
             <a:pPr lvl="1"/>
@@ -5982,6 +5838,7 @@
               <a:rPr lang="en-US" dirty="0" smtClean="0"/>
               <a:t> how large a new program will be and prepares a test report (PSP1). </a:t>
             </a:r>
+            <a:endParaRPr lang="en-US" dirty="0" smtClean="0"/>
           </a:p>
           <a:p>
             <a:pPr lvl="1"/>
@@ -5997,6 +5854,7 @@
               <a:rPr lang="en-US" dirty="0" smtClean="0"/>
               <a:t>Each new project will record the actual time spent. </a:t>
             </a:r>
+            <a:endParaRPr lang="en-US" dirty="0" smtClean="0"/>
           </a:p>
           <a:p>
             <a:pPr lvl="1"/>
@@ -6004,6 +5862,7 @@
               <a:rPr lang="en-US" dirty="0" smtClean="0"/>
               <a:t>This information is used for task and schedule planning and estimation (PSP1.1).</a:t>
             </a:r>
+            <a:endParaRPr lang="en-US" dirty="0" smtClean="0"/>
           </a:p>
           <a:p>
             <a:r>
@@ -6014,6 +5873,11 @@
               </a:rPr>
               <a:t>Did you have estimation before Coding? </a:t>
             </a:r>
+            <a:endParaRPr lang="en-US" dirty="0" smtClean="0">
+              <a:solidFill>
+                <a:srgbClr val="FF0000"/>
+              </a:solidFill>
+            </a:endParaRPr>
           </a:p>
           <a:p>
             <a:r>
@@ -6125,6 +5989,7 @@
               <a:rPr lang="en-US" dirty="0" smtClean="0"/>
               <a:t>PSP2 adds two new phases: </a:t>
             </a:r>
+            <a:endParaRPr lang="en-US" dirty="0" smtClean="0"/>
           </a:p>
           <a:p>
             <a:pPr lvl="1"/>
@@ -6152,6 +6017,7 @@
               <a:rPr lang="en-US" dirty="0" smtClean="0"/>
               <a:t>eview. </a:t>
             </a:r>
+            <a:endParaRPr lang="en-US" dirty="0" smtClean="0"/>
           </a:p>
           <a:p>
             <a:pPr lvl="1"/>
@@ -6159,6 +6025,7 @@
               <a:rPr lang="en-US" dirty="0" smtClean="0"/>
               <a:t>Defect Prevention and removal are the focus at the PSP2. </a:t>
             </a:r>
+            <a:endParaRPr lang="en-US" dirty="0" smtClean="0"/>
           </a:p>
           <a:p>
             <a:pPr lvl="1"/>
@@ -6166,12 +6033,14 @@
               <a:rPr lang="en-US" dirty="0" smtClean="0"/>
               <a:t>Engineers construct and use checklists for design and code reviews. </a:t>
             </a:r>
+            <a:endParaRPr lang="en-US" dirty="0" smtClean="0"/>
           </a:p>
           <a:p>
             <a:r>
               <a:rPr lang="en-US" dirty="0" smtClean="0"/>
               <a:t>PSP2.1 introduces design specification and analysis techniques</a:t>
             </a:r>
+            <a:endParaRPr lang="en-US" dirty="0" smtClean="0"/>
           </a:p>
           <a:p>
             <a:r>
@@ -6182,6 +6051,11 @@
               </a:rPr>
               <a:t>Did you do Self-review of your design?</a:t>
             </a:r>
+            <a:endParaRPr lang="en-US" dirty="0" smtClean="0">
+              <a:solidFill>
+                <a:srgbClr val="FF0000"/>
+              </a:solidFill>
+            </a:endParaRPr>
           </a:p>
           <a:p>
             <a:r>
@@ -6304,18 +6178,25 @@
               </a:rPr>
               <a:t>0</a:t>
             </a:r>
+            <a:endParaRPr lang="en-US" sz="2800" b="1" dirty="0" smtClean="0">
+              <a:solidFill>
+                <a:srgbClr val="FF0000"/>
+              </a:solidFill>
+            </a:endParaRPr>
           </a:p>
           <a:p>
             <a:r>
               <a:rPr lang="en-US" sz="2800" dirty="0" smtClean="0"/>
               <a:t>Planning</a:t>
             </a:r>
+            <a:endParaRPr lang="en-US" sz="2800" dirty="0" smtClean="0"/>
           </a:p>
           <a:p>
             <a:r>
               <a:rPr lang="en-US" sz="2800" dirty="0" smtClean="0"/>
               <a:t>Development</a:t>
             </a:r>
+            <a:endParaRPr lang="en-US" sz="2800" dirty="0" smtClean="0"/>
           </a:p>
           <a:p>
             <a:pPr lvl="1"/>
@@ -6323,6 +6204,7 @@
               <a:rPr lang="en-US" sz="2400" dirty="0" smtClean="0"/>
               <a:t>Design</a:t>
             </a:r>
+            <a:endParaRPr lang="en-US" sz="2400" dirty="0" smtClean="0"/>
           </a:p>
           <a:p>
             <a:pPr lvl="1"/>
@@ -6330,6 +6212,7 @@
               <a:rPr lang="en-US" sz="2400" dirty="0" smtClean="0"/>
               <a:t>Coding</a:t>
             </a:r>
+            <a:endParaRPr lang="en-US" sz="2400" dirty="0" smtClean="0"/>
           </a:p>
           <a:p>
             <a:pPr lvl="1"/>
@@ -6337,21 +6220,21 @@
               <a:rPr lang="en-US" sz="2400" dirty="0" smtClean="0"/>
               <a:t>Test</a:t>
             </a:r>
+            <a:endParaRPr lang="en-US" sz="2400" dirty="0" smtClean="0"/>
           </a:p>
           <a:p>
             <a:r>
               <a:rPr lang="en-US" sz="2800" dirty="0" smtClean="0"/>
               <a:t>Postmortem</a:t>
             </a:r>
+            <a:endParaRPr lang="en-US" sz="2800" dirty="0" smtClean="0"/>
           </a:p>
         </p:txBody>
       </p:sp>
       <p:sp>
         <p:nvSpPr>
           <p:cNvPr id="4" name="Content Placeholder 2"/>
-          <p:cNvSpPr txBox="1">
-            <a:spLocks/>
-          </p:cNvSpPr>
+          <p:cNvSpPr txBox="1"/>
           <p:nvPr/>
         </p:nvSpPr>
         <p:spPr>
@@ -6377,7 +6260,7 @@
               <a:spcBef>
                 <a:spcPct val="20000"/>
               </a:spcBef>
-              <a:buFont typeface="Arial" pitchFamily="34" charset="0"/>
+              <a:buFont typeface="Arial" panose="020B0604020202020204" pitchFamily="34" charset="0"/>
               <a:buChar char="•"/>
               <a:defRPr sz="3200" kern="1200">
                 <a:solidFill>
@@ -6392,7 +6275,7 @@
               <a:spcBef>
                 <a:spcPct val="20000"/>
               </a:spcBef>
-              <a:buFont typeface="Arial" pitchFamily="34" charset="0"/>
+              <a:buFont typeface="Arial" panose="020B0604020202020204" pitchFamily="34" charset="0"/>
               <a:buChar char="–"/>
               <a:defRPr sz="2800" kern="1200">
                 <a:solidFill>
@@ -6407,7 +6290,7 @@
               <a:spcBef>
                 <a:spcPct val="20000"/>
               </a:spcBef>
-              <a:buFont typeface="Arial" pitchFamily="34" charset="0"/>
+              <a:buFont typeface="Arial" panose="020B0604020202020204" pitchFamily="34" charset="0"/>
               <a:buChar char="•"/>
               <a:defRPr sz="2400" kern="1200">
                 <a:solidFill>
@@ -6422,7 +6305,7 @@
               <a:spcBef>
                 <a:spcPct val="20000"/>
               </a:spcBef>
-              <a:buFont typeface="Arial" pitchFamily="34" charset="0"/>
+              <a:buFont typeface="Arial" panose="020B0604020202020204" pitchFamily="34" charset="0"/>
               <a:buChar char="–"/>
               <a:defRPr sz="2000" kern="1200">
                 <a:solidFill>
@@ -6437,7 +6320,7 @@
               <a:spcBef>
                 <a:spcPct val="20000"/>
               </a:spcBef>
-              <a:buFont typeface="Arial" pitchFamily="34" charset="0"/>
+              <a:buFont typeface="Arial" panose="020B0604020202020204" pitchFamily="34" charset="0"/>
               <a:buChar char="»"/>
               <a:defRPr sz="2000" kern="1200">
                 <a:solidFill>
@@ -6452,7 +6335,7 @@
               <a:spcBef>
                 <a:spcPct val="20000"/>
               </a:spcBef>
-              <a:buFont typeface="Arial" pitchFamily="34" charset="0"/>
+              <a:buFont typeface="Arial" panose="020B0604020202020204" pitchFamily="34" charset="0"/>
               <a:buChar char="•"/>
               <a:defRPr sz="2000" kern="1200">
                 <a:solidFill>
@@ -6467,7 +6350,7 @@
               <a:spcBef>
                 <a:spcPct val="20000"/>
               </a:spcBef>
-              <a:buFont typeface="Arial" pitchFamily="34" charset="0"/>
+              <a:buFont typeface="Arial" panose="020B0604020202020204" pitchFamily="34" charset="0"/>
               <a:buChar char="•"/>
               <a:defRPr sz="2000" kern="1200">
                 <a:solidFill>
@@ -6482,7 +6365,7 @@
               <a:spcBef>
                 <a:spcPct val="20000"/>
               </a:spcBef>
-              <a:buFont typeface="Arial" pitchFamily="34" charset="0"/>
+              <a:buFont typeface="Arial" panose="020B0604020202020204" pitchFamily="34" charset="0"/>
               <a:buChar char="•"/>
               <a:defRPr sz="2000" kern="1200">
                 <a:solidFill>
@@ -6497,7 +6380,7 @@
               <a:spcBef>
                 <a:spcPct val="20000"/>
               </a:spcBef>
-              <a:buFont typeface="Arial" pitchFamily="34" charset="0"/>
+              <a:buFont typeface="Arial" panose="020B0604020202020204" pitchFamily="34" charset="0"/>
               <a:buChar char="•"/>
               <a:defRPr sz="2000" kern="1200">
                 <a:solidFill>
@@ -6522,18 +6405,25 @@
               </a:rPr>
               <a:t>0.1</a:t>
             </a:r>
+            <a:endParaRPr lang="en-US" sz="2000" b="1" dirty="0" smtClean="0">
+              <a:solidFill>
+                <a:srgbClr val="FF0000"/>
+              </a:solidFill>
+            </a:endParaRPr>
           </a:p>
           <a:p>
             <a:r>
               <a:rPr lang="en-US" sz="2000" dirty="0" smtClean="0"/>
               <a:t>Planning</a:t>
             </a:r>
+            <a:endParaRPr lang="en-US" sz="2000" dirty="0" smtClean="0"/>
           </a:p>
           <a:p>
             <a:r>
               <a:rPr lang="en-US" sz="2000" dirty="0" smtClean="0"/>
               <a:t>Development</a:t>
             </a:r>
+            <a:endParaRPr lang="en-US" sz="2000" dirty="0" smtClean="0"/>
           </a:p>
           <a:p>
             <a:pPr lvl="1"/>
@@ -6545,6 +6435,11 @@
               </a:rPr>
               <a:t>Coding Standard</a:t>
             </a:r>
+            <a:endParaRPr lang="en-US" sz="1800" b="1" dirty="0" smtClean="0">
+              <a:solidFill>
+                <a:srgbClr val="FF0000"/>
+              </a:solidFill>
+            </a:endParaRPr>
           </a:p>
           <a:p>
             <a:pPr lvl="1"/>
@@ -6552,6 +6447,7 @@
               <a:rPr lang="en-US" sz="1800" dirty="0" smtClean="0"/>
               <a:t>Design</a:t>
             </a:r>
+            <a:endParaRPr lang="en-US" sz="1800" dirty="0" smtClean="0"/>
           </a:p>
           <a:p>
             <a:pPr lvl="1"/>
@@ -6559,6 +6455,7 @@
               <a:rPr lang="en-US" sz="1800" dirty="0" smtClean="0"/>
               <a:t>Coding</a:t>
             </a:r>
+            <a:endParaRPr lang="en-US" sz="1800" dirty="0" smtClean="0"/>
           </a:p>
           <a:p>
             <a:pPr lvl="1"/>
@@ -6566,6 +6463,7 @@
               <a:rPr lang="en-US" sz="1800" dirty="0" smtClean="0"/>
               <a:t>Test</a:t>
             </a:r>
+            <a:endParaRPr lang="en-US" sz="1800" dirty="0" smtClean="0"/>
           </a:p>
           <a:p>
             <a:r>
@@ -6576,12 +6474,18 @@
               </a:rPr>
               <a:t>Size Measurement</a:t>
             </a:r>
+            <a:endParaRPr lang="en-US" sz="2000" b="1" dirty="0" smtClean="0">
+              <a:solidFill>
+                <a:srgbClr val="FF0000"/>
+              </a:solidFill>
+            </a:endParaRPr>
           </a:p>
           <a:p>
             <a:r>
               <a:rPr lang="en-US" sz="2000" dirty="0" smtClean="0"/>
               <a:t>Postmortem</a:t>
             </a:r>
+            <a:endParaRPr lang="en-US" sz="2000" dirty="0" smtClean="0"/>
           </a:p>
           <a:p>
             <a:r>
@@ -6592,15 +6496,18 @@
               </a:rPr>
               <a:t>Process Improvement Plan</a:t>
             </a:r>
+            <a:endParaRPr lang="en-US" sz="2000" b="1" dirty="0" smtClean="0">
+              <a:solidFill>
+                <a:srgbClr val="FF0000"/>
+              </a:solidFill>
+            </a:endParaRPr>
           </a:p>
         </p:txBody>
       </p:sp>
       <p:sp>
         <p:nvSpPr>
           <p:cNvPr id="5" name="Content Placeholder 2"/>
-          <p:cNvSpPr txBox="1">
-            <a:spLocks/>
-          </p:cNvSpPr>
+          <p:cNvSpPr txBox="1"/>
           <p:nvPr/>
         </p:nvSpPr>
         <p:spPr>
@@ -6621,7 +6528,7 @@
               <a:spcBef>
                 <a:spcPct val="20000"/>
               </a:spcBef>
-              <a:buFont typeface="Arial" pitchFamily="34" charset="0"/>
+              <a:buFont typeface="Arial" panose="020B0604020202020204" pitchFamily="34" charset="0"/>
               <a:buChar char="•"/>
               <a:defRPr sz="3200" kern="1200">
                 <a:solidFill>
@@ -6636,7 +6543,7 @@
               <a:spcBef>
                 <a:spcPct val="20000"/>
               </a:spcBef>
-              <a:buFont typeface="Arial" pitchFamily="34" charset="0"/>
+              <a:buFont typeface="Arial" panose="020B0604020202020204" pitchFamily="34" charset="0"/>
               <a:buChar char="–"/>
               <a:defRPr sz="2800" kern="1200">
                 <a:solidFill>
@@ -6651,7 +6558,7 @@
               <a:spcBef>
                 <a:spcPct val="20000"/>
               </a:spcBef>
-              <a:buFont typeface="Arial" pitchFamily="34" charset="0"/>
+              <a:buFont typeface="Arial" panose="020B0604020202020204" pitchFamily="34" charset="0"/>
               <a:buChar char="•"/>
               <a:defRPr sz="2400" kern="1200">
                 <a:solidFill>
@@ -6666,7 +6573,7 @@
               <a:spcBef>
                 <a:spcPct val="20000"/>
               </a:spcBef>
-              <a:buFont typeface="Arial" pitchFamily="34" charset="0"/>
+              <a:buFont typeface="Arial" panose="020B0604020202020204" pitchFamily="34" charset="0"/>
               <a:buChar char="–"/>
               <a:defRPr sz="2000" kern="1200">
                 <a:solidFill>
@@ -6681,7 +6588,7 @@
               <a:spcBef>
                 <a:spcPct val="20000"/>
               </a:spcBef>
-              <a:buFont typeface="Arial" pitchFamily="34" charset="0"/>
+              <a:buFont typeface="Arial" panose="020B0604020202020204" pitchFamily="34" charset="0"/>
               <a:buChar char="»"/>
               <a:defRPr sz="2000" kern="1200">
                 <a:solidFill>
@@ -6696,7 +6603,7 @@
               <a:spcBef>
                 <a:spcPct val="20000"/>
               </a:spcBef>
-              <a:buFont typeface="Arial" pitchFamily="34" charset="0"/>
+              <a:buFont typeface="Arial" panose="020B0604020202020204" pitchFamily="34" charset="0"/>
               <a:buChar char="•"/>
               <a:defRPr sz="2000" kern="1200">
                 <a:solidFill>
@@ -6711,7 +6618,7 @@
               <a:spcBef>
                 <a:spcPct val="20000"/>
               </a:spcBef>
-              <a:buFont typeface="Arial" pitchFamily="34" charset="0"/>
+              <a:buFont typeface="Arial" panose="020B0604020202020204" pitchFamily="34" charset="0"/>
               <a:buChar char="•"/>
               <a:defRPr sz="2000" kern="1200">
                 <a:solidFill>
@@ -6726,7 +6633,7 @@
               <a:spcBef>
                 <a:spcPct val="20000"/>
               </a:spcBef>
-              <a:buFont typeface="Arial" pitchFamily="34" charset="0"/>
+              <a:buFont typeface="Arial" panose="020B0604020202020204" pitchFamily="34" charset="0"/>
               <a:buChar char="•"/>
               <a:defRPr sz="2000" kern="1200">
                 <a:solidFill>
@@ -6741,7 +6648,7 @@
               <a:spcBef>
                 <a:spcPct val="20000"/>
               </a:spcBef>
-              <a:buFont typeface="Arial" pitchFamily="34" charset="0"/>
+              <a:buFont typeface="Arial" panose="020B0604020202020204" pitchFamily="34" charset="0"/>
               <a:buChar char="•"/>
               <a:defRPr sz="2000" kern="1200">
                 <a:solidFill>
@@ -6761,9 +6668,7 @@
       <p:sp>
         <p:nvSpPr>
           <p:cNvPr id="6" name="Content Placeholder 2"/>
-          <p:cNvSpPr txBox="1">
-            <a:spLocks/>
-          </p:cNvSpPr>
+          <p:cNvSpPr txBox="1"/>
           <p:nvPr/>
         </p:nvSpPr>
         <p:spPr>
@@ -6789,7 +6694,7 @@
               <a:spcBef>
                 <a:spcPct val="20000"/>
               </a:spcBef>
-              <a:buFont typeface="Arial" pitchFamily="34" charset="0"/>
+              <a:buFont typeface="Arial" panose="020B0604020202020204" pitchFamily="34" charset="0"/>
               <a:buChar char="•"/>
               <a:defRPr sz="3200" kern="1200">
                 <a:solidFill>
@@ -6804,7 +6709,7 @@
               <a:spcBef>
                 <a:spcPct val="20000"/>
               </a:spcBef>
-              <a:buFont typeface="Arial" pitchFamily="34" charset="0"/>
+              <a:buFont typeface="Arial" panose="020B0604020202020204" pitchFamily="34" charset="0"/>
               <a:buChar char="–"/>
               <a:defRPr sz="2800" kern="1200">
                 <a:solidFill>
@@ -6819,7 +6724,7 @@
               <a:spcBef>
                 <a:spcPct val="20000"/>
               </a:spcBef>
-              <a:buFont typeface="Arial" pitchFamily="34" charset="0"/>
+              <a:buFont typeface="Arial" panose="020B0604020202020204" pitchFamily="34" charset="0"/>
               <a:buChar char="•"/>
               <a:defRPr sz="2400" kern="1200">
                 <a:solidFill>
@@ -6834,7 +6739,7 @@
               <a:spcBef>
                 <a:spcPct val="20000"/>
               </a:spcBef>
-              <a:buFont typeface="Arial" pitchFamily="34" charset="0"/>
+              <a:buFont typeface="Arial" panose="020B0604020202020204" pitchFamily="34" charset="0"/>
               <a:buChar char="–"/>
               <a:defRPr sz="2000" kern="1200">
                 <a:solidFill>
@@ -6849,7 +6754,7 @@
               <a:spcBef>
                 <a:spcPct val="20000"/>
               </a:spcBef>
-              <a:buFont typeface="Arial" pitchFamily="34" charset="0"/>
+              <a:buFont typeface="Arial" panose="020B0604020202020204" pitchFamily="34" charset="0"/>
               <a:buChar char="»"/>
               <a:defRPr sz="2000" kern="1200">
                 <a:solidFill>
@@ -6864,7 +6769,7 @@
               <a:spcBef>
                 <a:spcPct val="20000"/>
               </a:spcBef>
-              <a:buFont typeface="Arial" pitchFamily="34" charset="0"/>
+              <a:buFont typeface="Arial" panose="020B0604020202020204" pitchFamily="34" charset="0"/>
               <a:buChar char="•"/>
               <a:defRPr sz="2000" kern="1200">
                 <a:solidFill>
@@ -6879,7 +6784,7 @@
               <a:spcBef>
                 <a:spcPct val="20000"/>
               </a:spcBef>
-              <a:buFont typeface="Arial" pitchFamily="34" charset="0"/>
+              <a:buFont typeface="Arial" panose="020B0604020202020204" pitchFamily="34" charset="0"/>
               <a:buChar char="•"/>
               <a:defRPr sz="2000" kern="1200">
                 <a:solidFill>
@@ -6894,7 +6799,7 @@
               <a:spcBef>
                 <a:spcPct val="20000"/>
               </a:spcBef>
-              <a:buFont typeface="Arial" pitchFamily="34" charset="0"/>
+              <a:buFont typeface="Arial" panose="020B0604020202020204" pitchFamily="34" charset="0"/>
               <a:buChar char="•"/>
               <a:defRPr sz="2000" kern="1200">
                 <a:solidFill>
@@ -6909,7 +6814,7 @@
               <a:spcBef>
                 <a:spcPct val="20000"/>
               </a:spcBef>
-              <a:buFont typeface="Arial" pitchFamily="34" charset="0"/>
+              <a:buFont typeface="Arial" panose="020B0604020202020204" pitchFamily="34" charset="0"/>
               <a:buChar char="•"/>
               <a:defRPr sz="2000" kern="1200">
                 <a:solidFill>
@@ -6934,12 +6839,18 @@
               </a:rPr>
               <a:t>1</a:t>
             </a:r>
+            <a:endParaRPr lang="en-US" b="1" dirty="0" smtClean="0">
+              <a:solidFill>
+                <a:srgbClr val="FF0000"/>
+              </a:solidFill>
+            </a:endParaRPr>
           </a:p>
           <a:p>
             <a:r>
               <a:rPr lang="en-US" dirty="0" smtClean="0"/>
               <a:t>Planning</a:t>
             </a:r>
+            <a:endParaRPr lang="en-US" dirty="0" smtClean="0"/>
           </a:p>
           <a:p>
             <a:pPr lvl="1"/>
@@ -6955,12 +6866,14 @@
               <a:rPr lang="en-US" dirty="0" smtClean="0"/>
               <a:t> </a:t>
             </a:r>
+            <a:endParaRPr lang="en-US" dirty="0" smtClean="0"/>
           </a:p>
           <a:p>
             <a:r>
               <a:rPr lang="en-US" dirty="0" smtClean="0"/>
               <a:t>Development</a:t>
             </a:r>
+            <a:endParaRPr lang="en-US" dirty="0" smtClean="0"/>
           </a:p>
           <a:p>
             <a:pPr lvl="1"/>
@@ -6968,6 +6881,7 @@
               <a:rPr lang="en-US" dirty="0" smtClean="0"/>
               <a:t>Coding Standard</a:t>
             </a:r>
+            <a:endParaRPr lang="en-US" dirty="0" smtClean="0"/>
           </a:p>
           <a:p>
             <a:pPr lvl="1"/>
@@ -6975,6 +6889,7 @@
               <a:rPr lang="en-US" dirty="0" smtClean="0"/>
               <a:t>Design</a:t>
             </a:r>
+            <a:endParaRPr lang="en-US" dirty="0" smtClean="0"/>
           </a:p>
           <a:p>
             <a:pPr lvl="1"/>
@@ -6982,6 +6897,7 @@
               <a:rPr lang="en-US" dirty="0" smtClean="0"/>
               <a:t>Coding</a:t>
             </a:r>
+            <a:endParaRPr lang="en-US" dirty="0" smtClean="0"/>
           </a:p>
           <a:p>
             <a:pPr lvl="1"/>
@@ -6989,6 +6905,7 @@
               <a:rPr lang="en-US" dirty="0" smtClean="0"/>
               <a:t>Test</a:t>
             </a:r>
+            <a:endParaRPr lang="en-US" dirty="0" smtClean="0"/>
           </a:p>
           <a:p>
             <a:r>
@@ -6999,33 +6916,36 @@
               </a:rPr>
               <a:t>Test Report</a:t>
             </a:r>
+            <a:endParaRPr lang="en-US" b="1" dirty="0" smtClean="0">
+              <a:solidFill>
+                <a:srgbClr val="FF0000"/>
+              </a:solidFill>
+            </a:endParaRPr>
           </a:p>
           <a:p>
             <a:r>
               <a:rPr lang="en-US" dirty="0" smtClean="0"/>
               <a:t>Size Measurement</a:t>
             </a:r>
+            <a:endParaRPr lang="en-US" dirty="0" smtClean="0"/>
           </a:p>
           <a:p>
             <a:r>
               <a:rPr lang="en-US" dirty="0" smtClean="0"/>
               <a:t>Postmortem</a:t>
             </a:r>
+            <a:endParaRPr lang="en-US" dirty="0" smtClean="0"/>
           </a:p>
           <a:p>
             <a:r>
               <a:rPr lang="en-US" dirty="0" smtClean="0"/>
               <a:t>Process Improvement Plan</a:t>
             </a:r>
+            <a:endParaRPr lang="en-US" dirty="0" smtClean="0"/>
           </a:p>
         </p:txBody>
       </p:sp>
     </p:spTree>
-    <p:extLst>
-      <p:ext uri="{BB962C8B-B14F-4D97-AF65-F5344CB8AC3E}">
-        <p14:creationId xmlns:p14="http://schemas.microsoft.com/office/powerpoint/2010/main" val="3264438971"/>
-      </p:ext>
-    </p:extLst>
   </p:cSld>
   <p:clrMapOvr>
     <a:masterClrMapping/>
@@ -7468,7 +7388,7 @@
       </p:par>
     </p:tnLst>
     <p:bldLst>
-      <p:bldP spid="3" grpId="0" build="p" animBg="1"/>
+      <p:bldP spid="3" grpId="0" animBg="1" build="p"/>
       <p:bldP spid="4" grpId="0" animBg="1"/>
       <p:bldP spid="6" grpId="0" animBg="1"/>
     </p:bldLst>
@@ -7549,7 +7469,7 @@
               <a:spcBef>
                 <a:spcPct val="20000"/>
               </a:spcBef>
-              <a:buFont typeface="Arial" pitchFamily="34" charset="0"/>
+              <a:buFont typeface="Arial" panose="020B0604020202020204" pitchFamily="34" charset="0"/>
               <a:buChar char="•"/>
               <a:defRPr sz="3200" kern="1200">
                 <a:solidFill>
@@ -7564,7 +7484,7 @@
               <a:spcBef>
                 <a:spcPct val="20000"/>
               </a:spcBef>
-              <a:buFont typeface="Arial" pitchFamily="34" charset="0"/>
+              <a:buFont typeface="Arial" panose="020B0604020202020204" pitchFamily="34" charset="0"/>
               <a:buChar char="–"/>
               <a:defRPr sz="2800" kern="1200">
                 <a:solidFill>
@@ -7579,7 +7499,7 @@
               <a:spcBef>
                 <a:spcPct val="20000"/>
               </a:spcBef>
-              <a:buFont typeface="Arial" pitchFamily="34" charset="0"/>
+              <a:buFont typeface="Arial" panose="020B0604020202020204" pitchFamily="34" charset="0"/>
               <a:buChar char="•"/>
               <a:defRPr sz="2400" kern="1200">
                 <a:solidFill>
@@ -7594,7 +7514,7 @@
               <a:spcBef>
                 <a:spcPct val="20000"/>
               </a:spcBef>
-              <a:buFont typeface="Arial" pitchFamily="34" charset="0"/>
+              <a:buFont typeface="Arial" panose="020B0604020202020204" pitchFamily="34" charset="0"/>
               <a:buChar char="–"/>
               <a:defRPr sz="2000" kern="1200">
                 <a:solidFill>
@@ -7609,7 +7529,7 @@
               <a:spcBef>
                 <a:spcPct val="20000"/>
               </a:spcBef>
-              <a:buFont typeface="Arial" pitchFamily="34" charset="0"/>
+              <a:buFont typeface="Arial" panose="020B0604020202020204" pitchFamily="34" charset="0"/>
               <a:buChar char="»"/>
               <a:defRPr sz="2000" kern="1200">
                 <a:solidFill>
@@ -7624,7 +7544,7 @@
               <a:spcBef>
                 <a:spcPct val="20000"/>
               </a:spcBef>
-              <a:buFont typeface="Arial" pitchFamily="34" charset="0"/>
+              <a:buFont typeface="Arial" panose="020B0604020202020204" pitchFamily="34" charset="0"/>
               <a:buChar char="•"/>
               <a:defRPr sz="2000" kern="1200">
                 <a:solidFill>
@@ -7639,7 +7559,7 @@
               <a:spcBef>
                 <a:spcPct val="20000"/>
               </a:spcBef>
-              <a:buFont typeface="Arial" pitchFamily="34" charset="0"/>
+              <a:buFont typeface="Arial" panose="020B0604020202020204" pitchFamily="34" charset="0"/>
               <a:buChar char="•"/>
               <a:defRPr sz="2000" kern="1200">
                 <a:solidFill>
@@ -7654,7 +7574,7 @@
               <a:spcBef>
                 <a:spcPct val="20000"/>
               </a:spcBef>
-              <a:buFont typeface="Arial" pitchFamily="34" charset="0"/>
+              <a:buFont typeface="Arial" panose="020B0604020202020204" pitchFamily="34" charset="0"/>
               <a:buChar char="•"/>
               <a:defRPr sz="2000" kern="1200">
                 <a:solidFill>
@@ -7669,7 +7589,7 @@
               <a:spcBef>
                 <a:spcPct val="20000"/>
               </a:spcBef>
-              <a:buFont typeface="Arial" pitchFamily="34" charset="0"/>
+              <a:buFont typeface="Arial" panose="020B0604020202020204" pitchFamily="34" charset="0"/>
               <a:buChar char="•"/>
               <a:defRPr sz="2000" kern="1200">
                 <a:solidFill>
@@ -7694,12 +7614,18 @@
               </a:rPr>
               <a:t>1.1</a:t>
             </a:r>
+            <a:endParaRPr lang="en-US" b="1" dirty="0" smtClean="0">
+              <a:solidFill>
+                <a:srgbClr val="FF0000"/>
+              </a:solidFill>
+            </a:endParaRPr>
           </a:p>
           <a:p>
             <a:r>
               <a:rPr lang="en-US" dirty="0" smtClean="0"/>
               <a:t>Planning</a:t>
             </a:r>
+            <a:endParaRPr lang="en-US" dirty="0" smtClean="0"/>
           </a:p>
           <a:p>
             <a:pPr lvl="1"/>
@@ -7715,12 +7641,14 @@
               <a:rPr lang="en-US" dirty="0" smtClean="0"/>
               <a:t> </a:t>
             </a:r>
+            <a:endParaRPr lang="en-US" dirty="0" smtClean="0"/>
           </a:p>
           <a:p>
             <a:r>
               <a:rPr lang="en-US" dirty="0" smtClean="0"/>
               <a:t>Development</a:t>
             </a:r>
+            <a:endParaRPr lang="en-US" dirty="0" smtClean="0"/>
           </a:p>
           <a:p>
             <a:pPr lvl="1"/>
@@ -7728,6 +7656,7 @@
               <a:rPr lang="en-US" dirty="0" smtClean="0"/>
               <a:t>Coding Standard</a:t>
             </a:r>
+            <a:endParaRPr lang="en-US" dirty="0" smtClean="0"/>
           </a:p>
           <a:p>
             <a:pPr lvl="1"/>
@@ -7735,6 +7664,7 @@
               <a:rPr lang="en-US" dirty="0" smtClean="0"/>
               <a:t>Design</a:t>
             </a:r>
+            <a:endParaRPr lang="en-US" dirty="0" smtClean="0"/>
           </a:p>
           <a:p>
             <a:pPr lvl="1"/>
@@ -7742,6 +7672,7 @@
               <a:rPr lang="en-US" dirty="0" smtClean="0"/>
               <a:t>Coding</a:t>
             </a:r>
+            <a:endParaRPr lang="en-US" dirty="0" smtClean="0"/>
           </a:p>
           <a:p>
             <a:pPr lvl="1"/>
@@ -7749,6 +7680,7 @@
               <a:rPr lang="en-US" dirty="0" smtClean="0"/>
               <a:t>Test</a:t>
             </a:r>
+            <a:endParaRPr lang="en-US" dirty="0" smtClean="0"/>
           </a:p>
           <a:p>
             <a:r>
@@ -7759,39 +7691,46 @@
               </a:rPr>
               <a:t>Record Time Spent</a:t>
             </a:r>
+            <a:endParaRPr lang="en-US" b="1" dirty="0" smtClean="0">
+              <a:solidFill>
+                <a:srgbClr val="FF0000"/>
+              </a:solidFill>
+            </a:endParaRPr>
           </a:p>
           <a:p>
             <a:r>
               <a:rPr lang="en-US" dirty="0" smtClean="0"/>
               <a:t>Test Report</a:t>
             </a:r>
+            <a:endParaRPr lang="en-US" dirty="0" smtClean="0"/>
           </a:p>
           <a:p>
             <a:r>
               <a:rPr lang="en-US" dirty="0" smtClean="0"/>
               <a:t>Size Measurement</a:t>
             </a:r>
+            <a:endParaRPr lang="en-US" dirty="0" smtClean="0"/>
           </a:p>
           <a:p>
             <a:r>
               <a:rPr lang="en-US" dirty="0" smtClean="0"/>
               <a:t>Postmortem</a:t>
             </a:r>
+            <a:endParaRPr lang="en-US" dirty="0" smtClean="0"/>
           </a:p>
           <a:p>
             <a:r>
               <a:rPr lang="en-US" dirty="0" smtClean="0"/>
               <a:t>Process Improvement Plan</a:t>
             </a:r>
+            <a:endParaRPr lang="en-US" dirty="0" smtClean="0"/>
           </a:p>
         </p:txBody>
       </p:sp>
       <p:sp>
         <p:nvSpPr>
           <p:cNvPr id="5" name="Content Placeholder 2"/>
-          <p:cNvSpPr txBox="1">
-            <a:spLocks/>
-          </p:cNvSpPr>
+          <p:cNvSpPr txBox="1"/>
           <p:nvPr/>
         </p:nvSpPr>
         <p:spPr>
@@ -7812,7 +7751,7 @@
               <a:spcBef>
                 <a:spcPct val="20000"/>
               </a:spcBef>
-              <a:buFont typeface="Arial" pitchFamily="34" charset="0"/>
+              <a:buFont typeface="Arial" panose="020B0604020202020204" pitchFamily="34" charset="0"/>
               <a:buChar char="•"/>
               <a:defRPr sz="3200" kern="1200">
                 <a:solidFill>
@@ -7827,7 +7766,7 @@
               <a:spcBef>
                 <a:spcPct val="20000"/>
               </a:spcBef>
-              <a:buFont typeface="Arial" pitchFamily="34" charset="0"/>
+              <a:buFont typeface="Arial" panose="020B0604020202020204" pitchFamily="34" charset="0"/>
               <a:buChar char="–"/>
               <a:defRPr sz="2800" kern="1200">
                 <a:solidFill>
@@ -7842,7 +7781,7 @@
               <a:spcBef>
                 <a:spcPct val="20000"/>
               </a:spcBef>
-              <a:buFont typeface="Arial" pitchFamily="34" charset="0"/>
+              <a:buFont typeface="Arial" panose="020B0604020202020204" pitchFamily="34" charset="0"/>
               <a:buChar char="•"/>
               <a:defRPr sz="2400" kern="1200">
                 <a:solidFill>
@@ -7857,7 +7796,7 @@
               <a:spcBef>
                 <a:spcPct val="20000"/>
               </a:spcBef>
-              <a:buFont typeface="Arial" pitchFamily="34" charset="0"/>
+              <a:buFont typeface="Arial" panose="020B0604020202020204" pitchFamily="34" charset="0"/>
               <a:buChar char="–"/>
               <a:defRPr sz="2000" kern="1200">
                 <a:solidFill>
@@ -7872,7 +7811,7 @@
               <a:spcBef>
                 <a:spcPct val="20000"/>
               </a:spcBef>
-              <a:buFont typeface="Arial" pitchFamily="34" charset="0"/>
+              <a:buFont typeface="Arial" panose="020B0604020202020204" pitchFamily="34" charset="0"/>
               <a:buChar char="»"/>
               <a:defRPr sz="2000" kern="1200">
                 <a:solidFill>
@@ -7887,7 +7826,7 @@
               <a:spcBef>
                 <a:spcPct val="20000"/>
               </a:spcBef>
-              <a:buFont typeface="Arial" pitchFamily="34" charset="0"/>
+              <a:buFont typeface="Arial" panose="020B0604020202020204" pitchFamily="34" charset="0"/>
               <a:buChar char="•"/>
               <a:defRPr sz="2000" kern="1200">
                 <a:solidFill>
@@ -7902,7 +7841,7 @@
               <a:spcBef>
                 <a:spcPct val="20000"/>
               </a:spcBef>
-              <a:buFont typeface="Arial" pitchFamily="34" charset="0"/>
+              <a:buFont typeface="Arial" panose="020B0604020202020204" pitchFamily="34" charset="0"/>
               <a:buChar char="•"/>
               <a:defRPr sz="2000" kern="1200">
                 <a:solidFill>
@@ -7917,7 +7856,7 @@
               <a:spcBef>
                 <a:spcPct val="20000"/>
               </a:spcBef>
-              <a:buFont typeface="Arial" pitchFamily="34" charset="0"/>
+              <a:buFont typeface="Arial" panose="020B0604020202020204" pitchFamily="34" charset="0"/>
               <a:buChar char="•"/>
               <a:defRPr sz="2000" kern="1200">
                 <a:solidFill>
@@ -7932,7 +7871,7 @@
               <a:spcBef>
                 <a:spcPct val="20000"/>
               </a:spcBef>
-              <a:buFont typeface="Arial" pitchFamily="34" charset="0"/>
+              <a:buFont typeface="Arial" panose="020B0604020202020204" pitchFamily="34" charset="0"/>
               <a:buChar char="•"/>
               <a:defRPr sz="2000" kern="1200">
                 <a:solidFill>
@@ -7952,9 +7891,7 @@
       <p:sp>
         <p:nvSpPr>
           <p:cNvPr id="10" name="Content Placeholder 2"/>
-          <p:cNvSpPr txBox="1">
-            <a:spLocks/>
-          </p:cNvSpPr>
+          <p:cNvSpPr txBox="1"/>
           <p:nvPr/>
         </p:nvSpPr>
         <p:spPr>
@@ -7984,7 +7921,7 @@
                 <a:schemeClr val="accent1"/>
               </a:buClr>
               <a:buSzPct val="85000"/>
-              <a:buFont typeface="Arial" pitchFamily="34" charset="0"/>
+              <a:buFont typeface="Arial" panose="020B0604020202020204" pitchFamily="34" charset="0"/>
               <a:buChar char="•"/>
               <a:defRPr sz="3200" kern="1200">
                 <a:solidFill>
@@ -8003,7 +7940,7 @@
                 <a:schemeClr val="accent1"/>
               </a:buClr>
               <a:buSzPct val="85000"/>
-              <a:buFont typeface="Arial" pitchFamily="34" charset="0"/>
+              <a:buFont typeface="Arial" panose="020B0604020202020204" pitchFamily="34" charset="0"/>
               <a:buChar char="–"/>
               <a:defRPr sz="2800" kern="1200">
                 <a:solidFill>
@@ -8022,7 +7959,7 @@
                 <a:schemeClr val="accent1"/>
               </a:buClr>
               <a:buSzPct val="90000"/>
-              <a:buFont typeface="Arial" pitchFamily="34" charset="0"/>
+              <a:buFont typeface="Arial" panose="020B0604020202020204" pitchFamily="34" charset="0"/>
               <a:buChar char="•"/>
               <a:defRPr sz="2400" kern="1200">
                 <a:solidFill>
@@ -8040,7 +7977,7 @@
               <a:buClr>
                 <a:schemeClr val="accent1"/>
               </a:buClr>
-              <a:buFont typeface="Arial" pitchFamily="34" charset="0"/>
+              <a:buFont typeface="Arial" panose="020B0604020202020204" pitchFamily="34" charset="0"/>
               <a:buChar char="–"/>
               <a:defRPr sz="2000" kern="1200">
                 <a:solidFill>
@@ -8059,7 +7996,7 @@
                 <a:schemeClr val="accent1"/>
               </a:buClr>
               <a:buSzPct val="100000"/>
-              <a:buFont typeface="Arial" pitchFamily="34" charset="0"/>
+              <a:buFont typeface="Arial" panose="020B0604020202020204" pitchFamily="34" charset="0"/>
               <a:buChar char="»"/>
               <a:defRPr sz="2000" kern="1200" baseline="0">
                 <a:solidFill>
@@ -8077,7 +8014,7 @@
               <a:buClr>
                 <a:schemeClr val="accent1"/>
               </a:buClr>
-              <a:buFont typeface="Arial" pitchFamily="34" charset="0"/>
+              <a:buFont typeface="Arial" panose="020B0604020202020204" pitchFamily="34" charset="0"/>
               <a:buChar char="•"/>
               <a:defRPr sz="2000" kern="1200">
                 <a:solidFill>
@@ -8095,7 +8032,7 @@
               <a:buClr>
                 <a:schemeClr val="accent1"/>
               </a:buClr>
-              <a:buFont typeface="Arial" pitchFamily="34" charset="0"/>
+              <a:buFont typeface="Arial" panose="020B0604020202020204" pitchFamily="34" charset="0"/>
               <a:buChar char="•"/>
               <a:defRPr sz="2000" kern="1200">
                 <a:solidFill>
@@ -8113,7 +8050,7 @@
               <a:buClr>
                 <a:schemeClr val="accent1"/>
               </a:buClr>
-              <a:buFont typeface="Arial" pitchFamily="34" charset="0"/>
+              <a:buFont typeface="Arial" panose="020B0604020202020204" pitchFamily="34" charset="0"/>
               <a:buChar char="•"/>
               <a:defRPr sz="2000" kern="1200">
                 <a:solidFill>
@@ -8131,7 +8068,7 @@
               <a:buClr>
                 <a:schemeClr val="accent1"/>
               </a:buClr>
-              <a:buFont typeface="Arial" pitchFamily="34" charset="0"/>
+              <a:buFont typeface="Arial" panose="020B0604020202020204" pitchFamily="34" charset="0"/>
               <a:buChar char="•"/>
               <a:defRPr sz="2000" kern="1200">
                 <a:solidFill>
@@ -8156,12 +8093,18 @@
               </a:rPr>
               <a:t>2</a:t>
             </a:r>
+            <a:endParaRPr lang="en-US" b="1" dirty="0" smtClean="0">
+              <a:solidFill>
+                <a:srgbClr val="FF0000"/>
+              </a:solidFill>
+            </a:endParaRPr>
           </a:p>
           <a:p>
             <a:r>
               <a:rPr lang="en-US" dirty="0" smtClean="0"/>
               <a:t>Planning</a:t>
             </a:r>
+            <a:endParaRPr lang="en-US" dirty="0" smtClean="0"/>
           </a:p>
           <a:p>
             <a:pPr lvl="1"/>
@@ -8169,12 +8112,14 @@
               <a:rPr lang="en-US" dirty="0" smtClean="0"/>
               <a:t>Estimate </a:t>
             </a:r>
+            <a:endParaRPr lang="en-US" dirty="0" smtClean="0"/>
           </a:p>
           <a:p>
             <a:r>
               <a:rPr lang="en-US" dirty="0" smtClean="0"/>
               <a:t>Development</a:t>
             </a:r>
+            <a:endParaRPr lang="en-US" dirty="0" smtClean="0"/>
           </a:p>
           <a:p>
             <a:pPr lvl="1"/>
@@ -8186,6 +8131,11 @@
               </a:rPr>
               <a:t>Design Review</a:t>
             </a:r>
+            <a:endParaRPr lang="en-US" b="1" dirty="0" smtClean="0">
+              <a:solidFill>
+                <a:srgbClr val="FF0000"/>
+              </a:solidFill>
+            </a:endParaRPr>
           </a:p>
           <a:p>
             <a:pPr lvl="1"/>
@@ -8193,6 +8143,7 @@
               <a:rPr lang="en-US" dirty="0" smtClean="0"/>
               <a:t>Coding Standard</a:t>
             </a:r>
+            <a:endParaRPr lang="en-US" dirty="0" smtClean="0"/>
           </a:p>
           <a:p>
             <a:pPr lvl="1"/>
@@ -8200,6 +8151,7 @@
               <a:rPr lang="en-US" dirty="0" smtClean="0"/>
               <a:t>Design</a:t>
             </a:r>
+            <a:endParaRPr lang="en-US" dirty="0" smtClean="0"/>
           </a:p>
           <a:p>
             <a:pPr lvl="1"/>
@@ -8207,6 +8159,7 @@
               <a:rPr lang="en-US" dirty="0" smtClean="0"/>
               <a:t>Coding</a:t>
             </a:r>
+            <a:endParaRPr lang="en-US" dirty="0" smtClean="0"/>
           </a:p>
           <a:p>
             <a:pPr lvl="1"/>
@@ -8218,6 +8171,11 @@
               </a:rPr>
               <a:t>Code Review</a:t>
             </a:r>
+            <a:endParaRPr lang="en-US" b="1" dirty="0" smtClean="0">
+              <a:solidFill>
+                <a:srgbClr val="FF0000"/>
+              </a:solidFill>
+            </a:endParaRPr>
           </a:p>
           <a:p>
             <a:pPr lvl="1"/>
@@ -8225,45 +8183,49 @@
               <a:rPr lang="en-US" dirty="0" smtClean="0"/>
               <a:t>Test</a:t>
             </a:r>
+            <a:endParaRPr lang="en-US" dirty="0" smtClean="0"/>
           </a:p>
           <a:p>
             <a:r>
               <a:rPr lang="en-US" dirty="0" smtClean="0"/>
               <a:t>Record Time Spent</a:t>
             </a:r>
+            <a:endParaRPr lang="en-US" dirty="0" smtClean="0"/>
           </a:p>
           <a:p>
             <a:r>
               <a:rPr lang="en-US" dirty="0" smtClean="0"/>
               <a:t>Test Report</a:t>
             </a:r>
+            <a:endParaRPr lang="en-US" dirty="0" smtClean="0"/>
           </a:p>
           <a:p>
             <a:r>
               <a:rPr lang="en-US" dirty="0" smtClean="0"/>
               <a:t>Size Measurement</a:t>
             </a:r>
+            <a:endParaRPr lang="en-US" dirty="0" smtClean="0"/>
           </a:p>
           <a:p>
             <a:r>
               <a:rPr lang="en-US" dirty="0" smtClean="0"/>
               <a:t>Postmortem</a:t>
             </a:r>
+            <a:endParaRPr lang="en-US" dirty="0" smtClean="0"/>
           </a:p>
           <a:p>
             <a:r>
               <a:rPr lang="en-US" dirty="0" smtClean="0"/>
               <a:t>Process Improvement Plan</a:t>
             </a:r>
+            <a:endParaRPr lang="en-US" dirty="0" smtClean="0"/>
           </a:p>
         </p:txBody>
       </p:sp>
       <p:sp>
         <p:nvSpPr>
           <p:cNvPr id="11" name="Content Placeholder 2"/>
-          <p:cNvSpPr txBox="1">
-            <a:spLocks/>
-          </p:cNvSpPr>
+          <p:cNvSpPr txBox="1"/>
           <p:nvPr/>
         </p:nvSpPr>
         <p:spPr>
@@ -8293,7 +8255,7 @@
                 <a:schemeClr val="accent1"/>
               </a:buClr>
               <a:buSzPct val="85000"/>
-              <a:buFont typeface="Arial" pitchFamily="34" charset="0"/>
+              <a:buFont typeface="Arial" panose="020B0604020202020204" pitchFamily="34" charset="0"/>
               <a:buChar char="•"/>
               <a:defRPr sz="3200" kern="1200">
                 <a:solidFill>
@@ -8312,7 +8274,7 @@
                 <a:schemeClr val="accent1"/>
               </a:buClr>
               <a:buSzPct val="85000"/>
-              <a:buFont typeface="Arial" pitchFamily="34" charset="0"/>
+              <a:buFont typeface="Arial" panose="020B0604020202020204" pitchFamily="34" charset="0"/>
               <a:buChar char="–"/>
               <a:defRPr sz="2800" kern="1200">
                 <a:solidFill>
@@ -8331,7 +8293,7 @@
                 <a:schemeClr val="accent1"/>
               </a:buClr>
               <a:buSzPct val="90000"/>
-              <a:buFont typeface="Arial" pitchFamily="34" charset="0"/>
+              <a:buFont typeface="Arial" panose="020B0604020202020204" pitchFamily="34" charset="0"/>
               <a:buChar char="•"/>
               <a:defRPr sz="2400" kern="1200">
                 <a:solidFill>
@@ -8349,7 +8311,7 @@
               <a:buClr>
                 <a:schemeClr val="accent1"/>
               </a:buClr>
-              <a:buFont typeface="Arial" pitchFamily="34" charset="0"/>
+              <a:buFont typeface="Arial" panose="020B0604020202020204" pitchFamily="34" charset="0"/>
               <a:buChar char="–"/>
               <a:defRPr sz="2000" kern="1200">
                 <a:solidFill>
@@ -8368,7 +8330,7 @@
                 <a:schemeClr val="accent1"/>
               </a:buClr>
               <a:buSzPct val="100000"/>
-              <a:buFont typeface="Arial" pitchFamily="34" charset="0"/>
+              <a:buFont typeface="Arial" panose="020B0604020202020204" pitchFamily="34" charset="0"/>
               <a:buChar char="»"/>
               <a:defRPr sz="2000" kern="1200" baseline="0">
                 <a:solidFill>
@@ -8386,7 +8348,7 @@
               <a:buClr>
                 <a:schemeClr val="accent1"/>
               </a:buClr>
-              <a:buFont typeface="Arial" pitchFamily="34" charset="0"/>
+              <a:buFont typeface="Arial" panose="020B0604020202020204" pitchFamily="34" charset="0"/>
               <a:buChar char="•"/>
               <a:defRPr sz="2000" kern="1200">
                 <a:solidFill>
@@ -8404,7 +8366,7 @@
               <a:buClr>
                 <a:schemeClr val="accent1"/>
               </a:buClr>
-              <a:buFont typeface="Arial" pitchFamily="34" charset="0"/>
+              <a:buFont typeface="Arial" panose="020B0604020202020204" pitchFamily="34" charset="0"/>
               <a:buChar char="•"/>
               <a:defRPr sz="2000" kern="1200">
                 <a:solidFill>
@@ -8422,7 +8384,7 @@
               <a:buClr>
                 <a:schemeClr val="accent1"/>
               </a:buClr>
-              <a:buFont typeface="Arial" pitchFamily="34" charset="0"/>
+              <a:buFont typeface="Arial" panose="020B0604020202020204" pitchFamily="34" charset="0"/>
               <a:buChar char="•"/>
               <a:defRPr sz="2000" kern="1200">
                 <a:solidFill>
@@ -8440,7 +8402,7 @@
               <a:buClr>
                 <a:schemeClr val="accent1"/>
               </a:buClr>
-              <a:buFont typeface="Arial" pitchFamily="34" charset="0"/>
+              <a:buFont typeface="Arial" panose="020B0604020202020204" pitchFamily="34" charset="0"/>
               <a:buChar char="•"/>
               <a:defRPr sz="2000" kern="1200">
                 <a:solidFill>
@@ -8465,12 +8427,18 @@
               </a:rPr>
               <a:t>2.1</a:t>
             </a:r>
+            <a:endParaRPr lang="en-US" b="1" dirty="0" smtClean="0">
+              <a:solidFill>
+                <a:srgbClr val="FF0000"/>
+              </a:solidFill>
+            </a:endParaRPr>
           </a:p>
           <a:p>
             <a:r>
               <a:rPr lang="en-US" dirty="0" smtClean="0"/>
               <a:t>Planning</a:t>
             </a:r>
+            <a:endParaRPr lang="en-US" dirty="0" smtClean="0"/>
           </a:p>
           <a:p>
             <a:pPr lvl="1"/>
@@ -8478,12 +8446,14 @@
               <a:rPr lang="en-US" dirty="0" smtClean="0"/>
               <a:t>Estimate </a:t>
             </a:r>
+            <a:endParaRPr lang="en-US" dirty="0" smtClean="0"/>
           </a:p>
           <a:p>
             <a:r>
               <a:rPr lang="en-US" dirty="0" smtClean="0"/>
               <a:t>Development</a:t>
             </a:r>
+            <a:endParaRPr lang="en-US" dirty="0" smtClean="0"/>
           </a:p>
           <a:p>
             <a:pPr lvl="1"/>
@@ -8495,6 +8465,11 @@
               </a:rPr>
               <a:t>Analysis </a:t>
             </a:r>
+            <a:endParaRPr lang="en-US" b="1" dirty="0" smtClean="0">
+              <a:solidFill>
+                <a:srgbClr val="FF0000"/>
+              </a:solidFill>
+            </a:endParaRPr>
           </a:p>
           <a:p>
             <a:pPr lvl="1"/>
@@ -8506,6 +8481,11 @@
               </a:rPr>
               <a:t>Design Spec</a:t>
             </a:r>
+            <a:endParaRPr lang="en-US" b="1" dirty="0" smtClean="0">
+              <a:solidFill>
+                <a:srgbClr val="FF0000"/>
+              </a:solidFill>
+            </a:endParaRPr>
           </a:p>
           <a:p>
             <a:pPr lvl="1"/>
@@ -8513,6 +8493,7 @@
               <a:rPr lang="en-US" dirty="0" smtClean="0"/>
               <a:t>Design Review</a:t>
             </a:r>
+            <a:endParaRPr lang="en-US" dirty="0" smtClean="0"/>
           </a:p>
           <a:p>
             <a:pPr lvl="1"/>
@@ -8520,6 +8501,7 @@
               <a:rPr lang="en-US" dirty="0" smtClean="0"/>
               <a:t>Coding Standard</a:t>
             </a:r>
+            <a:endParaRPr lang="en-US" dirty="0" smtClean="0"/>
           </a:p>
           <a:p>
             <a:pPr lvl="1"/>
@@ -8527,6 +8509,7 @@
               <a:rPr lang="en-US" dirty="0" smtClean="0"/>
               <a:t>Design</a:t>
             </a:r>
+            <a:endParaRPr lang="en-US" dirty="0" smtClean="0"/>
           </a:p>
           <a:p>
             <a:pPr lvl="1"/>
@@ -8534,6 +8517,7 @@
               <a:rPr lang="en-US" dirty="0" smtClean="0"/>
               <a:t>Coding</a:t>
             </a:r>
+            <a:endParaRPr lang="en-US" dirty="0" smtClean="0"/>
           </a:p>
           <a:p>
             <a:pPr lvl="1"/>
@@ -8541,6 +8525,7 @@
               <a:rPr lang="en-US" dirty="0" smtClean="0"/>
               <a:t>Code Review</a:t>
             </a:r>
+            <a:endParaRPr lang="en-US" dirty="0" smtClean="0"/>
           </a:p>
           <a:p>
             <a:pPr lvl="1"/>
@@ -8548,45 +8533,46 @@
               <a:rPr lang="en-US" dirty="0" smtClean="0"/>
               <a:t>Test</a:t>
             </a:r>
+            <a:endParaRPr lang="en-US" dirty="0" smtClean="0"/>
           </a:p>
           <a:p>
             <a:r>
               <a:rPr lang="en-US" dirty="0" smtClean="0"/>
               <a:t>Record Time Spent</a:t>
             </a:r>
+            <a:endParaRPr lang="en-US" dirty="0" smtClean="0"/>
           </a:p>
           <a:p>
             <a:r>
               <a:rPr lang="en-US" dirty="0" smtClean="0"/>
               <a:t>Test Report</a:t>
             </a:r>
+            <a:endParaRPr lang="en-US" dirty="0" smtClean="0"/>
           </a:p>
           <a:p>
             <a:r>
               <a:rPr lang="en-US" dirty="0" smtClean="0"/>
               <a:t>Size Measurement</a:t>
             </a:r>
+            <a:endParaRPr lang="en-US" dirty="0" smtClean="0"/>
           </a:p>
           <a:p>
             <a:r>
               <a:rPr lang="en-US" dirty="0" smtClean="0"/>
               <a:t>Postmortem</a:t>
             </a:r>
+            <a:endParaRPr lang="en-US" dirty="0" smtClean="0"/>
           </a:p>
           <a:p>
             <a:r>
               <a:rPr lang="en-US" dirty="0" smtClean="0"/>
               <a:t>Process Improvement Plan</a:t>
             </a:r>
+            <a:endParaRPr lang="en-US" dirty="0" smtClean="0"/>
           </a:p>
         </p:txBody>
       </p:sp>
     </p:spTree>
-    <p:extLst>
-      <p:ext uri="{BB962C8B-B14F-4D97-AF65-F5344CB8AC3E}">
-        <p14:creationId xmlns:p14="http://schemas.microsoft.com/office/powerpoint/2010/main" val="601280872"/>
-      </p:ext>
-    </p:extLst>
   </p:cSld>
   <p:clrMapOvr>
     <a:masterClrMapping/>
@@ -8834,6 +8820,7 @@
               <a:rPr lang="en-US" dirty="0" smtClean="0"/>
               <a:t>Scripts</a:t>
             </a:r>
+            <a:endParaRPr lang="en-US" dirty="0" smtClean="0"/>
           </a:p>
           <a:p>
             <a:pPr lvl="1"/>
@@ -8841,6 +8828,7 @@
               <a:rPr lang="en-US" dirty="0" smtClean="0"/>
               <a:t>Measures</a:t>
             </a:r>
+            <a:endParaRPr lang="en-US" dirty="0" smtClean="0"/>
           </a:p>
           <a:p>
             <a:pPr lvl="1"/>
@@ -8848,6 +8836,7 @@
               <a:rPr lang="en-US" dirty="0" smtClean="0"/>
               <a:t>Standards</a:t>
             </a:r>
+            <a:endParaRPr lang="en-US" dirty="0" smtClean="0"/>
           </a:p>
           <a:p>
             <a:pPr lvl="1"/>
@@ -8855,6 +8844,7 @@
               <a:rPr lang="en-US" dirty="0" smtClean="0"/>
               <a:t>Forms</a:t>
             </a:r>
+            <a:endParaRPr lang="en-US" dirty="0" smtClean="0"/>
           </a:p>
           <a:p>
             <a:endParaRPr lang="en-US" dirty="0"/>
@@ -8943,12 +8933,14 @@
               <a:rPr lang="en-US" sz="2400" dirty="0" smtClean="0"/>
               <a:t>The PSP scripts provide expert-level guidance to following the process steps and they provide a framework for applying the PSP measures. The PSP has four core measures:</a:t>
             </a:r>
+            <a:endParaRPr lang="en-US" sz="2400" dirty="0" smtClean="0"/>
           </a:p>
           <a:p>
             <a:r>
               <a:rPr lang="en-US" sz="2400" dirty="0" smtClean="0"/>
               <a:t>Size – the size measure for a product part, such as lines of code (LOC).</a:t>
             </a:r>
+            <a:endParaRPr lang="en-US" sz="2400" dirty="0" smtClean="0"/>
           </a:p>
           <a:p>
             <a:pPr lvl="1"/>
@@ -8963,6 +8955,7 @@
               <a:rPr lang="en-US" sz="2400" dirty="0" smtClean="0"/>
               <a:t>Effort – the time required to complete a task, usually recorded in minutes.</a:t>
             </a:r>
+            <a:endParaRPr lang="en-US" sz="2400" dirty="0" smtClean="0"/>
           </a:p>
           <a:p>
             <a:pPr lvl="1"/>
@@ -8977,6 +8970,7 @@
               <a:rPr lang="en-US" sz="2400" dirty="0" smtClean="0"/>
               <a:t>Quality – the number of defects in the product.</a:t>
             </a:r>
+            <a:endParaRPr lang="en-US" sz="2400" dirty="0" smtClean="0"/>
           </a:p>
           <a:p>
             <a:pPr lvl="1"/>
@@ -8991,6 +8985,7 @@
               <a:rPr lang="en-US" sz="2400" dirty="0" smtClean="0"/>
               <a:t>Schedule – a measure of project progression, tracked against planned and actual completion dates.</a:t>
             </a:r>
+            <a:endParaRPr lang="en-US" sz="2400" dirty="0" smtClean="0"/>
           </a:p>
           <a:p>
             <a:pPr lvl="1"/>
@@ -9591,6 +9586,7 @@
               <a:rPr lang="en-US" dirty="0" smtClean="0"/>
               <a:t>Based on this principle:</a:t>
             </a:r>
+            <a:endParaRPr lang="en-US" dirty="0" smtClean="0"/>
           </a:p>
           <a:p>
             <a:pPr lvl="1"/>
@@ -9598,6 +9594,7 @@
               <a:rPr lang="en-US" dirty="0" smtClean="0"/>
               <a:t>You can’t improve what you can’t measure. </a:t>
             </a:r>
+            <a:endParaRPr lang="en-US" dirty="0" smtClean="0"/>
           </a:p>
           <a:p>
             <a:pPr lvl="1"/>
@@ -9616,6 +9613,7 @@
               <a:rPr lang="en-US" dirty="0" smtClean="0"/>
               <a:t>– </a:t>
             </a:r>
+            <a:endParaRPr lang="en-US" dirty="0" smtClean="0"/>
           </a:p>
           <a:p>
             <a:pPr lvl="1"/>
@@ -9623,6 +9621,7 @@
               <a:rPr lang="en-US" dirty="0" smtClean="0"/>
               <a:t>the time spent in each phase; </a:t>
             </a:r>
+            <a:endParaRPr lang="en-US" dirty="0" smtClean="0"/>
           </a:p>
           <a:p>
             <a:pPr lvl="1"/>
@@ -9630,6 +9629,7 @@
               <a:rPr lang="en-US" dirty="0" smtClean="0"/>
               <a:t>when and where defects were injected, found, and fixed; </a:t>
             </a:r>
+            <a:endParaRPr lang="en-US" dirty="0" smtClean="0"/>
           </a:p>
           <a:p>
             <a:pPr lvl="1"/>
@@ -9637,6 +9637,7 @@
               <a:rPr lang="en-US" dirty="0" smtClean="0"/>
               <a:t>and the size of the product parts. </a:t>
             </a:r>
+            <a:endParaRPr lang="en-US" dirty="0" smtClean="0"/>
           </a:p>
           <a:p>
             <a:r>
@@ -9726,6 +9727,7 @@
               <a:rPr lang="en-US" sz="2400" dirty="0" smtClean="0"/>
               <a:t>In small, start-up team, high quality requirement is hard to find</a:t>
             </a:r>
+            <a:endParaRPr lang="en-US" sz="2400" dirty="0" smtClean="0"/>
           </a:p>
           <a:p>
             <a:pPr lvl="1"/>
@@ -9733,12 +9735,14 @@
               <a:rPr lang="en-US" sz="2000" dirty="0" smtClean="0"/>
               <a:t>If the input is in low quality,  how can the quality of PSP be ensured?</a:t>
             </a:r>
+            <a:endParaRPr lang="en-US" sz="2000" dirty="0" smtClean="0"/>
           </a:p>
           <a:p>
             <a:r>
               <a:rPr lang="en-US" sz="2400" dirty="0" smtClean="0"/>
               <a:t>Depends on data</a:t>
             </a:r>
+            <a:endParaRPr lang="en-US" sz="2400" dirty="0" smtClean="0"/>
           </a:p>
           <a:p>
             <a:pPr lvl="1"/>
@@ -9746,6 +9750,7 @@
               <a:rPr lang="en-US" sz="2000" dirty="0" smtClean="0"/>
               <a:t>Requires developers to enter data to log various activities</a:t>
             </a:r>
+            <a:endParaRPr lang="en-US" sz="2000" dirty="0" smtClean="0"/>
           </a:p>
           <a:p>
             <a:pPr lvl="1"/>
@@ -9753,6 +9758,7 @@
               <a:rPr lang="en-US" sz="2000" dirty="0" smtClean="0"/>
               <a:t>What if data is missing, or inaccurate?</a:t>
             </a:r>
+            <a:endParaRPr lang="en-US" sz="2000" dirty="0" smtClean="0"/>
           </a:p>
           <a:p>
             <a:pPr lvl="1"/>
@@ -9764,12 +9770,14 @@
               <a:rPr lang="en-US" altLang="zh-CN" sz="2000" dirty="0" smtClean="0"/>
               <a:t>Should I honestly record how bad I am?</a:t>
             </a:r>
+            <a:endParaRPr lang="en-US" altLang="zh-CN" sz="2000" dirty="0" smtClean="0"/>
           </a:p>
           <a:p>
             <a:r>
               <a:rPr lang="en-US" sz="2400" dirty="0" smtClean="0"/>
               <a:t>Micro-measurement</a:t>
             </a:r>
+            <a:endParaRPr lang="en-US" sz="2400" dirty="0" smtClean="0"/>
           </a:p>
           <a:p>
             <a:pPr lvl="1"/>
@@ -9777,6 +9785,7 @@
               <a:rPr lang="en-US" sz="2000" dirty="0" smtClean="0"/>
               <a:t>Do we need to measure code size everyday? </a:t>
             </a:r>
+            <a:endParaRPr lang="en-US" sz="2000" dirty="0" smtClean="0"/>
           </a:p>
           <a:p>
             <a:pPr lvl="1"/>
@@ -9807,6 +9816,7 @@
               <a:rPr lang="en-US" sz="2400" dirty="0" smtClean="0"/>
               <a:t>What’s the end goal?</a:t>
             </a:r>
+            <a:endParaRPr lang="en-US" sz="2400" dirty="0" smtClean="0"/>
           </a:p>
           <a:p>
             <a:pPr lvl="1"/>
@@ -9814,6 +9824,7 @@
               <a:rPr lang="en-US" sz="2000" dirty="0" smtClean="0"/>
               <a:t>Measuring how to effectively execute on a requirement</a:t>
             </a:r>
+            <a:endParaRPr lang="en-US" sz="2000" dirty="0" smtClean="0"/>
           </a:p>
           <a:p>
             <a:pPr lvl="1"/>
@@ -9821,6 +9832,7 @@
               <a:rPr lang="en-US" sz="2000" dirty="0" smtClean="0"/>
               <a:t>NOT measuring how customers are satisfied by the product. </a:t>
             </a:r>
+            <a:endParaRPr lang="en-US" sz="2000" dirty="0" smtClean="0"/>
           </a:p>
         </p:txBody>
       </p:sp>
@@ -10564,7 +10576,7 @@
           </p:nvPr>
         </p:nvPicPr>
         <p:blipFill>
-          <a:blip r:embed="rId2"/>
+          <a:blip r:embed="rId1"/>
           <a:stretch>
             <a:fillRect/>
           </a:stretch>
@@ -10580,11 +10592,6 @@
         </p:spPr>
       </p:pic>
     </p:spTree>
-    <p:extLst>
-      <p:ext uri="{BB962C8B-B14F-4D97-AF65-F5344CB8AC3E}">
-        <p14:creationId xmlns:p14="http://schemas.microsoft.com/office/powerpoint/2010/main" val="2230343479"/>
-      </p:ext>
-    </p:extLst>
   </p:cSld>
   <p:clrMapOvr>
     <a:masterClrMapping/>
@@ -10660,7 +10667,7 @@
           <p:nvPr/>
         </p:nvPicPr>
         <p:blipFill>
-          <a:blip r:embed="rId2"/>
+          <a:blip r:embed="rId1"/>
           <a:stretch>
             <a:fillRect/>
           </a:stretch>
@@ -10676,11 +10683,6 @@
         </p:spPr>
       </p:pic>
     </p:spTree>
-    <p:extLst>
-      <p:ext uri="{BB962C8B-B14F-4D97-AF65-F5344CB8AC3E}">
-        <p14:creationId xmlns:p14="http://schemas.microsoft.com/office/powerpoint/2010/main" val="1640774756"/>
-      </p:ext>
-    </p:extLst>
   </p:cSld>
   <p:clrMapOvr>
     <a:masterClrMapping/>
@@ -10808,6 +10810,7 @@
               <a:rPr lang="en-US" dirty="0" smtClean="0"/>
               <a:t>rocess</a:t>
             </a:r>
+            <a:endParaRPr lang="en-US" dirty="0" smtClean="0"/>
           </a:p>
           <a:p>
             <a:pPr eaLnBrk="1" hangingPunct="1"/>
@@ -11243,7 +11246,7 @@
           </a:bodyPr>
           <a:lstStyle/>
           <a:p>
-            <a:pPr marL="118872" indent="0">
+            <a:pPr marL="118745" indent="0">
               <a:buNone/>
             </a:pPr>
             <a:r>
@@ -11418,7 +11421,7 @@
             <a:endParaRPr lang="en-US" sz="2000" dirty="0"/>
           </a:p>
           <a:p>
-            <a:pPr marL="118872" indent="0">
+            <a:pPr marL="118745" indent="0">
               <a:buNone/>
             </a:pPr>
             <a:r>
@@ -11434,11 +11437,6 @@
         </p:txBody>
       </p:sp>
     </p:spTree>
-    <p:extLst>
-      <p:ext uri="{BB962C8B-B14F-4D97-AF65-F5344CB8AC3E}">
-        <p14:creationId xmlns:p14="http://schemas.microsoft.com/office/powerpoint/2010/main" val="303877150"/>
-      </p:ext>
-    </p:extLst>
   </p:cSld>
   <p:clrMapOvr>
     <a:masterClrMapping/>
@@ -11511,6 +11509,7 @@
               <a:rPr lang="en-US" altLang="zh-CN" sz="2200" dirty="0" smtClean="0"/>
               <a:t>How do you measure efficiency?</a:t>
             </a:r>
+            <a:endParaRPr lang="en-US" altLang="zh-CN" sz="2200" dirty="0" smtClean="0"/>
           </a:p>
           <a:p>
             <a:pPr lvl="1"/>
@@ -12153,6 +12152,7 @@
               <a:rPr lang="en-US" altLang="zh-CN" sz="2200" dirty="0" smtClean="0"/>
               <a:t>How do you measure creativity?</a:t>
             </a:r>
+            <a:endParaRPr lang="en-US" altLang="zh-CN" sz="2200" dirty="0" smtClean="0"/>
           </a:p>
           <a:p>
             <a:pPr lvl="1"/>
@@ -12164,6 +12164,7 @@
               <a:rPr lang="en-US" altLang="zh-CN" sz="2000" dirty="0" smtClean="0"/>
               <a:t>? </a:t>
             </a:r>
+            <a:endParaRPr lang="en-US" altLang="zh-CN" sz="2000" dirty="0" smtClean="0"/>
           </a:p>
           <a:p>
             <a:pPr lvl="1"/>
@@ -12175,36 +12176,22 @@
               <a:rPr lang="en-US" altLang="zh-CN" sz="2000" dirty="0" smtClean="0"/>
               <a:t>? </a:t>
             </a:r>
+            <a:endParaRPr lang="en-US" altLang="zh-CN" sz="2000" dirty="0" smtClean="0"/>
           </a:p>
           <a:p>
             <a:r>
               <a:rPr lang="en-US" altLang="zh-CN" sz="2200" dirty="0" smtClean="0"/>
               <a:t>Is software Art or Engineering?</a:t>
             </a:r>
+            <a:endParaRPr lang="en-US" altLang="zh-CN" sz="2200" dirty="0" smtClean="0"/>
           </a:p>
           <a:p>
             <a:pPr lvl="1"/>
             <a:r>
               <a:rPr lang="en-US" altLang="zh-CN" sz="2000" dirty="0" smtClean="0"/>
-              <a:t>How do you measure an Artist?  </a:t>
-            </a:r>
-          </a:p>
-          <a:p>
-            <a:pPr lvl="1"/>
-            <a:r>
-              <a:rPr lang="en-US" altLang="zh-CN" sz="2000" dirty="0" smtClean="0"/>
-              <a:t>“Gone with the Wind”   by </a:t>
-            </a:r>
-            <a:r>
-              <a:rPr lang="en-US" sz="2000" dirty="0" smtClean="0">
-                <a:hlinkClick r:id="rId3" action="ppaction://hlinkfile" tooltip="Margaret Mitchell"/>
-              </a:rPr>
-              <a:t>Margaret Mitchell</a:t>
-            </a:r>
-            <a:r>
-              <a:rPr lang="en-US" altLang="zh-CN" sz="2000" dirty="0" smtClean="0"/>
-              <a:t>;  </a:t>
-            </a:r>
+              <a:t>How do you measure an Artist?   </a:t>
+            </a:r>
+            <a:endParaRPr lang="en-US" altLang="zh-CN" sz="2000" dirty="0" smtClean="0"/>
           </a:p>
           <a:p>
             <a:pPr lvl="1"/>
@@ -12532,49 +12519,6 @@
                                   </p:childTnLst>
                                 </p:cTn>
                               </p:par>
-                              <p:par>
-                                <p:cTn id="25" presetID="10" presetClass="entr" presetSubtype="0" fill="hold" grpId="0" nodeType="withEffect">
-                                  <p:stCondLst>
-                                    <p:cond delay="0"/>
-                                  </p:stCondLst>
-                                  <p:childTnLst>
-                                    <p:set>
-                                      <p:cBhvr>
-                                        <p:cTn id="26" dur="1" fill="hold">
-                                          <p:stCondLst>
-                                            <p:cond delay="0"/>
-                                          </p:stCondLst>
-                                        </p:cTn>
-                                        <p:tgtEl>
-                                          <p:spTgt spid="2">
-                                            <p:txEl>
-                                              <p:pRg st="6" end="6"/>
-                                            </p:txEl>
-                                          </p:spTgt>
-                                        </p:tgtEl>
-                                        <p:attrNameLst>
-                                          <p:attrName>style.visibility</p:attrName>
-                                        </p:attrNameLst>
-                                      </p:cBhvr>
-                                      <p:to>
-                                        <p:strVal val="visible"/>
-                                      </p:to>
-                                    </p:set>
-                                    <p:animEffect transition="in" filter="fade">
-                                      <p:cBhvr>
-                                        <p:cTn id="27" dur="2000"/>
-                                        <p:tgtEl>
-                                          <p:spTgt spid="2">
-                                            <p:txEl>
-                                              <p:pRg st="6" end="6"/>
-                                            </p:txEl>
-                                          </p:spTgt>
-                                        </p:tgtEl>
-                                      </p:cBhvr>
-                                    </p:animEffect>
-                                  </p:childTnLst>
-                                </p:cTn>
-                              </p:par>
                             </p:childTnLst>
                           </p:cTn>
                         </p:par>
@@ -12671,178 +12615,157 @@
             </a:pPr>
             <a:r>
               <a:rPr lang="zh-CN" altLang="en-US" sz="2400" dirty="0" smtClean="0">
-                <a:latin typeface="Microsoft YaHei" pitchFamily="34" charset="-122"/>
-                <a:ea typeface="Microsoft YaHei" pitchFamily="34" charset="-122"/>
+                <a:latin typeface="微软雅黑" panose="020B0503020204020204" charset="-122"/>
+                <a:ea typeface="微软雅黑" panose="020B0503020204020204" charset="-122"/>
               </a:rPr>
               <a:t>念奴娇 </a:t>
             </a:r>
             <a:r>
               <a:rPr lang="en-US" altLang="zh-CN" sz="2400" dirty="0" smtClean="0">
-                <a:latin typeface="Microsoft YaHei" pitchFamily="34" charset="-122"/>
-                <a:ea typeface="Microsoft YaHei" pitchFamily="34" charset="-122"/>
+                <a:latin typeface="微软雅黑" panose="020B0503020204020204" charset="-122"/>
+                <a:ea typeface="微软雅黑" panose="020B0503020204020204" charset="-122"/>
               </a:rPr>
               <a:t>· </a:t>
             </a:r>
             <a:r>
               <a:rPr lang="zh-CN" altLang="en-US" sz="2400" dirty="0" smtClean="0">
-                <a:latin typeface="Microsoft YaHei" pitchFamily="34" charset="-122"/>
-                <a:ea typeface="Microsoft YaHei" pitchFamily="34" charset="-122"/>
+                <a:latin typeface="微软雅黑" panose="020B0503020204020204" charset="-122"/>
+                <a:ea typeface="微软雅黑" panose="020B0503020204020204" charset="-122"/>
               </a:rPr>
               <a:t>赤壁怀古 </a:t>
             </a:r>
-            <a:r>
-              <a:rPr lang="zh-CN" altLang="en-US" dirty="0" smtClean="0">
-                <a:latin typeface="Microsoft YaHei" pitchFamily="34" charset="-122"/>
-                <a:ea typeface="Microsoft YaHei" pitchFamily="34" charset="-122"/>
-              </a:rPr>
-              <a:t/>
-            </a:r>
             <a:br>
               <a:rPr lang="zh-CN" altLang="en-US" dirty="0" smtClean="0">
-                <a:latin typeface="Microsoft YaHei" pitchFamily="34" charset="-122"/>
-                <a:ea typeface="Microsoft YaHei" pitchFamily="34" charset="-122"/>
+                <a:latin typeface="微软雅黑" panose="020B0503020204020204" charset="-122"/>
+                <a:ea typeface="微软雅黑" panose="020B0503020204020204" charset="-122"/>
               </a:rPr>
             </a:br>
-            <a:r>
-              <a:rPr lang="zh-CN" altLang="en-US" dirty="0" smtClean="0">
-                <a:latin typeface="Microsoft YaHei" pitchFamily="34" charset="-122"/>
-                <a:ea typeface="Microsoft YaHei" pitchFamily="34" charset="-122"/>
-              </a:rPr>
-              <a:t/>
-            </a:r>
             <a:br>
               <a:rPr lang="zh-CN" altLang="en-US" dirty="0" smtClean="0">
-                <a:latin typeface="Microsoft YaHei" pitchFamily="34" charset="-122"/>
-                <a:ea typeface="Microsoft YaHei" pitchFamily="34" charset="-122"/>
+                <a:latin typeface="微软雅黑" panose="020B0503020204020204" charset="-122"/>
+                <a:ea typeface="微软雅黑" panose="020B0503020204020204" charset="-122"/>
               </a:rPr>
             </a:br>
             <a:r>
               <a:rPr lang="zh-CN" altLang="en-US" sz="2200" dirty="0" smtClean="0">
-                <a:latin typeface="Microsoft YaHei" pitchFamily="34" charset="-122"/>
-                <a:ea typeface="Microsoft YaHei" pitchFamily="34" charset="-122"/>
+                <a:latin typeface="微软雅黑" panose="020B0503020204020204" charset="-122"/>
+                <a:ea typeface="微软雅黑" panose="020B0503020204020204" charset="-122"/>
               </a:rPr>
               <a:t>大江东去，浪淘尽，</a:t>
             </a:r>
             <a:br>
               <a:rPr lang="zh-CN" altLang="en-US" sz="2200" dirty="0" smtClean="0">
-                <a:latin typeface="Microsoft YaHei" pitchFamily="34" charset="-122"/>
-                <a:ea typeface="Microsoft YaHei" pitchFamily="34" charset="-122"/>
+                <a:latin typeface="微软雅黑" panose="020B0503020204020204" charset="-122"/>
+                <a:ea typeface="微软雅黑" panose="020B0503020204020204" charset="-122"/>
               </a:rPr>
             </a:br>
             <a:r>
               <a:rPr lang="zh-CN" altLang="en-US" sz="2200" dirty="0" smtClean="0">
-                <a:latin typeface="Microsoft YaHei" pitchFamily="34" charset="-122"/>
-                <a:ea typeface="Microsoft YaHei" pitchFamily="34" charset="-122"/>
+                <a:latin typeface="微软雅黑" panose="020B0503020204020204" charset="-122"/>
+                <a:ea typeface="微软雅黑" panose="020B0503020204020204" charset="-122"/>
               </a:rPr>
               <a:t>千古风流人物。</a:t>
             </a:r>
             <a:br>
               <a:rPr lang="zh-CN" altLang="en-US" sz="2200" dirty="0" smtClean="0">
-                <a:latin typeface="Microsoft YaHei" pitchFamily="34" charset="-122"/>
-                <a:ea typeface="Microsoft YaHei" pitchFamily="34" charset="-122"/>
+                <a:latin typeface="微软雅黑" panose="020B0503020204020204" charset="-122"/>
+                <a:ea typeface="微软雅黑" panose="020B0503020204020204" charset="-122"/>
               </a:rPr>
             </a:br>
             <a:r>
               <a:rPr lang="zh-CN" altLang="en-US" sz="2200" dirty="0" smtClean="0">
-                <a:latin typeface="Microsoft YaHei" pitchFamily="34" charset="-122"/>
-                <a:ea typeface="Microsoft YaHei" pitchFamily="34" charset="-122"/>
+                <a:latin typeface="微软雅黑" panose="020B0503020204020204" charset="-122"/>
+                <a:ea typeface="微软雅黑" panose="020B0503020204020204" charset="-122"/>
               </a:rPr>
               <a:t>故垒西边，人道是，三国周郎赤壁。</a:t>
             </a:r>
             <a:br>
               <a:rPr lang="zh-CN" altLang="en-US" sz="2200" dirty="0" smtClean="0">
-                <a:latin typeface="Microsoft YaHei" pitchFamily="34" charset="-122"/>
-                <a:ea typeface="Microsoft YaHei" pitchFamily="34" charset="-122"/>
+                <a:latin typeface="微软雅黑" panose="020B0503020204020204" charset="-122"/>
+                <a:ea typeface="微软雅黑" panose="020B0503020204020204" charset="-122"/>
               </a:rPr>
             </a:br>
             <a:r>
               <a:rPr lang="zh-CN" altLang="en-US" sz="2200" dirty="0" smtClean="0">
-                <a:latin typeface="Microsoft YaHei" pitchFamily="34" charset="-122"/>
-                <a:ea typeface="Microsoft YaHei" pitchFamily="34" charset="-122"/>
+                <a:latin typeface="微软雅黑" panose="020B0503020204020204" charset="-122"/>
+                <a:ea typeface="微软雅黑" panose="020B0503020204020204" charset="-122"/>
               </a:rPr>
               <a:t>乱石崩云，惊涛裂岸，卷起千堆雪。</a:t>
             </a:r>
             <a:br>
               <a:rPr lang="zh-CN" altLang="en-US" sz="2200" dirty="0" smtClean="0">
-                <a:latin typeface="Microsoft YaHei" pitchFamily="34" charset="-122"/>
-                <a:ea typeface="Microsoft YaHei" pitchFamily="34" charset="-122"/>
+                <a:latin typeface="微软雅黑" panose="020B0503020204020204" charset="-122"/>
+                <a:ea typeface="微软雅黑" panose="020B0503020204020204" charset="-122"/>
               </a:rPr>
             </a:br>
             <a:r>
               <a:rPr lang="zh-CN" altLang="en-US" sz="2200" dirty="0" smtClean="0">
-                <a:latin typeface="Microsoft YaHei" pitchFamily="34" charset="-122"/>
-                <a:ea typeface="Microsoft YaHei" pitchFamily="34" charset="-122"/>
+                <a:latin typeface="微软雅黑" panose="020B0503020204020204" charset="-122"/>
+                <a:ea typeface="微软雅黑" panose="020B0503020204020204" charset="-122"/>
               </a:rPr>
               <a:t>江山如画，一时多少豪杰。</a:t>
             </a:r>
             <a:br>
               <a:rPr lang="zh-CN" altLang="en-US" sz="2200" dirty="0" smtClean="0">
-                <a:latin typeface="Microsoft YaHei" pitchFamily="34" charset="-122"/>
-                <a:ea typeface="Microsoft YaHei" pitchFamily="34" charset="-122"/>
+                <a:latin typeface="微软雅黑" panose="020B0503020204020204" charset="-122"/>
+                <a:ea typeface="微软雅黑" panose="020B0503020204020204" charset="-122"/>
               </a:rPr>
             </a:br>
-            <a:r>
-              <a:rPr lang="zh-CN" altLang="en-US" sz="2200" dirty="0" smtClean="0">
-                <a:latin typeface="Microsoft YaHei" pitchFamily="34" charset="-122"/>
-                <a:ea typeface="Microsoft YaHei" pitchFamily="34" charset="-122"/>
-              </a:rPr>
-              <a:t/>
-            </a:r>
             <a:br>
               <a:rPr lang="zh-CN" altLang="en-US" sz="2200" dirty="0" smtClean="0">
-                <a:latin typeface="Microsoft YaHei" pitchFamily="34" charset="-122"/>
-                <a:ea typeface="Microsoft YaHei" pitchFamily="34" charset="-122"/>
+                <a:latin typeface="微软雅黑" panose="020B0503020204020204" charset="-122"/>
+                <a:ea typeface="微软雅黑" panose="020B0503020204020204" charset="-122"/>
               </a:rPr>
             </a:br>
             <a:r>
               <a:rPr lang="zh-CN" altLang="en-US" sz="2200" dirty="0" smtClean="0">
-                <a:latin typeface="Microsoft YaHei" pitchFamily="34" charset="-122"/>
-                <a:ea typeface="Microsoft YaHei" pitchFamily="34" charset="-122"/>
+                <a:latin typeface="微软雅黑" panose="020B0503020204020204" charset="-122"/>
+                <a:ea typeface="微软雅黑" panose="020B0503020204020204" charset="-122"/>
               </a:rPr>
               <a:t>遥想公谨当年，小乔初嫁了。</a:t>
             </a:r>
             <a:br>
               <a:rPr lang="zh-CN" altLang="en-US" sz="2200" dirty="0" smtClean="0">
-                <a:latin typeface="Microsoft YaHei" pitchFamily="34" charset="-122"/>
-                <a:ea typeface="Microsoft YaHei" pitchFamily="34" charset="-122"/>
+                <a:latin typeface="微软雅黑" panose="020B0503020204020204" charset="-122"/>
+                <a:ea typeface="微软雅黑" panose="020B0503020204020204" charset="-122"/>
               </a:rPr>
             </a:br>
             <a:r>
               <a:rPr lang="zh-CN" altLang="en-US" sz="2200" dirty="0" smtClean="0">
-                <a:latin typeface="Microsoft YaHei" pitchFamily="34" charset="-122"/>
-                <a:ea typeface="Microsoft YaHei" pitchFamily="34" charset="-122"/>
+                <a:latin typeface="微软雅黑" panose="020B0503020204020204" charset="-122"/>
+                <a:ea typeface="微软雅黑" panose="020B0503020204020204" charset="-122"/>
               </a:rPr>
               <a:t>羽扇纶巾，谈笑间，樯橹灰飞烟灭。</a:t>
             </a:r>
             <a:br>
               <a:rPr lang="zh-CN" altLang="en-US" sz="2200" dirty="0" smtClean="0">
-                <a:latin typeface="Microsoft YaHei" pitchFamily="34" charset="-122"/>
-                <a:ea typeface="Microsoft YaHei" pitchFamily="34" charset="-122"/>
+                <a:latin typeface="微软雅黑" panose="020B0503020204020204" charset="-122"/>
+                <a:ea typeface="微软雅黑" panose="020B0503020204020204" charset="-122"/>
               </a:rPr>
             </a:br>
             <a:r>
               <a:rPr lang="zh-CN" altLang="en-US" sz="2200" dirty="0" smtClean="0">
-                <a:latin typeface="Microsoft YaHei" pitchFamily="34" charset="-122"/>
-                <a:ea typeface="Microsoft YaHei" pitchFamily="34" charset="-122"/>
+                <a:latin typeface="微软雅黑" panose="020B0503020204020204" charset="-122"/>
+                <a:ea typeface="微软雅黑" panose="020B0503020204020204" charset="-122"/>
               </a:rPr>
               <a:t>故国神游，多情应笑我，早生华发。</a:t>
             </a:r>
             <a:br>
               <a:rPr lang="zh-CN" altLang="en-US" sz="2200" dirty="0" smtClean="0">
-                <a:latin typeface="Microsoft YaHei" pitchFamily="34" charset="-122"/>
-                <a:ea typeface="Microsoft YaHei" pitchFamily="34" charset="-122"/>
+                <a:latin typeface="微软雅黑" panose="020B0503020204020204" charset="-122"/>
+                <a:ea typeface="微软雅黑" panose="020B0503020204020204" charset="-122"/>
               </a:rPr>
             </a:br>
             <a:r>
               <a:rPr lang="zh-CN" altLang="en-US" sz="2200" dirty="0" smtClean="0">
-                <a:latin typeface="Microsoft YaHei" pitchFamily="34" charset="-122"/>
-                <a:ea typeface="Microsoft YaHei" pitchFamily="34" charset="-122"/>
+                <a:latin typeface="微软雅黑" panose="020B0503020204020204" charset="-122"/>
+                <a:ea typeface="微软雅黑" panose="020B0503020204020204" charset="-122"/>
               </a:rPr>
               <a:t>人生如梦，一樽还酹江月。</a:t>
             </a:r>
             <a:endParaRPr lang="en-US" altLang="zh-CN" sz="2200" dirty="0" smtClean="0">
-              <a:latin typeface="Microsoft YaHei" pitchFamily="34" charset="-122"/>
-              <a:ea typeface="Microsoft YaHei" pitchFamily="34" charset="-122"/>
+              <a:latin typeface="微软雅黑" panose="020B0503020204020204" charset="-122"/>
+              <a:ea typeface="微软雅黑" panose="020B0503020204020204" charset="-122"/>
             </a:endParaRPr>
           </a:p>
           <a:p>
@@ -12853,6 +12776,7 @@
               <a:rPr lang="en-US" altLang="zh-CN" sz="2200" dirty="0" smtClean="0"/>
               <a:t>-----------------</a:t>
             </a:r>
+            <a:endParaRPr lang="en-US" altLang="zh-CN" sz="2200" dirty="0" smtClean="0"/>
           </a:p>
           <a:p>
             <a:pPr>
@@ -12872,6 +12796,7 @@
               <a:rPr lang="en-US" altLang="zh-CN" sz="2200" dirty="0" smtClean="0"/>
               <a:t>-----------------</a:t>
             </a:r>
+            <a:endParaRPr lang="en-US" altLang="zh-CN" sz="2200" dirty="0" smtClean="0"/>
           </a:p>
           <a:p>
             <a:pPr>
@@ -13304,187 +13229,188 @@
               <a:rPr lang="en-US" altLang="zh-CN" dirty="0" smtClean="0"/>
               <a:t>Which role is corresponding to software engineer?</a:t>
             </a:r>
+            <a:endParaRPr lang="en-US" altLang="zh-CN" dirty="0" smtClean="0"/>
           </a:p>
           <a:p>
             <a:pPr lvl="1"/>
             <a:r>
               <a:rPr lang="zh-CN" altLang="en-US" dirty="0" smtClean="0">
-                <a:latin typeface="Microsoft YaHei" pitchFamily="34" charset="-122"/>
-                <a:ea typeface="Microsoft YaHei" pitchFamily="34" charset="-122"/>
+                <a:latin typeface="微软雅黑" panose="020B0503020204020204" charset="-122"/>
+                <a:ea typeface="微软雅黑" panose="020B0503020204020204" charset="-122"/>
               </a:rPr>
               <a:t>房地产老板</a:t>
             </a:r>
             <a:endParaRPr lang="en-US" altLang="zh-CN" dirty="0" smtClean="0">
-              <a:latin typeface="Microsoft YaHei" pitchFamily="34" charset="-122"/>
-              <a:ea typeface="Microsoft YaHei" pitchFamily="34" charset="-122"/>
+              <a:latin typeface="微软雅黑" panose="020B0503020204020204" charset="-122"/>
+              <a:ea typeface="微软雅黑" panose="020B0503020204020204" charset="-122"/>
             </a:endParaRPr>
           </a:p>
           <a:p>
             <a:pPr lvl="2"/>
             <a:r>
               <a:rPr lang="zh-CN" altLang="en-US" dirty="0" smtClean="0">
-                <a:latin typeface="Microsoft YaHei" pitchFamily="34" charset="-122"/>
-                <a:ea typeface="Microsoft YaHei" pitchFamily="34" charset="-122"/>
+                <a:latin typeface="微软雅黑" panose="020B0503020204020204" charset="-122"/>
+                <a:ea typeface="微软雅黑" panose="020B0503020204020204" charset="-122"/>
               </a:rPr>
               <a:t>投标，买地</a:t>
             </a:r>
             <a:endParaRPr lang="en-US" altLang="zh-CN" dirty="0" smtClean="0">
-              <a:latin typeface="Microsoft YaHei" pitchFamily="34" charset="-122"/>
-              <a:ea typeface="Microsoft YaHei" pitchFamily="34" charset="-122"/>
+              <a:latin typeface="微软雅黑" panose="020B0503020204020204" charset="-122"/>
+              <a:ea typeface="微软雅黑" panose="020B0503020204020204" charset="-122"/>
             </a:endParaRPr>
           </a:p>
           <a:p>
             <a:pPr lvl="1"/>
             <a:r>
               <a:rPr lang="zh-CN" altLang="en-US" dirty="0" smtClean="0">
-                <a:latin typeface="Microsoft YaHei" pitchFamily="34" charset="-122"/>
-                <a:ea typeface="Microsoft YaHei" pitchFamily="34" charset="-122"/>
+                <a:latin typeface="微软雅黑" panose="020B0503020204020204" charset="-122"/>
+                <a:ea typeface="微软雅黑" panose="020B0503020204020204" charset="-122"/>
               </a:rPr>
               <a:t>建筑设计师</a:t>
             </a:r>
             <a:endParaRPr lang="en-US" altLang="zh-CN" dirty="0" smtClean="0">
-              <a:latin typeface="Microsoft YaHei" pitchFamily="34" charset="-122"/>
-              <a:ea typeface="Microsoft YaHei" pitchFamily="34" charset="-122"/>
+              <a:latin typeface="微软雅黑" panose="020B0503020204020204" charset="-122"/>
+              <a:ea typeface="微软雅黑" panose="020B0503020204020204" charset="-122"/>
             </a:endParaRPr>
           </a:p>
           <a:p>
             <a:pPr lvl="2"/>
             <a:r>
               <a:rPr lang="zh-CN" altLang="en-US" dirty="0" smtClean="0">
-                <a:latin typeface="Microsoft YaHei" pitchFamily="34" charset="-122"/>
-                <a:ea typeface="Microsoft YaHei" pitchFamily="34" charset="-122"/>
+                <a:latin typeface="微软雅黑" panose="020B0503020204020204" charset="-122"/>
+                <a:ea typeface="微软雅黑" panose="020B0503020204020204" charset="-122"/>
               </a:rPr>
               <a:t>设计建筑</a:t>
             </a:r>
             <a:endParaRPr lang="en-US" altLang="zh-CN" dirty="0" smtClean="0">
-              <a:latin typeface="Microsoft YaHei" pitchFamily="34" charset="-122"/>
-              <a:ea typeface="Microsoft YaHei" pitchFamily="34" charset="-122"/>
+              <a:latin typeface="微软雅黑" panose="020B0503020204020204" charset="-122"/>
+              <a:ea typeface="微软雅黑" panose="020B0503020204020204" charset="-122"/>
             </a:endParaRPr>
           </a:p>
           <a:p>
             <a:pPr lvl="1"/>
             <a:r>
               <a:rPr lang="zh-CN" altLang="en-US" dirty="0" smtClean="0">
-                <a:latin typeface="Microsoft YaHei" pitchFamily="34" charset="-122"/>
-                <a:ea typeface="Microsoft YaHei" pitchFamily="34" charset="-122"/>
+                <a:latin typeface="微软雅黑" panose="020B0503020204020204" charset="-122"/>
+                <a:ea typeface="微软雅黑" panose="020B0503020204020204" charset="-122"/>
               </a:rPr>
               <a:t>土木工程师</a:t>
             </a:r>
             <a:endParaRPr lang="en-US" altLang="zh-CN" dirty="0" smtClean="0">
-              <a:latin typeface="Microsoft YaHei" pitchFamily="34" charset="-122"/>
-              <a:ea typeface="Microsoft YaHei" pitchFamily="34" charset="-122"/>
+              <a:latin typeface="微软雅黑" panose="020B0503020204020204" charset="-122"/>
+              <a:ea typeface="微软雅黑" panose="020B0503020204020204" charset="-122"/>
             </a:endParaRPr>
           </a:p>
           <a:p>
             <a:pPr lvl="2"/>
             <a:r>
               <a:rPr lang="zh-CN" altLang="en-US" dirty="0" smtClean="0">
-                <a:latin typeface="Microsoft YaHei" pitchFamily="34" charset="-122"/>
-                <a:ea typeface="Microsoft YaHei" pitchFamily="34" charset="-122"/>
+                <a:latin typeface="微软雅黑" panose="020B0503020204020204" charset="-122"/>
+                <a:ea typeface="微软雅黑" panose="020B0503020204020204" charset="-122"/>
               </a:rPr>
               <a:t>设计土木结构</a:t>
             </a:r>
             <a:endParaRPr lang="en-US" altLang="zh-CN" dirty="0" smtClean="0">
-              <a:latin typeface="Microsoft YaHei" pitchFamily="34" charset="-122"/>
-              <a:ea typeface="Microsoft YaHei" pitchFamily="34" charset="-122"/>
+              <a:latin typeface="微软雅黑" panose="020B0503020204020204" charset="-122"/>
+              <a:ea typeface="微软雅黑" panose="020B0503020204020204" charset="-122"/>
             </a:endParaRPr>
           </a:p>
           <a:p>
             <a:pPr lvl="1"/>
             <a:r>
               <a:rPr lang="zh-CN" altLang="en-US" dirty="0" smtClean="0">
-                <a:latin typeface="Microsoft YaHei" pitchFamily="34" charset="-122"/>
-                <a:ea typeface="Microsoft YaHei" pitchFamily="34" charset="-122"/>
+                <a:latin typeface="微软雅黑" panose="020B0503020204020204" charset="-122"/>
+                <a:ea typeface="微软雅黑" panose="020B0503020204020204" charset="-122"/>
               </a:rPr>
               <a:t>建筑工人</a:t>
             </a:r>
             <a:endParaRPr lang="en-US" altLang="zh-CN" dirty="0" smtClean="0">
-              <a:latin typeface="Microsoft YaHei" pitchFamily="34" charset="-122"/>
-              <a:ea typeface="Microsoft YaHei" pitchFamily="34" charset="-122"/>
+              <a:latin typeface="微软雅黑" panose="020B0503020204020204" charset="-122"/>
+              <a:ea typeface="微软雅黑" panose="020B0503020204020204" charset="-122"/>
             </a:endParaRPr>
           </a:p>
           <a:p>
             <a:pPr lvl="2"/>
             <a:r>
               <a:rPr lang="zh-CN" altLang="en-US" dirty="0" smtClean="0">
-                <a:latin typeface="Microsoft YaHei" pitchFamily="34" charset="-122"/>
-                <a:ea typeface="Microsoft YaHei" pitchFamily="34" charset="-122"/>
+                <a:latin typeface="微软雅黑" panose="020B0503020204020204" charset="-122"/>
+                <a:ea typeface="微软雅黑" panose="020B0503020204020204" charset="-122"/>
               </a:rPr>
               <a:t>具体建设</a:t>
             </a:r>
             <a:endParaRPr lang="en-US" altLang="zh-CN" dirty="0" smtClean="0">
-              <a:latin typeface="Microsoft YaHei" pitchFamily="34" charset="-122"/>
-              <a:ea typeface="Microsoft YaHei" pitchFamily="34" charset="-122"/>
+              <a:latin typeface="微软雅黑" panose="020B0503020204020204" charset="-122"/>
+              <a:ea typeface="微软雅黑" panose="020B0503020204020204" charset="-122"/>
             </a:endParaRPr>
           </a:p>
           <a:p>
             <a:pPr lvl="1"/>
             <a:r>
               <a:rPr lang="zh-CN" altLang="en-US" dirty="0" smtClean="0">
-                <a:latin typeface="Microsoft YaHei" pitchFamily="34" charset="-122"/>
-                <a:ea typeface="Microsoft YaHei" pitchFamily="34" charset="-122"/>
+                <a:latin typeface="微软雅黑" panose="020B0503020204020204" charset="-122"/>
+                <a:ea typeface="微软雅黑" panose="020B0503020204020204" charset="-122"/>
               </a:rPr>
               <a:t>工程监理</a:t>
             </a:r>
             <a:endParaRPr lang="en-US" altLang="zh-CN" dirty="0" smtClean="0">
-              <a:latin typeface="Microsoft YaHei" pitchFamily="34" charset="-122"/>
-              <a:ea typeface="Microsoft YaHei" pitchFamily="34" charset="-122"/>
+              <a:latin typeface="微软雅黑" panose="020B0503020204020204" charset="-122"/>
+              <a:ea typeface="微软雅黑" panose="020B0503020204020204" charset="-122"/>
             </a:endParaRPr>
           </a:p>
           <a:p>
             <a:pPr lvl="2"/>
             <a:r>
               <a:rPr lang="zh-CN" altLang="en-US" dirty="0" smtClean="0">
-                <a:latin typeface="Microsoft YaHei" pitchFamily="34" charset="-122"/>
-                <a:ea typeface="Microsoft YaHei" pitchFamily="34" charset="-122"/>
+                <a:latin typeface="微软雅黑" panose="020B0503020204020204" charset="-122"/>
+                <a:ea typeface="微软雅黑" panose="020B0503020204020204" charset="-122"/>
               </a:rPr>
               <a:t>监管质量</a:t>
             </a:r>
             <a:endParaRPr lang="en-US" altLang="zh-CN" dirty="0" smtClean="0">
-              <a:latin typeface="Microsoft YaHei" pitchFamily="34" charset="-122"/>
-              <a:ea typeface="Microsoft YaHei" pitchFamily="34" charset="-122"/>
+              <a:latin typeface="微软雅黑" panose="020B0503020204020204" charset="-122"/>
+              <a:ea typeface="微软雅黑" panose="020B0503020204020204" charset="-122"/>
             </a:endParaRPr>
           </a:p>
           <a:p>
             <a:pPr lvl="1"/>
             <a:r>
               <a:rPr lang="zh-CN" altLang="en-US" dirty="0" smtClean="0">
-                <a:latin typeface="Microsoft YaHei" pitchFamily="34" charset="-122"/>
-                <a:ea typeface="Microsoft YaHei" pitchFamily="34" charset="-122"/>
+                <a:latin typeface="微软雅黑" panose="020B0503020204020204" charset="-122"/>
+                <a:ea typeface="微软雅黑" panose="020B0503020204020204" charset="-122"/>
               </a:rPr>
               <a:t>装修工人</a:t>
             </a:r>
             <a:endParaRPr lang="en-US" altLang="zh-CN" dirty="0" smtClean="0">
-              <a:latin typeface="Microsoft YaHei" pitchFamily="34" charset="-122"/>
-              <a:ea typeface="Microsoft YaHei" pitchFamily="34" charset="-122"/>
+              <a:latin typeface="微软雅黑" panose="020B0503020204020204" charset="-122"/>
+              <a:ea typeface="微软雅黑" panose="020B0503020204020204" charset="-122"/>
             </a:endParaRPr>
           </a:p>
           <a:p>
             <a:pPr lvl="1"/>
             <a:r>
               <a:rPr lang="zh-CN" altLang="en-US" dirty="0" smtClean="0">
-                <a:latin typeface="Microsoft YaHei" pitchFamily="34" charset="-122"/>
-                <a:ea typeface="Microsoft YaHei" pitchFamily="34" charset="-122"/>
+                <a:latin typeface="微软雅黑" panose="020B0503020204020204" charset="-122"/>
+                <a:ea typeface="微软雅黑" panose="020B0503020204020204" charset="-122"/>
               </a:rPr>
               <a:t>楼房销售</a:t>
             </a:r>
             <a:endParaRPr lang="en-US" altLang="zh-CN" dirty="0" smtClean="0">
-              <a:latin typeface="Microsoft YaHei" pitchFamily="34" charset="-122"/>
-              <a:ea typeface="Microsoft YaHei" pitchFamily="34" charset="-122"/>
+              <a:latin typeface="微软雅黑" panose="020B0503020204020204" charset="-122"/>
+              <a:ea typeface="微软雅黑" panose="020B0503020204020204" charset="-122"/>
             </a:endParaRPr>
           </a:p>
           <a:p>
             <a:pPr lvl="1"/>
             <a:r>
               <a:rPr lang="zh-CN" altLang="en-US" dirty="0" smtClean="0">
-                <a:latin typeface="Microsoft YaHei" pitchFamily="34" charset="-122"/>
-                <a:ea typeface="Microsoft YaHei" pitchFamily="34" charset="-122"/>
+                <a:latin typeface="微软雅黑" panose="020B0503020204020204" charset="-122"/>
+                <a:ea typeface="微软雅黑" panose="020B0503020204020204" charset="-122"/>
               </a:rPr>
               <a:t>楼房中介</a:t>
             </a:r>
             <a:endParaRPr lang="en-US" altLang="zh-CN" dirty="0" smtClean="0">
-              <a:latin typeface="Microsoft YaHei" pitchFamily="34" charset="-122"/>
-              <a:ea typeface="Microsoft YaHei" pitchFamily="34" charset="-122"/>
+              <a:latin typeface="微软雅黑" panose="020B0503020204020204" charset="-122"/>
+              <a:ea typeface="微软雅黑" panose="020B0503020204020204" charset="-122"/>
             </a:endParaRPr>
           </a:p>
           <a:p>
@@ -13493,8 +13419,8 @@
               <a:t>Should software engineering include elements of art?</a:t>
             </a:r>
             <a:endParaRPr lang="en-US" altLang="zh-CN" dirty="0" smtClean="0">
-              <a:latin typeface="Microsoft YaHei" pitchFamily="34" charset="-122"/>
-              <a:ea typeface="Microsoft YaHei" pitchFamily="34" charset="-122"/>
+              <a:latin typeface="微软雅黑" panose="020B0503020204020204" charset="-122"/>
+              <a:ea typeface="微软雅黑" panose="020B0503020204020204" charset="-122"/>
             </a:endParaRPr>
           </a:p>
         </p:txBody>
@@ -13576,6 +13502,7 @@
               <a:rPr lang="en-US" altLang="zh-CN" dirty="0"/>
               <a:t> </a:t>
             </a:r>
+            <a:endParaRPr lang="en-US" altLang="zh-CN" dirty="0"/>
           </a:p>
           <a:p>
             <a:r>
@@ -14751,18 +14678,21 @@
               <a:rPr lang="en-US" sz="1800" dirty="0" smtClean="0"/>
               <a:t> </a:t>
             </a:r>
+            <a:endParaRPr lang="en-US" sz="1800" dirty="0" smtClean="0"/>
           </a:p>
           <a:p>
             <a:r>
               <a:rPr lang="en-US" sz="2000" dirty="0" smtClean="0"/>
               <a:t>How does TPP guide engineer in:</a:t>
             </a:r>
+            <a:endParaRPr lang="en-US" sz="2000" dirty="0" smtClean="0"/>
           </a:p>
           <a:p>
             <a:r>
               <a:rPr lang="en-US" sz="2000" dirty="0" smtClean="0"/>
               <a:t>Planning</a:t>
             </a:r>
+            <a:endParaRPr lang="en-US" sz="2000" dirty="0" smtClean="0"/>
           </a:p>
           <a:p>
             <a:r>
@@ -14773,6 +14703,7 @@
               <a:rPr lang="en-US" sz="2000" dirty="0" smtClean="0"/>
               <a:t>evelopment </a:t>
             </a:r>
+            <a:endParaRPr lang="en-US" sz="2000" dirty="0" smtClean="0"/>
           </a:p>
           <a:p>
             <a:pPr lvl="1"/>
@@ -14784,34 +14715,37 @@
               <a:rPr lang="en-US" sz="1800" dirty="0" smtClean="0"/>
               <a:t>esign, </a:t>
             </a:r>
-          </a:p>
-          <a:p>
-            <a:pPr marL="887412" lvl="3" indent="-255588">
+            <a:endParaRPr lang="en-US" sz="1800" dirty="0" smtClean="0"/>
+          </a:p>
+          <a:p>
+            <a:pPr marL="887095" lvl="3" indent="-255905">
               <a:spcBef>
                 <a:spcPts val="400"/>
               </a:spcBef>
               <a:buSzPct val="68000"/>
-              <a:buFont typeface="Wingdings 3" pitchFamily="18" charset="2"/>
+              <a:buFont typeface="Wingdings 3" panose="05040102010807070707" pitchFamily="18" charset="2"/>
               <a:buChar char=""/>
             </a:pPr>
             <a:r>
               <a:rPr lang="en-US" dirty="0" smtClean="0"/>
               <a:t>design review and code review</a:t>
             </a:r>
-          </a:p>
-          <a:p>
-            <a:pPr marL="887412" lvl="3" indent="-255588">
+            <a:endParaRPr lang="en-US" dirty="0" smtClean="0"/>
+          </a:p>
+          <a:p>
+            <a:pPr marL="887095" lvl="3" indent="-255905">
               <a:spcBef>
                 <a:spcPts val="400"/>
               </a:spcBef>
               <a:buSzPct val="68000"/>
-              <a:buFont typeface="Wingdings 3" pitchFamily="18" charset="2"/>
+              <a:buFont typeface="Wingdings 3" panose="05040102010807070707" pitchFamily="18" charset="2"/>
               <a:buChar char=""/>
             </a:pPr>
             <a:r>
               <a:rPr lang="en-US" dirty="0" smtClean="0"/>
               <a:t>coding standard</a:t>
             </a:r>
+            <a:endParaRPr lang="en-US" dirty="0" smtClean="0"/>
           </a:p>
           <a:p>
             <a:pPr lvl="1"/>
@@ -14819,6 +14753,7 @@
               <a:rPr lang="en-US" sz="1800" dirty="0" smtClean="0"/>
               <a:t>Coding</a:t>
             </a:r>
+            <a:endParaRPr lang="en-US" sz="1800" dirty="0" smtClean="0"/>
           </a:p>
           <a:p>
             <a:pPr lvl="2"/>
@@ -14838,6 +14773,7 @@
               <a:rPr lang="en-US" sz="1800" dirty="0" smtClean="0"/>
               <a:t>est </a:t>
             </a:r>
+            <a:endParaRPr lang="en-US" sz="1800" dirty="0" smtClean="0"/>
           </a:p>
           <a:p>
             <a:r>
@@ -14848,6 +14784,7 @@
               <a:rPr lang="en-US" sz="2000" dirty="0" smtClean="0"/>
               <a:t>ostmortem</a:t>
             </a:r>
+            <a:endParaRPr lang="en-US" sz="2000" dirty="0" smtClean="0"/>
           </a:p>
         </p:txBody>
       </p:sp>
@@ -14860,7 +14797,7 @@
           <p:nvPr/>
         </p:nvPicPr>
         <p:blipFill>
-          <a:blip r:embed="rId2">
+          <a:blip r:embed="rId1">
             <a:extLst>
               <a:ext uri="{28A0092B-C50C-407E-A947-70E740481C1C}">
                 <a14:useLocalDpi xmlns:a14="http://schemas.microsoft.com/office/drawing/2010/main" val="0"/>
@@ -14991,12 +14928,14 @@
               <a:rPr lang="en-US" dirty="0" smtClean="0"/>
               <a:t>Estimation – consider 2 developers</a:t>
             </a:r>
+            <a:endParaRPr lang="en-US" dirty="0" smtClean="0"/>
           </a:p>
           <a:p>
             <a:r>
               <a:rPr lang="en-US" dirty="0" smtClean="0"/>
               <a:t>Al improves his task finish time from 10 days to 7 days; Bob improves it from 10 days to 8 days.  Is Al better?</a:t>
             </a:r>
+            <a:endParaRPr lang="en-US" dirty="0" smtClean="0"/>
           </a:p>
           <a:p>
             <a:pPr>
@@ -15018,13 +14957,7 @@
           <p:cNvGraphicFramePr>
             <a:graphicFrameLocks noGrp="1"/>
           </p:cNvGraphicFramePr>
-          <p:nvPr>
-            <p:extLst>
-              <p:ext uri="{D42A27DB-BD31-4B8C-83A1-F6EECF244321}">
-                <p14:modId xmlns:p14="http://schemas.microsoft.com/office/powerpoint/2010/main" val="746464362"/>
-              </p:ext>
-            </p:extLst>
-          </p:nvPr>
+          <p:nvPr/>
         </p:nvGraphicFramePr>
         <p:xfrm>
           <a:off x="990600" y="3997180"/>
@@ -15037,41 +14970,11 @@
                 <a:tableStyleId>{5C22544A-7EE6-4342-B048-85BDC9FD1C3A}</a:tableStyleId>
               </a:tblPr>
               <a:tblGrid>
-                <a:gridCol w="1417320">
-                  <a:extLst>
-                    <a:ext uri="{9D8B030D-6E8A-4147-A177-3AD203B41FA5}">
-                      <a16:colId xmlns:a16="http://schemas.microsoft.com/office/drawing/2014/main" val="20000"/>
-                    </a:ext>
-                  </a:extLst>
-                </a:gridCol>
-                <a:gridCol w="1417320">
-                  <a:extLst>
-                    <a:ext uri="{9D8B030D-6E8A-4147-A177-3AD203B41FA5}">
-                      <a16:colId xmlns:a16="http://schemas.microsoft.com/office/drawing/2014/main" val="20001"/>
-                    </a:ext>
-                  </a:extLst>
-                </a:gridCol>
-                <a:gridCol w="1417320">
-                  <a:extLst>
-                    <a:ext uri="{9D8B030D-6E8A-4147-A177-3AD203B41FA5}">
-                      <a16:colId xmlns:a16="http://schemas.microsoft.com/office/drawing/2014/main" val="20002"/>
-                    </a:ext>
-                  </a:extLst>
-                </a:gridCol>
-                <a:gridCol w="1417320">
-                  <a:extLst>
-                    <a:ext uri="{9D8B030D-6E8A-4147-A177-3AD203B41FA5}">
-                      <a16:colId xmlns:a16="http://schemas.microsoft.com/office/drawing/2014/main" val="20003"/>
-                    </a:ext>
-                  </a:extLst>
-                </a:gridCol>
-                <a:gridCol w="1417320">
-                  <a:extLst>
-                    <a:ext uri="{9D8B030D-6E8A-4147-A177-3AD203B41FA5}">
-                      <a16:colId xmlns:a16="http://schemas.microsoft.com/office/drawing/2014/main" val="20004"/>
-                    </a:ext>
-                  </a:extLst>
-                </a:gridCol>
+                <a:gridCol w="1417320"/>
+                <a:gridCol w="1417320"/>
+                <a:gridCol w="1417320"/>
+                <a:gridCol w="1417320"/>
+                <a:gridCol w="1417320"/>
               </a:tblGrid>
               <a:tr h="517381">
                 <a:tc>
@@ -15144,11 +15047,6 @@
                   </a:txBody>
                   <a:tcPr/>
                 </a:tc>
-                <a:extLst>
-                  <a:ext uri="{0D108BD9-81ED-4DB2-BD59-A6C34878D82A}">
-                    <a16:rowId xmlns:a16="http://schemas.microsoft.com/office/drawing/2014/main" val="10000"/>
-                  </a:ext>
-                </a:extLst>
               </a:tr>
               <a:tr h="513275">
                 <a:tc>
@@ -15237,11 +15135,6 @@
                   </a:txBody>
                   <a:tcPr/>
                 </a:tc>
-                <a:extLst>
-                  <a:ext uri="{0D108BD9-81ED-4DB2-BD59-A6C34878D82A}">
-                    <a16:rowId xmlns:a16="http://schemas.microsoft.com/office/drawing/2014/main" val="10001"/>
-                  </a:ext>
-                </a:extLst>
               </a:tr>
               <a:tr h="513275">
                 <a:tc>
@@ -15322,11 +15215,6 @@
                   </a:txBody>
                   <a:tcPr/>
                 </a:tc>
-                <a:extLst>
-                  <a:ext uri="{0D108BD9-81ED-4DB2-BD59-A6C34878D82A}">
-                    <a16:rowId xmlns:a16="http://schemas.microsoft.com/office/drawing/2014/main" val="10002"/>
-                  </a:ext>
-                </a:extLst>
               </a:tr>
               <a:tr h="513275">
                 <a:tc>
@@ -15387,11 +15275,6 @@
                   </a:txBody>
                   <a:tcPr/>
                 </a:tc>
-                <a:extLst>
-                  <a:ext uri="{0D108BD9-81ED-4DB2-BD59-A6C34878D82A}">
-                    <a16:rowId xmlns:a16="http://schemas.microsoft.com/office/drawing/2014/main" val="10003"/>
-                  </a:ext>
-                </a:extLst>
               </a:tr>
               <a:tr h="513275">
                 <a:tc>
@@ -15460,11 +15343,6 @@
                   </a:txBody>
                   <a:tcPr/>
                 </a:tc>
-                <a:extLst>
-                  <a:ext uri="{0D108BD9-81ED-4DB2-BD59-A6C34878D82A}">
-                    <a16:rowId xmlns:a16="http://schemas.microsoft.com/office/drawing/2014/main" val="10004"/>
-                  </a:ext>
-                </a:extLst>
               </a:tr>
             </a:tbl>
           </a:graphicData>
@@ -15744,13 +15622,14 @@
           <a:bodyPr/>
           <a:lstStyle/>
           <a:p>
-            <a:pPr marL="118872" indent="0">
+            <a:pPr marL="118745" indent="0">
               <a:buNone/>
             </a:pPr>
             <a:r>
               <a:rPr lang="en-US" i="1" dirty="0" smtClean="0"/>
               <a:t>Standard deviation is key to the quality of service, and key to build trust.   </a:t>
             </a:r>
+            <a:endParaRPr lang="en-US" i="1" dirty="0" smtClean="0"/>
           </a:p>
           <a:p>
             <a:pPr marL="274320" lvl="1" indent="0">
@@ -15760,12 +15639,14 @@
               <a:rPr lang="en-US" altLang="zh-CN" dirty="0" smtClean="0"/>
               <a:t>		- Jack Welch</a:t>
             </a:r>
+            <a:endParaRPr lang="en-US" altLang="zh-CN" dirty="0" smtClean="0"/>
           </a:p>
           <a:p>
             <a:r>
               <a:rPr lang="en-US" altLang="zh-CN" dirty="0" smtClean="0"/>
               <a:t>Estimation/Promise  vs.  Delivery</a:t>
             </a:r>
+            <a:endParaRPr lang="en-US" altLang="zh-CN" dirty="0" smtClean="0"/>
           </a:p>
           <a:p>
             <a:r>
@@ -15858,12 +15739,14 @@
               <a:rPr lang="en-US" dirty="0" smtClean="0"/>
               <a:t>When can you claim you have the skill?</a:t>
             </a:r>
+            <a:endParaRPr lang="en-US" dirty="0" smtClean="0"/>
           </a:p>
           <a:p>
             <a:r>
               <a:rPr lang="en-US" dirty="0" smtClean="0"/>
               <a:t>What’s the opposite of skill?</a:t>
             </a:r>
+            <a:endParaRPr lang="en-US" dirty="0" smtClean="0"/>
           </a:p>
           <a:p>
             <a:pPr lvl="1"/>
@@ -15871,6 +15754,7 @@
               <a:rPr lang="en-US" dirty="0" smtClean="0"/>
               <a:t>Unskilled?</a:t>
             </a:r>
+            <a:endParaRPr lang="en-US" dirty="0" smtClean="0"/>
           </a:p>
           <a:p>
             <a:pPr lvl="1"/>
@@ -15878,6 +15762,7 @@
               <a:rPr lang="en-US" dirty="0" smtClean="0"/>
               <a:t>“problem solving”</a:t>
             </a:r>
+            <a:endParaRPr lang="en-US" dirty="0" smtClean="0"/>
           </a:p>
           <a:p>
             <a:endParaRPr lang="en-US" dirty="0"/>
@@ -15885,13 +15770,13 @@
           <a:p>
             <a:r>
               <a:rPr lang="en-US" dirty="0">
-                <a:hlinkClick r:id="rId2"/>
+                <a:hlinkClick r:id="rId1"/>
               </a:rPr>
               <a:t>http://</a:t>
             </a:r>
             <a:r>
               <a:rPr lang="en-US" dirty="0" smtClean="0">
-                <a:hlinkClick r:id="rId2"/>
+                <a:hlinkClick r:id="rId1"/>
               </a:rPr>
               <a:t>www.billbuxton.com/xc.html</a:t>
             </a:r>
@@ -15905,6 +15790,7 @@
               <a:rPr lang="en-US" dirty="0" smtClean="0"/>
               <a:t>Quality vs. Quantity</a:t>
             </a:r>
+            <a:endParaRPr lang="en-US" dirty="0" smtClean="0"/>
           </a:p>
           <a:p>
             <a:pPr lvl="1"/>
@@ -15912,6 +15798,7 @@
               <a:rPr lang="en-US" dirty="0" smtClean="0"/>
               <a:t>Story of making pottery,  the “quantity group” vs. “quality group”</a:t>
             </a:r>
+            <a:endParaRPr lang="en-US" dirty="0" smtClean="0"/>
           </a:p>
           <a:p>
             <a:endParaRPr lang="en-US" dirty="0"/>
@@ -15919,11 +15806,6 @@
         </p:txBody>
       </p:sp>
     </p:spTree>
-    <p:extLst>
-      <p:ext uri="{BB962C8B-B14F-4D97-AF65-F5344CB8AC3E}">
-        <p14:creationId xmlns:p14="http://schemas.microsoft.com/office/powerpoint/2010/main" val="3589889823"/>
-      </p:ext>
-    </p:extLst>
   </p:cSld>
   <p:clrMapOvr>
     <a:masterClrMapping/>
@@ -15989,7 +15871,7 @@
           </p:nvPr>
         </p:nvPicPr>
         <p:blipFill>
-          <a:blip r:embed="rId2"/>
+          <a:blip r:embed="rId1"/>
           <a:stretch>
             <a:fillRect/>
           </a:stretch>
@@ -16005,11 +15887,6 @@
         </p:spPr>
       </p:pic>
     </p:spTree>
-    <p:extLst>
-      <p:ext uri="{BB962C8B-B14F-4D97-AF65-F5344CB8AC3E}">
-        <p14:creationId xmlns:p14="http://schemas.microsoft.com/office/powerpoint/2010/main" val="795476574"/>
-      </p:ext>
-    </p:extLst>
   </p:cSld>
   <p:clrMapOvr>
     <a:masterClrMapping/>
@@ -16084,14 +15961,14 @@
           </a:bodyPr>
           <a:lstStyle/>
           <a:p>
-            <a:pPr marL="4763" indent="-4763" eaLnBrk="1" fontAlgn="auto" hangingPunct="1">
+            <a:pPr marL="5080" indent="-5080" eaLnBrk="1" fontAlgn="auto" hangingPunct="1">
               <a:spcAft>
                 <a:spcPts val="0"/>
               </a:spcAft>
               <a:buClr>
                 <a:schemeClr val="accent3"/>
               </a:buClr>
-              <a:buFont typeface="Wingdings 2"/>
+              <a:buFont typeface="Wingdings 2" panose="05020102010507070707"/>
               <a:buNone/>
               <a:defRPr/>
             </a:pPr>
@@ -16117,7 +15994,7 @@
               <a:buClr>
                 <a:schemeClr val="accent3"/>
               </a:buClr>
-              <a:buFont typeface="Wingdings 2"/>
+              <a:buFont typeface="Wingdings 2" panose="05020102010507070707"/>
               <a:buNone/>
               <a:defRPr/>
             </a:pPr>
@@ -16137,7 +16014,7 @@
             <a:endParaRPr lang="en-US" altLang="zh-CN" dirty="0" smtClean="0"/>
           </a:p>
           <a:p>
-            <a:pPr marL="118872" indent="0">
+            <a:pPr marL="118745" indent="0">
               <a:buClr>
                 <a:schemeClr val="accent3"/>
               </a:buClr>
@@ -16152,6 +16029,7 @@
               <a:rPr lang="en-US" dirty="0" smtClean="0"/>
               <a:t>Software Process</a:t>
             </a:r>
+            <a:endParaRPr lang="en-US" dirty="0" smtClean="0"/>
           </a:p>
           <a:p>
             <a:pPr>
@@ -16185,7 +16063,7 @@
             <a:endParaRPr lang="en-US" altLang="zh-CN" dirty="0" smtClean="0"/>
           </a:p>
           <a:p>
-            <a:pPr marL="118872" indent="0">
+            <a:pPr marL="118745" indent="0">
               <a:buClr>
                 <a:schemeClr val="accent3"/>
               </a:buClr>
@@ -16213,7 +16091,7 @@
           <p:nvPr/>
         </p:nvPicPr>
         <p:blipFill>
-          <a:blip r:embed="rId2" cstate="print"/>
+          <a:blip r:embed="rId1" cstate="print"/>
           <a:srcRect/>
           <a:stretch>
             <a:fillRect/>
@@ -16239,7 +16117,7 @@
           <p:nvPr/>
         </p:nvPicPr>
         <p:blipFill>
-          <a:blip r:embed="rId3" cstate="print"/>
+          <a:blip r:embed="rId2" cstate="print"/>
           <a:srcRect/>
           <a:stretch>
             <a:fillRect/>
@@ -16805,6 +16683,7 @@
               <a:rPr lang="zh-CN" altLang="en-US" dirty="0"/>
               <a:t>给面试者一个各面打乱颜色的魔方； </a:t>
             </a:r>
+            <a:endParaRPr lang="zh-CN" altLang="en-US" dirty="0"/>
           </a:p>
           <a:p>
             <a:pPr lvl="1"/>
@@ -16816,6 +16695,7 @@
               <a:rPr lang="zh-CN" altLang="en-US" dirty="0"/>
               <a:t>要求他把六面还原； </a:t>
             </a:r>
+            <a:endParaRPr lang="zh-CN" altLang="en-US" dirty="0"/>
           </a:p>
           <a:p>
             <a:pPr lvl="1"/>
@@ -16873,11 +16753,6 @@
         </p:txBody>
       </p:sp>
     </p:spTree>
-    <p:extLst>
-      <p:ext uri="{BB962C8B-B14F-4D97-AF65-F5344CB8AC3E}">
-        <p14:creationId xmlns:p14="http://schemas.microsoft.com/office/powerpoint/2010/main" val="2293132687"/>
-      </p:ext>
-    </p:extLst>
   </p:cSld>
   <p:clrMapOvr>
     <a:masterClrMapping/>
@@ -16956,11 +16831,6 @@
         </p:txBody>
       </p:sp>
     </p:spTree>
-    <p:extLst>
-      <p:ext uri="{BB962C8B-B14F-4D97-AF65-F5344CB8AC3E}">
-        <p14:creationId xmlns:p14="http://schemas.microsoft.com/office/powerpoint/2010/main" val="3541253995"/>
-      </p:ext>
-    </p:extLst>
   </p:cSld>
   <p:clrMapOvr>
     <a:masterClrMapping/>
@@ -17076,18 +16946,18 @@
             <a:endParaRPr lang="en-US" altLang="zh-CN" dirty="0" smtClean="0"/>
           </a:p>
           <a:p>
-            <a:pPr marL="118872" indent="0">
+            <a:pPr marL="118745" indent="0">
               <a:buNone/>
             </a:pPr>
             <a:r>
               <a:rPr lang="en-US" altLang="zh-CN" dirty="0">
-                <a:hlinkClick r:id="rId2"/>
+                <a:hlinkClick r:id="rId1"/>
               </a:rPr>
               <a:t>http://</a:t>
             </a:r>
             <a:r>
               <a:rPr lang="en-US" altLang="zh-CN" dirty="0" smtClean="0">
-                <a:hlinkClick r:id="rId2"/>
+                <a:hlinkClick r:id="rId1"/>
               </a:rPr>
               <a:t>www.cnblogs.com/xinz/p/3852177.html</a:t>
             </a:r>
@@ -17100,11 +16970,6 @@
         </p:txBody>
       </p:sp>
     </p:spTree>
-    <p:extLst>
-      <p:ext uri="{BB962C8B-B14F-4D97-AF65-F5344CB8AC3E}">
-        <p14:creationId xmlns:p14="http://schemas.microsoft.com/office/powerpoint/2010/main" val="40520653"/>
-      </p:ext>
-    </p:extLst>
   </p:cSld>
   <p:clrMapOvr>
     <a:masterClrMapping/>
@@ -17171,13 +17036,13 @@
           <a:p>
             <a:r>
               <a:rPr lang="en-US" altLang="zh-CN">
-                <a:hlinkClick r:id="rId2"/>
+                <a:hlinkClick r:id="rId1"/>
               </a:rPr>
               <a:t>http://</a:t>
             </a:r>
             <a:r>
               <a:rPr lang="en-US" altLang="zh-CN" smtClean="0">
-                <a:hlinkClick r:id="rId2"/>
+                <a:hlinkClick r:id="rId1"/>
               </a:rPr>
               <a:t>www.cnblogs.com/xinz/p/3803109.html</a:t>
             </a:r>
@@ -17191,6 +17056,7 @@
               <a:rPr lang="en-US" altLang="zh-CN" dirty="0" smtClean="0"/>
               <a:t>how do you measure the performance of each team member?</a:t>
             </a:r>
+            <a:endParaRPr lang="en-US" altLang="zh-CN" dirty="0" smtClean="0"/>
           </a:p>
           <a:p>
             <a:pPr lvl="1"/>
@@ -17346,6 +17212,7 @@
               <a:rPr lang="en-US" altLang="zh-CN" sz="2200" b="1" dirty="0" smtClean="0"/>
               <a:t>(this is your focus)</a:t>
             </a:r>
+            <a:endParaRPr lang="en-US" altLang="zh-CN" sz="2200" b="1" dirty="0" smtClean="0"/>
           </a:p>
           <a:p>
             <a:pPr>
@@ -17391,6 +17258,7 @@
               <a:rPr lang="en-US" altLang="zh-CN" sz="2400" dirty="0" smtClean="0"/>
               <a:t>?</a:t>
             </a:r>
+            <a:endParaRPr lang="en-US" altLang="zh-CN" sz="2400" dirty="0" smtClean="0"/>
           </a:p>
           <a:p>
             <a:pPr>
@@ -17402,7 +17270,7 @@
             </a:r>
             <a:r>
               <a:rPr lang="en-US" altLang="zh-CN" sz="2400" dirty="0" smtClean="0">
-                <a:sym typeface="Wingdings" pitchFamily="2" charset="2"/>
+                <a:sym typeface="Wingdings" panose="05000000000000000000" pitchFamily="2" charset="2"/>
               </a:rPr>
               <a:t></a:t>
             </a:r>
@@ -17488,11 +17356,6 @@
         </p:txBody>
       </p:sp>
     </p:spTree>
-    <p:extLst>
-      <p:ext uri="{BB962C8B-B14F-4D97-AF65-F5344CB8AC3E}">
-        <p14:creationId xmlns:p14="http://schemas.microsoft.com/office/powerpoint/2010/main" val="1088086049"/>
-      </p:ext>
-    </p:extLst>
   </p:cSld>
   <p:clrMapOvr>
     <a:masterClrMapping/>
@@ -17569,12 +17432,12 @@
             </a:pPr>
             <a:r>
               <a:rPr lang="zh-CN" altLang="en-US" dirty="0" smtClean="0">
-                <a:hlinkClick r:id="rId2"/>
+                <a:hlinkClick r:id="rId1"/>
               </a:rPr>
               <a:t>阅读</a:t>
             </a:r>
             <a:endParaRPr lang="en-US" altLang="zh-CN" dirty="0" smtClean="0">
-              <a:hlinkClick r:id="rId2"/>
+              <a:hlinkClick r:id="rId1"/>
             </a:endParaRPr>
           </a:p>
           <a:p>
@@ -17582,7 +17445,7 @@
               <a:buNone/>
             </a:pPr>
             <a:endParaRPr lang="en-US" altLang="zh-CN" dirty="0">
-              <a:hlinkClick r:id="rId2"/>
+              <a:hlinkClick r:id="rId1"/>
             </a:endParaRPr>
           </a:p>
           <a:p>
@@ -17591,19 +17454,19 @@
             </a:pPr>
             <a:r>
               <a:rPr lang="en-US" altLang="zh-CN" dirty="0" smtClean="0">
-                <a:hlinkClick r:id="rId2"/>
+                <a:hlinkClick r:id="rId1"/>
               </a:rPr>
               <a:t>http</a:t>
             </a:r>
             <a:r>
               <a:rPr lang="en-US" altLang="zh-CN" dirty="0">
-                <a:hlinkClick r:id="rId2"/>
+                <a:hlinkClick r:id="rId1"/>
               </a:rPr>
               <a:t>://</a:t>
             </a:r>
             <a:r>
               <a:rPr lang="en-US" altLang="zh-CN" dirty="0" smtClean="0">
-                <a:hlinkClick r:id="rId2"/>
+                <a:hlinkClick r:id="rId1"/>
               </a:rPr>
               <a:t>www.cnblogs.com/xinz/archive/2011/03/28/1997566.html</a:t>
             </a:r>
@@ -17643,6 +17506,7 @@
               <a:rPr lang="en-US" altLang="zh-CN" dirty="0" smtClean="0"/>
               <a:t>: </a:t>
             </a:r>
+            <a:endParaRPr lang="en-US" altLang="zh-CN" dirty="0" smtClean="0"/>
           </a:p>
           <a:p>
             <a:pPr marL="0" indent="0">
@@ -17721,11 +17585,6 @@
         </p:txBody>
       </p:sp>
     </p:spTree>
-    <p:extLst>
-      <p:ext uri="{BB962C8B-B14F-4D97-AF65-F5344CB8AC3E}">
-        <p14:creationId xmlns:p14="http://schemas.microsoft.com/office/powerpoint/2010/main" val="3276572003"/>
-      </p:ext>
-    </p:extLst>
   </p:cSld>
   <p:clrMapOvr>
     <a:masterClrMapping/>
@@ -17806,6 +17665,7 @@
               <a:rPr lang="en-US" dirty="0" smtClean="0"/>
               <a:t>Personal Soccer Process</a:t>
             </a:r>
+            <a:endParaRPr lang="en-US" dirty="0" smtClean="0"/>
           </a:p>
           <a:p>
             <a:pPr lvl="1"/>
@@ -17839,6 +17699,7 @@
               <a:rPr lang="en-US" dirty="0" smtClean="0"/>
               <a:t>Team Soccer Process</a:t>
             </a:r>
+            <a:endParaRPr lang="en-US" dirty="0" smtClean="0"/>
           </a:p>
           <a:p>
             <a:pPr lvl="1"/>
@@ -17882,7 +17743,7 @@
       <p:pic>
         <p:nvPicPr>
           <p:cNvPr id="1031" name="Picture 7" descr="http://t1.gstatic.com/images?q=tbn:Ervd0cBao52trM:http://s3.amazonaws.com/pixmac-preview/soccer-player-silhouettes-1.jpg">
-            <a:hlinkClick r:id="rId3"/>
+            <a:hlinkClick r:id="rId1"/>
           </p:cNvPr>
           <p:cNvPicPr>
             <a:picLocks noChangeAspect="1" noChangeArrowheads="1"/>
@@ -17890,7 +17751,7 @@
           <p:nvPr/>
         </p:nvPicPr>
         <p:blipFill>
-          <a:blip r:embed="rId4" cstate="print"/>
+          <a:blip r:embed="rId2" cstate="print"/>
           <a:srcRect/>
           <a:stretch>
             <a:fillRect/>
@@ -17916,7 +17777,7 @@
           <p:nvPr/>
         </p:nvPicPr>
         <p:blipFill>
-          <a:blip r:embed="rId5" cstate="print"/>
+          <a:blip r:embed="rId3" cstate="print"/>
           <a:srcRect/>
           <a:stretch>
             <a:fillRect/>
@@ -18596,12 +18457,14 @@
               <a:rPr lang="en-US" sz="2800" dirty="0" smtClean="0"/>
               <a:t>Most components in a software system is developed and maintained by Individual Contributor (IC)</a:t>
             </a:r>
+            <a:endParaRPr lang="en-US" sz="2800" dirty="0" smtClean="0"/>
           </a:p>
           <a:p>
             <a:r>
               <a:rPr lang="en-US" sz="2800" dirty="0" smtClean="0"/>
               <a:t>IC needs to – </a:t>
             </a:r>
+            <a:endParaRPr lang="en-US" sz="2800" dirty="0" smtClean="0"/>
           </a:p>
           <a:p>
             <a:pPr lvl="1"/>
@@ -18807,6 +18670,7 @@
               <a:rPr lang="en-US" altLang="zh-CN" dirty="0" smtClean="0"/>
               <a:t>?</a:t>
             </a:r>
+            <a:endParaRPr lang="en-US" altLang="zh-CN" dirty="0" smtClean="0"/>
           </a:p>
           <a:p>
             <a:r>
@@ -18821,6 +18685,7 @@
               <a:rPr lang="en-US" altLang="zh-CN" dirty="0" smtClean="0"/>
               <a:t>:</a:t>
             </a:r>
+            <a:endParaRPr lang="en-US" altLang="zh-CN" dirty="0" smtClean="0"/>
           </a:p>
           <a:p>
             <a:pPr lvl="1"/>
@@ -18919,6 +18784,7 @@
               <a:rPr lang="en-US" altLang="zh-CN" dirty="0" smtClean="0"/>
               <a:t>:</a:t>
             </a:r>
+            <a:endParaRPr lang="en-US" altLang="zh-CN" dirty="0" smtClean="0"/>
           </a:p>
           <a:p>
             <a:pPr lvl="1"/>
@@ -18938,6 +18804,7 @@
               <a:rPr lang="en-US" altLang="zh-CN" dirty="0" smtClean="0"/>
               <a:t>…</a:t>
             </a:r>
+            <a:endParaRPr lang="en-US" altLang="zh-CN" dirty="0" smtClean="0"/>
           </a:p>
           <a:p>
             <a:pPr lvl="1"/>
@@ -18961,6 +18828,7 @@
               <a:rPr lang="en-US" altLang="zh-CN" dirty="0" smtClean="0"/>
               <a:t>…</a:t>
             </a:r>
+            <a:endParaRPr lang="en-US" altLang="zh-CN" dirty="0" smtClean="0"/>
           </a:p>
           <a:p>
             <a:pPr lvl="1"/>
@@ -19007,6 +18875,7 @@
               <a:rPr lang="en-US" altLang="zh-CN" dirty="0" smtClean="0"/>
               <a:t>? </a:t>
             </a:r>
+            <a:endParaRPr lang="en-US" altLang="zh-CN" dirty="0" smtClean="0"/>
           </a:p>
           <a:p>
             <a:r>
@@ -19017,6 +18886,7 @@
               <a:rPr lang="en-US" altLang="zh-CN" dirty="0" smtClean="0"/>
               <a:t>?</a:t>
             </a:r>
+            <a:endParaRPr lang="en-US" altLang="zh-CN" dirty="0" smtClean="0"/>
           </a:p>
           <a:p>
             <a:pPr lvl="1"/>
@@ -19033,11 +18903,6 @@
         </p:txBody>
       </p:sp>
     </p:spTree>
-    <p:extLst>
-      <p:ext uri="{BB962C8B-B14F-4D97-AF65-F5344CB8AC3E}">
-        <p14:creationId xmlns:p14="http://schemas.microsoft.com/office/powerpoint/2010/main" val="2010243271"/>
-      </p:ext>
-    </p:extLst>
   </p:cSld>
   <p:clrMapOvr>
     <a:masterClrMapping/>
@@ -19660,6 +19525,7 @@
               <a:rPr lang="zh-CN" altLang="en-US" dirty="0"/>
               <a:t>让学生自己构建</a:t>
             </a:r>
+            <a:endParaRPr lang="zh-CN" altLang="en-US" dirty="0"/>
           </a:p>
           <a:p>
             <a:r>
@@ -19698,6 +19564,7 @@
               <a:rPr lang="zh-CN" altLang="en-US" dirty="0"/>
               <a:t>喊口号的培训未必改变了人的认知模型</a:t>
             </a:r>
+            <a:endParaRPr lang="zh-CN" altLang="en-US" dirty="0"/>
           </a:p>
           <a:p>
             <a:r>
@@ -19732,6 +19599,7 @@
               <a:rPr lang="en-US" altLang="zh-CN" dirty="0"/>
               <a:t>,</a:t>
             </a:r>
+            <a:endParaRPr lang="en-US" altLang="zh-CN" dirty="0"/>
           </a:p>
           <a:p>
             <a:r>
@@ -19750,15 +19618,11 @@
               <a:rPr lang="zh-CN" altLang="en-US" dirty="0"/>
               <a:t>关键   </a:t>
             </a:r>
+            <a:endParaRPr lang="zh-CN" altLang="en-US" dirty="0"/>
           </a:p>
         </p:txBody>
       </p:sp>
     </p:spTree>
-    <p:extLst>
-      <p:ext uri="{BB962C8B-B14F-4D97-AF65-F5344CB8AC3E}">
-        <p14:creationId xmlns:p14="http://schemas.microsoft.com/office/powerpoint/2010/main" val="45561062"/>
-      </p:ext>
-    </p:extLst>
   </p:cSld>
   <p:clrMapOvr>
     <a:masterClrMapping/>
@@ -19845,15 +19709,12 @@
               <a:rPr lang="en-US" sz="2000" dirty="0" smtClean="0"/>
               <a:t>Body of knowledge (PSP)</a:t>
             </a:r>
+            <a:endParaRPr lang="en-US" sz="2000" dirty="0" smtClean="0"/>
           </a:p>
           <a:p>
             <a:r>
               <a:rPr lang="en-US" sz="2400" b="1" dirty="0" smtClean="0"/>
               <a:t>Process</a:t>
-            </a:r>
-            <a:r>
-              <a:rPr lang="en-US" sz="2400" dirty="0" smtClean="0"/>
-              <a:t/>
             </a:r>
             <a:br>
               <a:rPr lang="en-US" sz="2400" dirty="0" smtClean="0"/>
@@ -19870,6 +19731,7 @@
               <a:rPr lang="en-US" sz="2400" dirty="0" smtClean="0"/>
               <a:t> to PSP is the requirements; </a:t>
             </a:r>
+            <a:endParaRPr lang="en-US" sz="2400" dirty="0" smtClean="0"/>
           </a:p>
           <a:p>
             <a:pPr lvl="1"/>
@@ -19877,6 +19739,7 @@
               <a:rPr lang="en-US" sz="2000" dirty="0" smtClean="0"/>
               <a:t>requirement document is completed and delivered to the engineer.   </a:t>
             </a:r>
+            <a:endParaRPr lang="en-US" sz="2000" dirty="0" smtClean="0"/>
           </a:p>
           <a:p>
             <a:r>
@@ -19887,6 +19750,7 @@
               <a:rPr lang="en-US" sz="2400" dirty="0" smtClean="0"/>
               <a:t>: metrics telling how good an engineer is. </a:t>
             </a:r>
+            <a:endParaRPr lang="en-US" sz="2400" dirty="0" smtClean="0"/>
           </a:p>
           <a:p>
             <a:r>
@@ -19897,6 +19761,7 @@
               <a:rPr lang="en-US" sz="2400" dirty="0" smtClean="0"/>
               <a:t>has 3 phases:</a:t>
             </a:r>
+            <a:endParaRPr lang="en-US" sz="2400" dirty="0" smtClean="0"/>
           </a:p>
           <a:p>
             <a:pPr lvl="1"/>
@@ -19904,6 +19769,7 @@
               <a:rPr lang="en-US" sz="2000" dirty="0" smtClean="0"/>
               <a:t>planning, </a:t>
             </a:r>
+            <a:endParaRPr lang="en-US" sz="2000" dirty="0" smtClean="0"/>
           </a:p>
           <a:p>
             <a:pPr lvl="1"/>
@@ -19911,6 +19777,7 @@
               <a:rPr lang="en-US" sz="2000" dirty="0" smtClean="0"/>
               <a:t>development (design, coding, test) </a:t>
             </a:r>
+            <a:endParaRPr lang="en-US" sz="2000" dirty="0" smtClean="0"/>
           </a:p>
           <a:p>
             <a:pPr lvl="1"/>
@@ -19918,6 +19785,7 @@
               <a:rPr lang="en-US" sz="2000" dirty="0" smtClean="0"/>
               <a:t>postmortem. </a:t>
             </a:r>
+            <a:endParaRPr lang="en-US" sz="2000" dirty="0" smtClean="0"/>
           </a:p>
           <a:p>
             <a:r>
@@ -20025,6 +19893,7 @@
               <a:rPr lang="en-US" sz="2800" dirty="0" smtClean="0"/>
               <a:t>Adding </a:t>
             </a:r>
+            <a:endParaRPr lang="en-US" sz="2800" dirty="0" smtClean="0"/>
           </a:p>
           <a:p>
             <a:pPr lvl="1"/>
@@ -20044,6 +19913,7 @@
               <a:rPr lang="en-US" sz="2800" dirty="0" smtClean="0"/>
               <a:t>tandard</a:t>
             </a:r>
+            <a:endParaRPr lang="en-US" sz="2800" dirty="0" smtClean="0"/>
           </a:p>
           <a:p>
             <a:pPr lvl="1"/>
@@ -20051,6 +19921,7 @@
               <a:rPr lang="en-US" sz="2800" dirty="0" smtClean="0"/>
               <a:t>Size Measurement</a:t>
             </a:r>
+            <a:endParaRPr lang="en-US" sz="2800" dirty="0" smtClean="0"/>
           </a:p>
           <a:p>
             <a:pPr lvl="1"/>
@@ -20066,6 +19937,7 @@
               <a:rPr lang="en-US" sz="2800" dirty="0" smtClean="0"/>
               <a:t>lan (PIP) – engineer records ideas for improving his own process</a:t>
             </a:r>
+            <a:endParaRPr lang="en-US" sz="2800" dirty="0" smtClean="0"/>
           </a:p>
           <a:p>
             <a:r>
@@ -20076,6 +19948,11 @@
               </a:rPr>
               <a:t>Do you have these in your I-Project?</a:t>
             </a:r>
+            <a:endParaRPr lang="en-US" sz="3200" dirty="0" smtClean="0">
+              <a:solidFill>
+                <a:srgbClr val="FF0000"/>
+              </a:solidFill>
+            </a:endParaRPr>
           </a:p>
           <a:p>
             <a:endParaRPr lang="en-US" sz="4000" dirty="0"/>
@@ -20380,8 +20257,11 @@
       </a:bgFillStyleLst>
     </a:fmtScheme>
   </a:themeElements>
-  <a:objectDefaults/>
-  <a:extraClrSchemeLst/>
+  <a:extLst>
+    <a:ext uri="{05A4C25C-085E-4340-85A3-A5531E510DB2}">
+      <thm15:themeFamily xmlns:thm15="http://schemas.microsoft.com/office/thememl/2012/main" name="Office Theme" id="{62F939B6-93AF-4DB8-9C6B-D6C7DFDC589F}" vid="{4A3C46E8-61CC-4603-A589-7422A47A8E4A}"/>
+    </a:ext>
+  </a:extLst>
 </a:theme>
 </file>
 
@@ -20663,8 +20543,11 @@
       </a:bgFillStyleLst>
     </a:fmtScheme>
   </a:themeElements>
-  <a:objectDefaults/>
-  <a:extraClrSchemeLst/>
+  <a:extLst>
+    <a:ext uri="{05A4C25C-085E-4340-85A3-A5531E510DB2}">
+      <thm15:themeFamily xmlns:thm15="http://schemas.microsoft.com/office/thememl/2012/main" name="Office Theme" id="{62F939B6-93AF-4DB8-9C6B-D6C7DFDC589F}" vid="{4A3C46E8-61CC-4603-A589-7422A47A8E4A}"/>
+    </a:ext>
+  </a:extLst>
 </a:theme>
 </file>
 
@@ -20799,33 +20682,18 @@
 
 <file path=customXml/itemProps1.xml><?xml version="1.0" encoding="utf-8"?>
 <ds:datastoreItem xmlns:ds="http://schemas.openxmlformats.org/officeDocument/2006/customXml" ds:itemID="{AC38B70B-68EE-413F-8243-C962F94ACA64}">
-  <ds:schemaRefs>
-    <ds:schemaRef ds:uri="http://schemas.microsoft.com/office/2006/metadata/properties"/>
-    <ds:schemaRef ds:uri="http://schemas.microsoft.com/office/infopath/2007/PartnerControls"/>
-  </ds:schemaRefs>
+  <ds:schemaRefs/>
 </ds:datastoreItem>
 </file>
 
 <file path=customXml/itemProps2.xml><?xml version="1.0" encoding="utf-8"?>
 <ds:datastoreItem xmlns:ds="http://schemas.openxmlformats.org/officeDocument/2006/customXml" ds:itemID="{8768B0E8-F7C4-4929-B0A1-8ECCA4ABBF95}">
-  <ds:schemaRefs>
-    <ds:schemaRef ds:uri="http://schemas.microsoft.com/sharepoint/v3/contenttype/forms"/>
-  </ds:schemaRefs>
+  <ds:schemaRefs/>
 </ds:datastoreItem>
 </file>
 
 <file path=customXml/itemProps3.xml><?xml version="1.0" encoding="utf-8"?>
 <ds:datastoreItem xmlns:ds="http://schemas.openxmlformats.org/officeDocument/2006/customXml" ds:itemID="{B3B0C391-DDE3-4D99-8DB2-DCB9F2C70771}">
-  <ds:schemaRefs>
-    <ds:schemaRef ds:uri="http://schemas.microsoft.com/office/2006/metadata/contentType"/>
-    <ds:schemaRef ds:uri="http://schemas.microsoft.com/office/2006/metadata/properties/metaAttributes"/>
-    <ds:schemaRef ds:uri="http://www.w3.org/2001/XMLSchema"/>
-    <ds:schemaRef ds:uri="http://schemas.microsoft.com/office/2006/metadata/properties"/>
-    <ds:schemaRef ds:uri="http://schemas.openxmlformats.org/package/2006/metadata/core-properties"/>
-    <ds:schemaRef ds:uri="http://purl.org/dc/elements/1.1/"/>
-    <ds:schemaRef ds:uri="http://purl.org/dc/terms/"/>
-    <ds:schemaRef ds:uri="http://schemas.microsoft.com/internal/obd"/>
-    <ds:schemaRef ds:uri="http://schemas.microsoft.com/office/infopath/2007/PartnerControls"/>
-  </ds:schemaRefs>
+  <ds:schemaRefs/>
 </ds:datastoreItem>
 </file>